--- a/LLM_Feature_Engineering_Report.pptx
+++ b/LLM_Feature_Engineering_Report.pptx
@@ -4117,15 +4117,15 @@
               </a:defRPr>
             </a:pPr>
             <a:r>
-              <a:t>专家访谈 → 压缩</a:t>
-            </a:r>
-            <a:br/>
-            <a:r>
-              <a:t>识别点 → top-3/类</a:t>
-            </a:r>
-            <a:br/>
-            <a:r>
-              <a:t>总计 ~2800 token</a:t>
+              <a:t>8种交易模式说明(~1200)</a:t>
+            </a:r>
+            <a:br/>
+            <a:r>
+              <a:t>专家访谈+识别点(~1800)</a:t>
+            </a:r>
+            <a:br/>
+            <a:r>
+              <a:t>总计 ~4000 token</a:t>
             </a:r>
           </a:p>
         </p:txBody>
@@ -4732,7 +4732,7 @@
               </a:defRPr>
             </a:pPr>
             <a:r>
-              <a:t>~3900 token</a:t>
+              <a:t>~5100 token</a:t>
             </a:r>
             <a:br/>
             <a:r>
@@ -4740,7 +4740,7 @@
             </a:r>
             <a:br/>
             <a:r>
-              <a:t>8K 模型可容纳</a:t>
+              <a:t>16K+ 模型宽裕</a:t>
             </a:r>
           </a:p>
         </p:txBody>
@@ -4879,7 +4879,7 @@
               </a:defRPr>
             </a:pPr>
             <a:r>
-              <a:t>05 核心流程：Phase 1-2 进化搜索循环</a:t>
+              <a:t>05 核心流程：Phase 1-2 维度岛屿搜索循环</a:t>
             </a:r>
           </a:p>
         </p:txBody>
@@ -4914,7 +4914,7 @@
               </a:defRPr>
             </a:pPr>
             <a:r>
-              <a:t>3 岛屿 × 3 候选 × 最多 10 轮</a:t>
+              <a:t>4 维度岛屿 × 3 候选 × 最多 10 轮</a:t>
             </a:r>
           </a:p>
         </p:txBody>
@@ -5072,19 +5072,15 @@
               </a:defRPr>
             </a:pPr>
             <a:r>
-              <a:t>3 个岛屿各自：</a:t>
-            </a:r>
-            <a:br/>
-            <a:r>
-              <a:t>• Boltzmann 采样 k=2 示例</a:t>
-            </a:r>
-            <a:br/>
-            <a:r>
-              <a:t>• 构建 User Prompt</a:t>
-            </a:r>
-            <a:br/>
-            <a:r>
-              <a:t>  (SHAP + 示例 + 失败记录)</a:t>
+              <a:t>4 个维度岛屿各自：</a:t>
+            </a:r>
+            <a:br/>
+            <a:r>
+              <a:t>• 金额/时间/行为/主体</a:t>
+            </a:r>
+            <a:br/>
+            <a:r>
+              <a:t>• Boltzmann采样 + 维度引导</a:t>
             </a:r>
             <a:br/>
             <a:r>
@@ -5092,7 +5088,7 @@
             </a:r>
             <a:br/>
             <a:r>
-              <a:t>→ 本轮共 9 个候选特征</a:t>
+              <a:t>→ 本轮共 12 个候选特征</a:t>
             </a:r>
           </a:p>
         </p:txBody>
@@ -5811,7 +5807,7 @@
               </a:defRPr>
             </a:pPr>
             <a:r>
-              <a:t>收敛判断：连续 2 轮无新特征通过接受条件 → 停止    |    SHAP 全局共享（搜索方向）+ Boltzmann 岛屿独立（搜索多样性）</a:t>
+              <a:t>收敛判断：连续 2 轮无新特征通过 → 停止    |    SHAP 全局共享 + 维度引导岛屿专属 + Boltzmann 岛屿独立</a:t>
             </a:r>
           </a:p>
         </p:txBody>
@@ -5846,7 +5842,7 @@
               </a:defRPr>
             </a:pPr>
             <a:r>
-              <a:t>关键参数：m=3 岛屿  |  b=3 候选/岛/轮  |  k=2 in-context 示例  |  T≤10 轮  |  最多 90 次 LLM 调用  |  β=0.01 接受容忍度</a:t>
+              <a:t>关键参数：m=4 维度岛屿  |  b=3 候选/岛/轮  |  k=2 示例  |  T&lt;=10 轮  |  最多 120 次 LLM 调用  |  beta=0.01</a:t>
             </a:r>
           </a:p>
         </p:txBody>
@@ -5985,7 +5981,7 @@
               </a:defRPr>
             </a:pPr>
             <a:r>
-              <a:t>05 SHAP 与岛屿进化的融合细节</a:t>
+              <a:t>05 维度岛屿与 SHAP 融合细节</a:t>
             </a:r>
           </a:p>
         </p:txBody>
@@ -6020,7 +6016,7 @@
               </a:defRPr>
             </a:pPr>
             <a:r>
-              <a:t>全局引导 + 局部多样性</a:t>
+              <a:t>维度分工 + 全局引导 + 局部多样性</a:t>
             </a:r>
           </a:p>
         </p:txBody>
@@ -6172,7 +6168,7 @@
             </a:r>
             <a:br/>
             <a:r>
-              <a:t>所有岛屿共享同一份 SHAP 反馈</a:t>
+              <a:t>所有岛屿共享 SHAP 反馈，弱势维度对应到具体岛屿</a:t>
             </a:r>
           </a:p>
         </p:txBody>
@@ -6250,7 +6246,7 @@
               </a:defRPr>
             </a:pPr>
             <a:r>
-              <a:t>2. 岛屿独立采样</a:t>
+              <a:t>2. 维度引导 + 岛屿独立采样</a:t>
             </a:r>
           </a:p>
         </p:txBody>
@@ -6285,11 +6281,11 @@
               </a:defRPr>
             </a:pPr>
             <a:r>
-              <a:t>每个岛屿独立 Boltzmann 采样 k=2 示例</a:t>
-            </a:r>
-            <a:br/>
-            <a:r>
-              <a:t>不同岛屿看到不同 in-context 示例 → 多样性</a:t>
+              <a:t>每个岛屿附加维度引导词(如'重点探索金额频次')</a:t>
+            </a:r>
+            <a:br/>
+            <a:r>
+              <a:t>Boltzmann 独立采样 k=2 示例 → 岛屿 prompt 不同</a:t>
             </a:r>
           </a:p>
         </p:txBody>
@@ -6367,7 +6363,7 @@
               </a:defRPr>
             </a:pPr>
             <a:r>
-              <a:t>3. Prompt = SHAP(共享) + 示例(独立) + 失败记忆(共享)</a:t>
+              <a:t>3. Prompt = 维度引导(专属) + SHAP(共享) + 示例(独立)</a:t>
             </a:r>
           </a:p>
         </p:txBody>
@@ -6402,11 +6398,11 @@
               </a:defRPr>
             </a:pPr>
             <a:r>
-              <a:t>User Prompt 三部分组合，每个岛屿的 prompt 不同</a:t>
-            </a:r>
-            <a:br/>
-            <a:r>
-              <a:t>因为 in-context 示例不同</a:t>
+              <a:t>User Prompt 三部分组合</a:t>
+            </a:r>
+            <a:br/>
+            <a:r>
+              <a:t>维度引导让 LLM 聚焦，SHAP 提供全局方向</a:t>
             </a:r>
           </a:p>
         </p:txBody>
@@ -6484,7 +6480,7 @@
               </a:defRPr>
             </a:pPr>
             <a:r>
-              <a:t>4. 岛屿间迁移</a:t>
+              <a:t>4. 跨维度迁移</a:t>
             </a:r>
           </a:p>
         </p:txBody>
@@ -6523,7 +6519,7 @@
             </a:r>
             <a:br/>
             <a:r>
-              <a:t>好特征传播，提高整体搜索质量</a:t>
+              <a:t>好经验跨维度传播，如金额发现启发主体关联</a:t>
             </a:r>
           </a:p>
         </p:txBody>
@@ -6638,47 +6634,47 @@
               </a:defRPr>
             </a:pPr>
             <a:r>
-              <a:t>问题：搜索效率 vs 搜索方向</a:t>
-            </a:r>
-            <a:br/>
-            <a:br/>
-            <a:r>
-              <a:t>• LLM-FE 原论文：多岛屿并行，搜索效率高</a:t>
-            </a:r>
-            <a:br/>
-            <a:r>
-              <a:t>  但搜索方向完全随机，靠运气</a:t>
-            </a:r>
-            <a:br/>
-            <a:br/>
-            <a:r>
-              <a:t>• MedFeat 原论文：SHAP 引导方向精准</a:t>
-            </a:r>
-            <a:br/>
-            <a:r>
-              <a:t>  但单线迭代，搜索效率低</a:t>
-            </a:r>
-            <a:br/>
-            <a:br/>
-            <a:r>
-              <a:t>我们的融合方案：</a:t>
-            </a:r>
-            <a:br/>
-            <a:r>
-              <a:t>✓ SHAP 全局共享 → 所有岛屿知道方向</a:t>
-            </a:r>
-            <a:br/>
-            <a:r>
-              <a:t>✓ Boltzmann 独立 → 各岛屿保持多样性</a:t>
-            </a:r>
-            <a:br/>
-            <a:r>
-              <a:t>✓ 迁移最优 → 好经验快速传播</a:t>
-            </a:r>
-            <a:br/>
-            <a:br/>
-            <a:r>
-              <a:t>= 高效 + 有方向 + 多样性</a:t>
+              <a:t>三层改进：</a:t>
+            </a:r>
+            <a:br/>
+            <a:br/>
+            <a:r>
+              <a:t>1. 维度划分（我们的改进）</a:t>
+            </a:r>
+            <a:br/>
+            <a:r>
+              <a:t>   原论文岛屿随机分组 → 我们按风险维度分</a:t>
+            </a:r>
+            <a:br/>
+            <a:r>
+              <a:t>   金额频次 / 时间地域 / 行为序列 / 主体关联</a:t>
+            </a:r>
+            <a:br/>
+            <a:br/>
+            <a:r>
+              <a:t>2. SHAP 全局引导（MedFeat）</a:t>
+            </a:r>
+            <a:br/>
+            <a:r>
+              <a:t>   弱势维度 → 对应岛屿加强探索</a:t>
+            </a:r>
+            <a:br/>
+            <a:br/>
+            <a:r>
+              <a:t>3. 交易模式说明（浦发文档）</a:t>
+            </a:r>
+            <a:br/>
+            <a:r>
+              <a:t>   LLM 知道每种风险模式的参数</a:t>
+            </a:r>
+            <a:br/>
+            <a:r>
+              <a:t>   → 精准构造交叉特征</a:t>
+            </a:r>
+            <a:br/>
+            <a:br/>
+            <a:r>
+              <a:t>= 高效 + 有方向 + 有分工</a:t>
             </a:r>
           </a:p>
         </p:txBody>
@@ -6887,7 +6883,7 @@
               </a:defRPr>
             </a:pPr>
             <a:r>
-              <a:t>System Prompt（固定, ~3900 token）</a:t>
+              <a:t>System Prompt（固定, ~5100 token）</a:t>
             </a:r>
           </a:p>
         </p:txBody>
@@ -6989,6 +6985,15 @@
             <a:br/>
             <a:br/>
             <a:r>
+              <a:t>## 交易模式说明（浦发，~1200 token）</a:t>
+            </a:r>
+            <a:br/>
+            <a:r>
+              <a:t>3 种正常模式 + 5 种风险模式的详细参数</a:t>
+            </a:r>
+            <a:br/>
+            <a:br/>
+            <a:r>
               <a:t>## 领域知识</a:t>
             </a:r>
             <a:br/>
@@ -7016,10 +7021,6 @@
             <a:br/>
             <a:r>
               <a:t>30s 执行 / 白名单模块 / 禁用标签列</a:t>
-            </a:r>
-            <a:br/>
-            <a:r>
-              <a:t>不引用不存在的字段 / 有区分度</a:t>
             </a:r>
           </a:p>
         </p:txBody>
@@ -7138,19 +7139,23 @@
             </a:r>
             <a:br/>
             <a:r>
-              <a:t>• 上轮最佳特征 top-3（代码 + score）</a:t>
-            </a:r>
-            <a:br/>
-            <a:r>
-              <a:t>• SHAP 分析：top-10 特征 + 弱势维度</a:t>
-            </a:r>
-            <a:br/>
-            <a:r>
-              <a:t>• 上轮失败特征 + 失败原因</a:t>
-            </a:r>
-            <a:br/>
-            <a:r>
-              <a:t>• 请求：生成 3 个新特征（不同维度）</a:t>
+              <a:t>• 维度引导词(岛屿专属方向)</a:t>
+            </a:r>
+            <a:br/>
+            <a:r>
+              <a:t>• 上轮最佳特征 top-3</a:t>
+            </a:r>
+            <a:br/>
+            <a:r>
+              <a:t>• SHAP：top-10 + 弱势维度</a:t>
+            </a:r>
+            <a:br/>
+            <a:r>
+              <a:t>• 上轮失败特征 + 原因</a:t>
+            </a:r>
+            <a:br/>
+            <a:r>
+              <a:t>• 生成 3 个本维度新特征</a:t>
             </a:r>
           </a:p>
         </p:txBody>
@@ -7234,23 +7239,19 @@
             </a:r>
             <a:br/>
             <a:r>
-              <a:t>• 无 SHAP 反馈（还没有训练过模型）</a:t>
-            </a:r>
-            <a:br/>
-            <a:r>
-              <a:t>• 用 15 条种子规则转的 Python 示例</a:t>
-            </a:r>
-            <a:br/>
-            <a:r>
-              <a:t>  作为 in-context 示例</a:t>
-            </a:r>
-            <a:br/>
-            <a:r>
-              <a:t>• 引导：参考 4 类洗钱模式，</a:t>
-            </a:r>
-            <a:br/>
-            <a:r>
-              <a:t>  从最有价值的角度出发</a:t>
+              <a:t>• 无 SHAP 反馈（首轮）</a:t>
+            </a:r>
+            <a:br/>
+            <a:r>
+              <a:t>• 维度引导词 + 种子规则示例</a:t>
+            </a:r>
+            <a:br/>
+            <a:r>
+              <a:t>• 参考交易模式说明 + 洗钱模式</a:t>
+            </a:r>
+            <a:br/>
+            <a:r>
+              <a:t>• 围绕本岛屿维度出发</a:t>
             </a:r>
           </a:p>
         </p:txBody>
@@ -7285,7 +7286,7 @@
               </a:defRPr>
             </a:pPr>
             <a:r>
-              <a:t>总计 ~5400 token  →  8K context 模型可容纳  |  32K+ 模型可放入更多识别点原文和示例</a:t>
+              <a:t>总计 ~6600 token  →  16K+ context 宽裕  |  8K 可压缩识别点(36-&gt;18条)降至 ~5600  |  32K+ 可放入更多原文</a:t>
             </a:r>
           </a:p>
         </p:txBody>
@@ -11021,11 +11022,11 @@
               </a:defRPr>
             </a:pPr>
             <a:r>
-              <a:t>领域知识增强的</a:t>
-            </a:r>
-            <a:br/>
-            <a:r>
-              <a:t>LLM 特征工程</a:t>
+              <a:t>领域知识+交易模式</a:t>
+            </a:r>
+            <a:br/>
+            <a:r>
+              <a:t>增强的LLM特征工程</a:t>
             </a:r>
           </a:p>
         </p:txBody>
@@ -11060,7 +11061,7 @@
               </a:defRPr>
             </a:pPr>
             <a:r>
-              <a:t>首次将结构化专家知识（邮储访谈 + 200+ 识别点 + 监管规则）系统性注入 LLM 特征生成流程。</a:t>
+              <a:t>首次将专家知识 + 数据集交易模式说明（8种模式详细参数）系统性注入 LLM 特征生成。</a:t>
             </a:r>
             <a:br/>
             <a:r>
@@ -11419,11 +11420,11 @@
               </a:defRPr>
             </a:pPr>
             <a:r>
-              <a:t>进化搜索 +</a:t>
-            </a:r>
-            <a:br/>
-            <a:r>
-              <a:t>SHAP 引导融合</a:t>
+              <a:t>维度岛屿</a:t>
+            </a:r>
+            <a:br/>
+            <a:r>
+              <a:t>进化搜索</a:t>
             </a:r>
           </a:p>
         </p:txBody>
@@ -11458,11 +11459,11 @@
               </a:defRPr>
             </a:pPr>
             <a:r>
-              <a:t>结合 LLM-FE 的多岛屿搜索效率和 MedFeat 的 SHAP 方向引导，</a:t>
-            </a:r>
-            <a:br/>
-            <a:r>
-              <a:t>在已有 40+ 人工特征基线上发现增量贡献。</a:t>
+              <a:t>改进 LLM-FE 的随机岛屿为按风险维度划分的 4 岛屿（金额/时间/行为/主体），</a:t>
+            </a:r>
+            <a:br/>
+            <a:r>
+              <a:t>结合 SHAP 引导，实现高效 + 有方向 + 有分工的搜索。原论文岛屿无差异化。</a:t>
             </a:r>
           </a:p>
         </p:txBody>
@@ -12723,7 +12724,7 @@
             </a:r>
             <a:br/>
             <a:r>
-              <a:t>• LLM 调用成本：最多 90 次调用，API $5-15 / 本地 ~45min，整个流程 1-2 小时可完成</a:t>
+              <a:t>• LLM 调用成本：最多 120 次调用，API $7-20 / 本地 ~60min，整个流程 1-2 小时可完成</a:t>
             </a:r>
           </a:p>
         </p:txBody>
@@ -15759,7 +15760,7 @@
               </a:defRPr>
             </a:pPr>
             <a:r>
-              <a:t>岛屿数据结构</a:t>
+              <a:t>4维度岛屿结构</a:t>
             </a:r>
           </a:p>
           <a:p>
@@ -15774,7 +15775,7 @@
               </a:defRPr>
             </a:pPr>
             <a:r>
-              <a:t>Boltzmann 采样</a:t>
+              <a:t>Boltzmann + 维度引导</a:t>
             </a:r>
           </a:p>
           <a:p>
@@ -15804,7 +15805,7 @@
               </a:defRPr>
             </a:pPr>
             <a:r>
-              <a:t>冷启动 + 迁移</a:t>
+              <a:t>冷启动 + 跨维度迁移</a:t>
             </a:r>
           </a:p>
           <a:p>
@@ -18655,7 +18656,7 @@
               </a:defRPr>
             </a:pPr>
             <a:r>
-              <a:t>02 SimECNY 编程的异常模式（不告诉 LLM）</a:t>
+              <a:t>02 数据集 8 种交易模式（注入 LLM Prompt）</a:t>
             </a:r>
           </a:p>
         </p:txBody>
@@ -18690,21 +18691,460 @@
               </a:defRPr>
             </a:pPr>
             <a:r>
-              <a:t>用于验证 LLM 是否能自行发现这些模式</a:t>
-            </a:r>
-          </a:p>
-        </p:txBody>
-      </p:sp>
-      <p:sp>
-        <p:nvSpPr>
-          <p:cNvPr id="5" name="Rounded Rectangle 4"/>
+              <a:t>浦发提供的数据集说明文档，作为领域知识注入</a:t>
+            </a:r>
+          </a:p>
+        </p:txBody>
+      </p:sp>
+      <p:sp>
+        <p:nvSpPr>
+          <p:cNvPr id="5" name="TextBox 4"/>
+          <p:cNvSpPr txBox="1"/>
+          <p:nvPr/>
+        </p:nvSpPr>
+        <p:spPr>
+          <a:xfrm>
+            <a:off x="457200" y="1280160"/>
+            <a:ext cx="5486400" cy="365760"/>
+          </a:xfrm>
+          <a:prstGeom prst="rect">
+            <a:avLst/>
+          </a:prstGeom>
+          <a:noFill/>
+        </p:spPr>
+        <p:txBody>
+          <a:bodyPr wrap="square">
+            <a:spAutoFit/>
+          </a:bodyPr>
+          <a:lstStyle/>
+          <a:p>
+            <a:pPr algn="l">
+              <a:defRPr sz="1800" b="1">
+                <a:solidFill>
+                  <a:srgbClr val="2ECC71"/>
+                </a:solidFill>
+              </a:defRPr>
+            </a:pPr>
+            <a:r>
+              <a:t>正常交易模式（3 种）</a:t>
+            </a:r>
+          </a:p>
+        </p:txBody>
+      </p:sp>
+      <p:sp>
+        <p:nvSpPr>
+          <p:cNvPr id="6" name="Rounded Rectangle 5"/>
           <p:cNvSpPr/>
           <p:nvPr/>
         </p:nvSpPr>
         <p:spPr>
           <a:xfrm>
-            <a:off x="457200" y="1371600"/>
-            <a:ext cx="3566160" cy="1508760"/>
+            <a:off x="457200" y="1645920"/>
+            <a:ext cx="3566160" cy="1371600"/>
+          </a:xfrm>
+          <a:prstGeom prst="roundRect">
+            <a:avLst/>
+          </a:prstGeom>
+          <a:solidFill>
+            <a:srgbClr val="FFFFFF"/>
+          </a:solidFill>
+          <a:ln w="12700">
+            <a:solidFill>
+              <a:srgbClr val="2ECC71"/>
+            </a:solidFill>
+          </a:ln>
+        </p:spPr>
+        <p:style>
+          <a:lnRef idx="1">
+            <a:schemeClr val="accent1"/>
+          </a:lnRef>
+          <a:fillRef idx="3">
+            <a:schemeClr val="accent1"/>
+          </a:fillRef>
+          <a:effectRef idx="2">
+            <a:schemeClr val="accent1"/>
+          </a:effectRef>
+          <a:fontRef idx="minor">
+            <a:schemeClr val="lt1"/>
+          </a:fontRef>
+        </p:style>
+        <p:txBody>
+          <a:bodyPr rtlCol="0" anchor="ctr"/>
+          <a:lstStyle/>
+          <a:p>
+            <a:pPr algn="ctr"/>
+          </a:p>
+        </p:txBody>
+      </p:sp>
+      <p:sp>
+        <p:nvSpPr>
+          <p:cNvPr id="7" name="TextBox 6"/>
+          <p:cNvSpPr txBox="1"/>
+          <p:nvPr/>
+        </p:nvSpPr>
+        <p:spPr>
+          <a:xfrm>
+            <a:off x="594360" y="1691640"/>
+            <a:ext cx="3291840" cy="320040"/>
+          </a:xfrm>
+          <a:prstGeom prst="rect">
+            <a:avLst/>
+          </a:prstGeom>
+          <a:noFill/>
+        </p:spPr>
+        <p:txBody>
+          <a:bodyPr wrap="square">
+            <a:spAutoFit/>
+          </a:bodyPr>
+          <a:lstStyle/>
+          <a:p>
+            <a:pPr algn="l">
+              <a:defRPr sz="1400" b="1">
+                <a:solidFill>
+                  <a:srgbClr val="2ECC71"/>
+                </a:solidFill>
+              </a:defRPr>
+            </a:pPr>
+            <a:r>
+              <a:t>single_transaction</a:t>
+            </a:r>
+          </a:p>
+        </p:txBody>
+      </p:sp>
+      <p:sp>
+        <p:nvSpPr>
+          <p:cNvPr id="8" name="TextBox 7"/>
+          <p:cNvSpPr txBox="1"/>
+          <p:nvPr/>
+        </p:nvSpPr>
+        <p:spPr>
+          <a:xfrm>
+            <a:off x="594360" y="2057400"/>
+            <a:ext cx="3291840" cy="868680"/>
+          </a:xfrm>
+          <a:prstGeom prst="rect">
+            <a:avLst/>
+          </a:prstGeom>
+          <a:noFill/>
+        </p:spPr>
+        <p:txBody>
+          <a:bodyPr wrap="square">
+            <a:spAutoFit/>
+          </a:bodyPr>
+          <a:lstStyle/>
+          <a:p>
+            <a:pPr algn="l">
+              <a:defRPr sz="1300" b="0">
+                <a:solidFill>
+                  <a:srgbClr val="2C3E50"/>
+                </a:solidFill>
+              </a:defRPr>
+            </a:pPr>
+            <a:r>
+              <a:t>金额 1-5000 元</a:t>
+            </a:r>
+            <a:br/>
+            <a:r>
+              <a:t>高峰(9-11,14-16,19-21点)</a:t>
+            </a:r>
+            <a:br/>
+            <a:r>
+              <a:t>70%单笔 30%转发</a:t>
+            </a:r>
+          </a:p>
+        </p:txBody>
+      </p:sp>
+      <p:sp>
+        <p:nvSpPr>
+          <p:cNvPr id="9" name="Rounded Rectangle 8"/>
+          <p:cNvSpPr/>
+          <p:nvPr/>
+        </p:nvSpPr>
+        <p:spPr>
+          <a:xfrm>
+            <a:off x="4297680" y="1645920"/>
+            <a:ext cx="3566160" cy="1371600"/>
+          </a:xfrm>
+          <a:prstGeom prst="roundRect">
+            <a:avLst/>
+          </a:prstGeom>
+          <a:solidFill>
+            <a:srgbClr val="FFFFFF"/>
+          </a:solidFill>
+          <a:ln w="12700">
+            <a:solidFill>
+              <a:srgbClr val="2ECC71"/>
+            </a:solidFill>
+          </a:ln>
+        </p:spPr>
+        <p:style>
+          <a:lnRef idx="1">
+            <a:schemeClr val="accent1"/>
+          </a:lnRef>
+          <a:fillRef idx="3">
+            <a:schemeClr val="accent1"/>
+          </a:fillRef>
+          <a:effectRef idx="2">
+            <a:schemeClr val="accent1"/>
+          </a:effectRef>
+          <a:fontRef idx="minor">
+            <a:schemeClr val="lt1"/>
+          </a:fontRef>
+        </p:style>
+        <p:txBody>
+          <a:bodyPr rtlCol="0" anchor="ctr"/>
+          <a:lstStyle/>
+          <a:p>
+            <a:pPr algn="ctr"/>
+          </a:p>
+        </p:txBody>
+      </p:sp>
+      <p:sp>
+        <p:nvSpPr>
+          <p:cNvPr id="10" name="TextBox 9"/>
+          <p:cNvSpPr txBox="1"/>
+          <p:nvPr/>
+        </p:nvSpPr>
+        <p:spPr>
+          <a:xfrm>
+            <a:off x="4434840" y="1691640"/>
+            <a:ext cx="3291840" cy="320040"/>
+          </a:xfrm>
+          <a:prstGeom prst="rect">
+            <a:avLst/>
+          </a:prstGeom>
+          <a:noFill/>
+        </p:spPr>
+        <p:txBody>
+          <a:bodyPr wrap="square">
+            <a:spAutoFit/>
+          </a:bodyPr>
+          <a:lstStyle/>
+          <a:p>
+            <a:pPr algn="l">
+              <a:defRPr sz="1400" b="1">
+                <a:solidFill>
+                  <a:srgbClr val="2ECC71"/>
+                </a:solidFill>
+              </a:defRPr>
+            </a:pPr>
+            <a:r>
+              <a:t>normal_small_high_freq</a:t>
+            </a:r>
+          </a:p>
+        </p:txBody>
+      </p:sp>
+      <p:sp>
+        <p:nvSpPr>
+          <p:cNvPr id="11" name="TextBox 10"/>
+          <p:cNvSpPr txBox="1"/>
+          <p:nvPr/>
+        </p:nvSpPr>
+        <p:spPr>
+          <a:xfrm>
+            <a:off x="4434840" y="2057400"/>
+            <a:ext cx="3291840" cy="868680"/>
+          </a:xfrm>
+          <a:prstGeom prst="rect">
+            <a:avLst/>
+          </a:prstGeom>
+          <a:noFill/>
+        </p:spPr>
+        <p:txBody>
+          <a:bodyPr wrap="square">
+            <a:spAutoFit/>
+          </a:bodyPr>
+          <a:lstStyle/>
+          <a:p>
+            <a:pPr algn="l">
+              <a:defRPr sz="1300" b="0">
+                <a:solidFill>
+                  <a:srgbClr val="2C3E50"/>
+                </a:solidFill>
+              </a:defRPr>
+            </a:pPr>
+            <a:r>
+              <a:t>金额 1-100 元</a:t>
+            </a:r>
+            <a:br/>
+            <a:r>
+              <a:t>日常消费</a:t>
+            </a:r>
+            <a:br/>
+            <a:r>
+              <a:t>各模式各 20%</a:t>
+            </a:r>
+          </a:p>
+        </p:txBody>
+      </p:sp>
+      <p:sp>
+        <p:nvSpPr>
+          <p:cNvPr id="12" name="Rounded Rectangle 11"/>
+          <p:cNvSpPr/>
+          <p:nvPr/>
+        </p:nvSpPr>
+        <p:spPr>
+          <a:xfrm>
+            <a:off x="8138160" y="1645920"/>
+            <a:ext cx="3566160" cy="1371600"/>
+          </a:xfrm>
+          <a:prstGeom prst="roundRect">
+            <a:avLst/>
+          </a:prstGeom>
+          <a:solidFill>
+            <a:srgbClr val="FFFFFF"/>
+          </a:solidFill>
+          <a:ln w="12700">
+            <a:solidFill>
+              <a:srgbClr val="2ECC71"/>
+            </a:solidFill>
+          </a:ln>
+        </p:spPr>
+        <p:style>
+          <a:lnRef idx="1">
+            <a:schemeClr val="accent1"/>
+          </a:lnRef>
+          <a:fillRef idx="3">
+            <a:schemeClr val="accent1"/>
+          </a:fillRef>
+          <a:effectRef idx="2">
+            <a:schemeClr val="accent1"/>
+          </a:effectRef>
+          <a:fontRef idx="minor">
+            <a:schemeClr val="lt1"/>
+          </a:fontRef>
+        </p:style>
+        <p:txBody>
+          <a:bodyPr rtlCol="0" anchor="ctr"/>
+          <a:lstStyle/>
+          <a:p>
+            <a:pPr algn="ctr"/>
+          </a:p>
+        </p:txBody>
+      </p:sp>
+      <p:sp>
+        <p:nvSpPr>
+          <p:cNvPr id="13" name="TextBox 12"/>
+          <p:cNvSpPr txBox="1"/>
+          <p:nvPr/>
+        </p:nvSpPr>
+        <p:spPr>
+          <a:xfrm>
+            <a:off x="8275320" y="1691640"/>
+            <a:ext cx="3291840" cy="320040"/>
+          </a:xfrm>
+          <a:prstGeom prst="rect">
+            <a:avLst/>
+          </a:prstGeom>
+          <a:noFill/>
+        </p:spPr>
+        <p:txBody>
+          <a:bodyPr wrap="square">
+            <a:spAutoFit/>
+          </a:bodyPr>
+          <a:lstStyle/>
+          <a:p>
+            <a:pPr algn="l">
+              <a:defRPr sz="1400" b="1">
+                <a:solidFill>
+                  <a:srgbClr val="2ECC71"/>
+                </a:solidFill>
+              </a:defRPr>
+            </a:pPr>
+            <a:r>
+              <a:t>regular_large_low_freq</a:t>
+            </a:r>
+          </a:p>
+        </p:txBody>
+      </p:sp>
+      <p:sp>
+        <p:nvSpPr>
+          <p:cNvPr id="14" name="TextBox 13"/>
+          <p:cNvSpPr txBox="1"/>
+          <p:nvPr/>
+        </p:nvSpPr>
+        <p:spPr>
+          <a:xfrm>
+            <a:off x="8275320" y="2057400"/>
+            <a:ext cx="3291840" cy="868680"/>
+          </a:xfrm>
+          <a:prstGeom prst="rect">
+            <a:avLst/>
+          </a:prstGeom>
+          <a:noFill/>
+        </p:spPr>
+        <p:txBody>
+          <a:bodyPr wrap="square">
+            <a:spAutoFit/>
+          </a:bodyPr>
+          <a:lstStyle/>
+          <a:p>
+            <a:pPr algn="l">
+              <a:defRPr sz="1300" b="0">
+                <a:solidFill>
+                  <a:srgbClr val="2C3E50"/>
+                </a:solidFill>
+              </a:defRPr>
+            </a:pPr>
+            <a:r>
+              <a:t>金额 100-1000 元</a:t>
+            </a:r>
+            <a:br/>
+            <a:r>
+              <a:t>间隔 1H-3天</a:t>
+            </a:r>
+            <a:br/>
+            <a:r>
+              <a:t>偏向商户钱包</a:t>
+            </a:r>
+          </a:p>
+        </p:txBody>
+      </p:sp>
+      <p:sp>
+        <p:nvSpPr>
+          <p:cNvPr id="15" name="TextBox 14"/>
+          <p:cNvSpPr txBox="1"/>
+          <p:nvPr/>
+        </p:nvSpPr>
+        <p:spPr>
+          <a:xfrm>
+            <a:off x="457200" y="3200400"/>
+            <a:ext cx="5486400" cy="365760"/>
+          </a:xfrm>
+          <a:prstGeom prst="rect">
+            <a:avLst/>
+          </a:prstGeom>
+          <a:noFill/>
+        </p:spPr>
+        <p:txBody>
+          <a:bodyPr wrap="square">
+            <a:spAutoFit/>
+          </a:bodyPr>
+          <a:lstStyle/>
+          <a:p>
+            <a:pPr algn="l">
+              <a:defRPr sz="1800" b="1">
+                <a:solidFill>
+                  <a:srgbClr val="E74C3C"/>
+                </a:solidFill>
+              </a:defRPr>
+            </a:pPr>
+            <a:r>
+              <a:t>风险交易模式（5 种）</a:t>
+            </a:r>
+          </a:p>
+        </p:txBody>
+      </p:sp>
+      <p:sp>
+        <p:nvSpPr>
+          <p:cNvPr id="16" name="Rounded Rectangle 15"/>
+          <p:cNvSpPr/>
+          <p:nvPr/>
+        </p:nvSpPr>
+        <p:spPr>
+          <a:xfrm>
+            <a:off x="457200" y="3566160"/>
+            <a:ext cx="3566160" cy="1371600"/>
           </a:xfrm>
           <a:prstGeom prst="roundRect">
             <a:avLst/>
@@ -18742,14 +19182,14 @@
       </p:sp>
       <p:sp>
         <p:nvSpPr>
-          <p:cNvPr id="6" name="TextBox 5"/>
-          <p:cNvSpPr txBox="1"/>
-          <p:nvPr/>
-        </p:nvSpPr>
-        <p:spPr>
-          <a:xfrm>
-            <a:off x="640080" y="1481328"/>
-            <a:ext cx="3200400" cy="365760"/>
+          <p:cNvPr id="17" name="TextBox 16"/>
+          <p:cNvSpPr txBox="1"/>
+          <p:nvPr/>
+        </p:nvSpPr>
+        <p:spPr>
+          <a:xfrm>
+            <a:off x="594360" y="3611880"/>
+            <a:ext cx="3291840" cy="320040"/>
           </a:xfrm>
           <a:prstGeom prst="rect">
             <a:avLst/>
@@ -18763,28 +19203,28 @@
           <a:lstStyle/>
           <a:p>
             <a:pPr algn="l">
-              <a:defRPr sz="1600" b="1">
+              <a:defRPr sz="1400" b="1">
                 <a:solidFill>
                   <a:srgbClr val="E74C3C"/>
                 </a:solidFill>
               </a:defRPr>
             </a:pPr>
             <a:r>
-              <a:t>身份证/手机号复用</a:t>
-            </a:r>
-          </a:p>
-        </p:txBody>
-      </p:sp>
-      <p:sp>
-        <p:nvSpPr>
-          <p:cNvPr id="7" name="TextBox 6"/>
-          <p:cNvSpPr txBox="1"/>
-          <p:nvPr/>
-        </p:nvSpPr>
-        <p:spPr>
-          <a:xfrm>
-            <a:off x="640080" y="1874520"/>
-            <a:ext cx="3200400" cy="914400"/>
+              <a:t>small_amount_testing</a:t>
+            </a:r>
+          </a:p>
+        </p:txBody>
+      </p:sp>
+      <p:sp>
+        <p:nvSpPr>
+          <p:cNvPr id="18" name="TextBox 17"/>
+          <p:cNvSpPr txBox="1"/>
+          <p:nvPr/>
+        </p:nvSpPr>
+        <p:spPr>
+          <a:xfrm>
+            <a:off x="594360" y="3950208"/>
+            <a:ext cx="3291840" cy="914400"/>
           </a:xfrm>
           <a:prstGeom prst="rect">
             <a:avLst/>
@@ -18798,32 +19238,36 @@
           <a:lstStyle/>
           <a:p>
             <a:pPr algn="l">
-              <a:defRPr sz="1400" b="0">
+              <a:defRPr sz="1300" b="0">
                 <a:solidFill>
                   <a:srgbClr val="2C3E50"/>
                 </a:solidFill>
               </a:defRPr>
             </a:pPr>
             <a:r>
-              <a:t>异常钱包 90% 共享身份证</a:t>
-            </a:r>
-            <a:br/>
-            <a:r>
-              <a:t>（正常仅 5%）</a:t>
-            </a:r>
-          </a:p>
-        </p:txBody>
-      </p:sp>
-      <p:sp>
-        <p:nvSpPr>
-          <p:cNvPr id="8" name="Rounded Rectangle 7"/>
+              <a:t>金额 0.01-0.1 元，深夜</a:t>
+            </a:r>
+            <a:br/>
+            <a:r>
+              <a:t>休眠账户(&gt;=90天)突然激活</a:t>
+            </a:r>
+            <a:br/>
+            <a:r>
+              <a:t>40%扇入 60%扇出</a:t>
+            </a:r>
+          </a:p>
+        </p:txBody>
+      </p:sp>
+      <p:sp>
+        <p:nvSpPr>
+          <p:cNvPr id="19" name="Rounded Rectangle 18"/>
           <p:cNvSpPr/>
           <p:nvPr/>
         </p:nvSpPr>
         <p:spPr>
           <a:xfrm>
-            <a:off x="4297680" y="1371600"/>
-            <a:ext cx="3566160" cy="1508760"/>
+            <a:off x="4297680" y="3566160"/>
+            <a:ext cx="3566160" cy="1371600"/>
           </a:xfrm>
           <a:prstGeom prst="roundRect">
             <a:avLst/>
@@ -18861,14 +19305,14 @@
       </p:sp>
       <p:sp>
         <p:nvSpPr>
-          <p:cNvPr id="9" name="TextBox 8"/>
-          <p:cNvSpPr txBox="1"/>
-          <p:nvPr/>
-        </p:nvSpPr>
-        <p:spPr>
-          <a:xfrm>
-            <a:off x="4480560" y="1481328"/>
-            <a:ext cx="3200400" cy="365760"/>
+          <p:cNvPr id="20" name="TextBox 19"/>
+          <p:cNvSpPr txBox="1"/>
+          <p:nvPr/>
+        </p:nvSpPr>
+        <p:spPr>
+          <a:xfrm>
+            <a:off x="4434840" y="3611880"/>
+            <a:ext cx="3291840" cy="320040"/>
           </a:xfrm>
           <a:prstGeom prst="rect">
             <a:avLst/>
@@ -18882,28 +19326,28 @@
           <a:lstStyle/>
           <a:p>
             <a:pPr algn="l">
-              <a:defRPr sz="1600" b="1">
+              <a:defRPr sz="1400" b="1">
                 <a:solidFill>
                   <a:srgbClr val="E74C3C"/>
                 </a:solidFill>
               </a:defRPr>
             </a:pPr>
             <a:r>
-              <a:t>高风险地区集中</a:t>
-            </a:r>
-          </a:p>
-        </p:txBody>
-      </p:sp>
-      <p:sp>
-        <p:nvSpPr>
-          <p:cNvPr id="10" name="TextBox 9"/>
-          <p:cNvSpPr txBox="1"/>
-          <p:nvPr/>
-        </p:nvSpPr>
-        <p:spPr>
-          <a:xfrm>
-            <a:off x="4480560" y="1874520"/>
-            <a:ext cx="3200400" cy="914400"/>
+              <a:t>merchant_laundering</a:t>
+            </a:r>
+          </a:p>
+        </p:txBody>
+      </p:sp>
+      <p:sp>
+        <p:nvSpPr>
+          <p:cNvPr id="21" name="TextBox 20"/>
+          <p:cNvSpPr txBox="1"/>
+          <p:nvPr/>
+        </p:nvSpPr>
+        <p:spPr>
+          <a:xfrm>
+            <a:off x="4434840" y="3950208"/>
+            <a:ext cx="3291840" cy="914400"/>
           </a:xfrm>
           <a:prstGeom prst="rect">
             <a:avLst/>
@@ -18917,32 +19361,36 @@
           <a:lstStyle/>
           <a:p>
             <a:pPr algn="l">
-              <a:defRPr sz="1400" b="0">
+              <a:defRPr sz="1300" b="0">
                 <a:solidFill>
                   <a:srgbClr val="2C3E50"/>
                 </a:solidFill>
               </a:defRPr>
             </a:pPr>
             <a:r>
-              <a:t>异常钱包 70% 在</a:t>
-            </a:r>
-            <a:br/>
-            <a:r>
-              <a:t>西藏/新疆地区</a:t>
-            </a:r>
-          </a:p>
-        </p:txBody>
-      </p:sp>
-      <p:sp>
-        <p:nvSpPr>
-          <p:cNvPr id="11" name="Rounded Rectangle 10"/>
+              <a:t>金额 10-1000 元，仅商户钱包</a:t>
+            </a:r>
+            <a:br/>
+            <a:r>
+              <a:t>跨行90%，同地区80%</a:t>
+            </a:r>
+            <a:br/>
+            <a:r>
+              <a:t>佣金 7-9%</a:t>
+            </a:r>
+          </a:p>
+        </p:txBody>
+      </p:sp>
+      <p:sp>
+        <p:nvSpPr>
+          <p:cNvPr id="22" name="Rounded Rectangle 21"/>
           <p:cNvSpPr/>
           <p:nvPr/>
         </p:nvSpPr>
         <p:spPr>
           <a:xfrm>
-            <a:off x="8138160" y="1371600"/>
-            <a:ext cx="3566160" cy="1508760"/>
+            <a:off x="8138160" y="3566160"/>
+            <a:ext cx="3566160" cy="1371600"/>
           </a:xfrm>
           <a:prstGeom prst="roundRect">
             <a:avLst/>
@@ -18980,14 +19428,14 @@
       </p:sp>
       <p:sp>
         <p:nvSpPr>
-          <p:cNvPr id="12" name="TextBox 11"/>
-          <p:cNvSpPr txBox="1"/>
-          <p:nvPr/>
-        </p:nvSpPr>
-        <p:spPr>
-          <a:xfrm>
-            <a:off x="8321040" y="1481328"/>
-            <a:ext cx="3200400" cy="365760"/>
+          <p:cNvPr id="23" name="TextBox 22"/>
+          <p:cNvSpPr txBox="1"/>
+          <p:nvPr/>
+        </p:nvSpPr>
+        <p:spPr>
+          <a:xfrm>
+            <a:off x="8275320" y="3611880"/>
+            <a:ext cx="3291840" cy="320040"/>
           </a:xfrm>
           <a:prstGeom prst="rect">
             <a:avLst/>
@@ -19001,28 +19449,28 @@
           <a:lstStyle/>
           <a:p>
             <a:pPr algn="l">
-              <a:defRPr sz="1600" b="1">
+              <a:defRPr sz="1400" b="1">
                 <a:solidFill>
                   <a:srgbClr val="F39C12"/>
                 </a:solidFill>
               </a:defRPr>
             </a:pPr>
             <a:r>
-              <a:t>实名认证延迟</a:t>
-            </a:r>
-          </a:p>
-        </p:txBody>
-      </p:sp>
-      <p:sp>
-        <p:nvSpPr>
-          <p:cNvPr id="13" name="TextBox 12"/>
-          <p:cNvSpPr txBox="1"/>
-          <p:nvPr/>
-        </p:nvSpPr>
-        <p:spPr>
-          <a:xfrm>
-            <a:off x="8321040" y="1874520"/>
-            <a:ext cx="3200400" cy="914400"/>
+              <a:t>class4_laundering</a:t>
+            </a:r>
+          </a:p>
+        </p:txBody>
+      </p:sp>
+      <p:sp>
+        <p:nvSpPr>
+          <p:cNvPr id="24" name="TextBox 23"/>
+          <p:cNvSpPr txBox="1"/>
+          <p:nvPr/>
+        </p:nvSpPr>
+        <p:spPr>
+          <a:xfrm>
+            <a:off x="8275320" y="3950208"/>
+            <a:ext cx="3291840" cy="914400"/>
           </a:xfrm>
           <a:prstGeom prst="rect">
             <a:avLst/>
@@ -19036,32 +19484,36 @@
           <a:lstStyle/>
           <a:p>
             <a:pPr algn="l">
-              <a:defRPr sz="1400" b="0">
+              <a:defRPr sz="1300" b="0">
                 <a:solidFill>
                   <a:srgbClr val="2C3E50"/>
                 </a:solidFill>
               </a:defRPr>
             </a:pPr>
             <a:r>
-              <a:t>异常钱包延迟 20-30 天</a:t>
-            </a:r>
-            <a:br/>
-            <a:r>
-              <a:t>（正常当天完成）</a:t>
-            </a:r>
-          </a:p>
-        </p:txBody>
-      </p:sp>
-      <p:sp>
-        <p:nvSpPr>
-          <p:cNvPr id="14" name="Rounded Rectangle 13"/>
+              <a:t>金额 100-2000 元，深夜</a:t>
+            </a:r>
+            <a:br/>
+            <a:r>
+              <a:t>仅4类钱包</a:t>
+            </a:r>
+            <a:br/>
+            <a:r>
+              <a:t>日限额 5000 元</a:t>
+            </a:r>
+          </a:p>
+        </p:txBody>
+      </p:sp>
+      <p:sp>
+        <p:nvSpPr>
+          <p:cNvPr id="25" name="Rounded Rectangle 24"/>
           <p:cNvSpPr/>
           <p:nvPr/>
         </p:nvSpPr>
         <p:spPr>
           <a:xfrm>
-            <a:off x="457200" y="3063240"/>
-            <a:ext cx="3566160" cy="1508760"/>
+            <a:off x="457200" y="5120640"/>
+            <a:ext cx="3566160" cy="1371600"/>
           </a:xfrm>
           <a:prstGeom prst="roundRect">
             <a:avLst/>
@@ -19099,14 +19551,14 @@
       </p:sp>
       <p:sp>
         <p:nvSpPr>
-          <p:cNvPr id="15" name="TextBox 14"/>
-          <p:cNvSpPr txBox="1"/>
-          <p:nvPr/>
-        </p:nvSpPr>
-        <p:spPr>
-          <a:xfrm>
-            <a:off x="640080" y="3172968"/>
-            <a:ext cx="3200400" cy="365760"/>
+          <p:cNvPr id="26" name="TextBox 25"/>
+          <p:cNvSpPr txBox="1"/>
+          <p:nvPr/>
+        </p:nvSpPr>
+        <p:spPr>
+          <a:xfrm>
+            <a:off x="594360" y="5166360"/>
+            <a:ext cx="3291840" cy="320040"/>
           </a:xfrm>
           <a:prstGeom prst="rect">
             <a:avLst/>
@@ -19120,28 +19572,28 @@
           <a:lstStyle/>
           <a:p>
             <a:pPr algn="l">
-              <a:defRPr sz="1600" b="1">
+              <a:defRPr sz="1400" b="1">
                 <a:solidFill>
                   <a:srgbClr val="F39C12"/>
                 </a:solidFill>
               </a:defRPr>
             </a:pPr>
             <a:r>
-              <a:t>夜间开户</a:t>
-            </a:r>
-          </a:p>
-        </p:txBody>
-      </p:sp>
-      <p:sp>
-        <p:nvSpPr>
-          <p:cNvPr id="16" name="TextBox 15"/>
-          <p:cNvSpPr txBox="1"/>
-          <p:nvPr/>
-        </p:nvSpPr>
-        <p:spPr>
-          <a:xfrm>
-            <a:off x="640080" y="3566160"/>
-            <a:ext cx="3200400" cy="914400"/>
+              <a:t>online_laundering</a:t>
+            </a:r>
+          </a:p>
+        </p:txBody>
+      </p:sp>
+      <p:sp>
+        <p:nvSpPr>
+          <p:cNvPr id="27" name="TextBox 26"/>
+          <p:cNvSpPr txBox="1"/>
+          <p:nvPr/>
+        </p:nvSpPr>
+        <p:spPr>
+          <a:xfrm>
+            <a:off x="594360" y="5504688"/>
+            <a:ext cx="3291840" cy="914400"/>
           </a:xfrm>
           <a:prstGeom prst="rect">
             <a:avLst/>
@@ -19155,32 +19607,36 @@
           <a:lstStyle/>
           <a:p>
             <a:pPr algn="l">
-              <a:defRPr sz="1400" b="0">
+              <a:defRPr sz="1300" b="0">
                 <a:solidFill>
                   <a:srgbClr val="2C3E50"/>
                 </a:solidFill>
               </a:defRPr>
             </a:pPr>
             <a:r>
-              <a:t>异常钱包 50% 夜间开户</a:t>
-            </a:r>
-            <a:br/>
-            <a:r>
-              <a:t>（正常仅 1%）</a:t>
-            </a:r>
-          </a:p>
-        </p:txBody>
-      </p:sp>
-      <p:sp>
-        <p:nvSpPr>
-          <p:cNvPr id="17" name="Rounded Rectangle 16"/>
+              <a:t>金额 10-1000 元</a:t>
+            </a:r>
+            <a:br/>
+            <a:r>
+              <a:t>深夜(20-1点)</a:t>
+            </a:r>
+            <a:br/>
+            <a:r>
+              <a:t>交易次数多</a:t>
+            </a:r>
+          </a:p>
+        </p:txBody>
+      </p:sp>
+      <p:sp>
+        <p:nvSpPr>
+          <p:cNvPr id="28" name="Rounded Rectangle 27"/>
           <p:cNvSpPr/>
           <p:nvPr/>
         </p:nvSpPr>
         <p:spPr>
           <a:xfrm>
-            <a:off x="4297680" y="3063240"/>
-            <a:ext cx="3566160" cy="1508760"/>
+            <a:off x="4297680" y="5120640"/>
+            <a:ext cx="3566160" cy="1371600"/>
           </a:xfrm>
           <a:prstGeom prst="roundRect">
             <a:avLst/>
@@ -19218,14 +19674,14 @@
       </p:sp>
       <p:sp>
         <p:nvSpPr>
-          <p:cNvPr id="18" name="TextBox 17"/>
-          <p:cNvSpPr txBox="1"/>
-          <p:nvPr/>
-        </p:nvSpPr>
-        <p:spPr>
-          <a:xfrm>
-            <a:off x="4480560" y="3172968"/>
-            <a:ext cx="3200400" cy="365760"/>
+          <p:cNvPr id="29" name="TextBox 28"/>
+          <p:cNvSpPr txBox="1"/>
+          <p:nvPr/>
+        </p:nvSpPr>
+        <p:spPr>
+          <a:xfrm>
+            <a:off x="4434840" y="5166360"/>
+            <a:ext cx="3291840" cy="320040"/>
           </a:xfrm>
           <a:prstGeom prst="rect">
             <a:avLst/>
@@ -19239,28 +19695,28 @@
           <a:lstStyle/>
           <a:p>
             <a:pPr algn="l">
-              <a:defRPr sz="1600" b="1">
+              <a:defRPr sz="1400" b="1">
                 <a:solidFill>
                   <a:srgbClr val="9B59B6"/>
                 </a:solidFill>
               </a:defRPr>
             </a:pPr>
             <a:r>
-              <a:t>小额试探交易</a:t>
-            </a:r>
-          </a:p>
-        </p:txBody>
-      </p:sp>
-      <p:sp>
-        <p:nvSpPr>
-          <p:cNvPr id="19" name="TextBox 18"/>
-          <p:cNvSpPr txBox="1"/>
-          <p:nvPr/>
-        </p:nvSpPr>
-        <p:spPr>
-          <a:xfrm>
-            <a:off x="4480560" y="3566160"/>
-            <a:ext cx="3200400" cy="914400"/>
+              <a:t>victim_laundering</a:t>
+            </a:r>
+          </a:p>
+        </p:txBody>
+      </p:sp>
+      <p:sp>
+        <p:nvSpPr>
+          <p:cNvPr id="30" name="TextBox 29"/>
+          <p:cNvSpPr txBox="1"/>
+          <p:nvPr/>
+        </p:nvSpPr>
+        <p:spPr>
+          <a:xfrm>
+            <a:off x="4434840" y="5504688"/>
+            <a:ext cx="3291840" cy="914400"/>
           </a:xfrm>
           <a:prstGeom prst="rect">
             <a:avLst/>
@@ -19274,501 +19730,29 @@
           <a:lstStyle/>
           <a:p>
             <a:pPr algn="l">
-              <a:defRPr sz="1400" b="0">
+              <a:defRPr sz="1300" b="0">
                 <a:solidFill>
                   <a:srgbClr val="2C3E50"/>
                 </a:solidFill>
               </a:defRPr>
             </a:pPr>
             <a:r>
-              <a:t>金额 0.1-1.0 元</a:t>
-            </a:r>
-            <a:br/>
-            <a:r>
-              <a:t>高频短间隔</a:t>
-            </a:r>
-          </a:p>
-        </p:txBody>
-      </p:sp>
-      <p:sp>
-        <p:nvSpPr>
-          <p:cNvPr id="20" name="Rounded Rectangle 19"/>
-          <p:cNvSpPr/>
-          <p:nvPr/>
-        </p:nvSpPr>
-        <p:spPr>
-          <a:xfrm>
-            <a:off x="8138160" y="3063240"/>
-            <a:ext cx="3566160" cy="1508760"/>
-          </a:xfrm>
-          <a:prstGeom prst="roundRect">
-            <a:avLst/>
-          </a:prstGeom>
-          <a:solidFill>
-            <a:srgbClr val="FFFFFF"/>
-          </a:solidFill>
-          <a:ln w="12700">
-            <a:solidFill>
-              <a:srgbClr val="E74C3C"/>
-            </a:solidFill>
-          </a:ln>
-        </p:spPr>
-        <p:style>
-          <a:lnRef idx="1">
-            <a:schemeClr val="accent1"/>
-          </a:lnRef>
-          <a:fillRef idx="3">
-            <a:schemeClr val="accent1"/>
-          </a:fillRef>
-          <a:effectRef idx="2">
-            <a:schemeClr val="accent1"/>
-          </a:effectRef>
-          <a:fontRef idx="minor">
-            <a:schemeClr val="lt1"/>
-          </a:fontRef>
-        </p:style>
-        <p:txBody>
-          <a:bodyPr rtlCol="0" anchor="ctr"/>
-          <a:lstStyle/>
-          <a:p>
-            <a:pPr algn="ctr"/>
-          </a:p>
-        </p:txBody>
-      </p:sp>
-      <p:sp>
-        <p:nvSpPr>
-          <p:cNvPr id="21" name="TextBox 20"/>
-          <p:cNvSpPr txBox="1"/>
-          <p:nvPr/>
-        </p:nvSpPr>
-        <p:spPr>
-          <a:xfrm>
-            <a:off x="8321040" y="3172968"/>
-            <a:ext cx="3200400" cy="365760"/>
-          </a:xfrm>
-          <a:prstGeom prst="rect">
-            <a:avLst/>
-          </a:prstGeom>
-          <a:noFill/>
-        </p:spPr>
-        <p:txBody>
-          <a:bodyPr wrap="square">
-            <a:spAutoFit/>
-          </a:bodyPr>
-          <a:lstStyle/>
-          <a:p>
-            <a:pPr algn="l">
-              <a:defRPr sz="1600" b="1">
-                <a:solidFill>
-                  <a:srgbClr val="E74C3C"/>
-                </a:solidFill>
-              </a:defRPr>
-            </a:pPr>
-            <a:r>
-              <a:t>商户洗钱</a:t>
-            </a:r>
-          </a:p>
-        </p:txBody>
-      </p:sp>
-      <p:sp>
-        <p:nvSpPr>
-          <p:cNvPr id="22" name="TextBox 21"/>
-          <p:cNvSpPr txBox="1"/>
-          <p:nvPr/>
-        </p:nvSpPr>
-        <p:spPr>
-          <a:xfrm>
-            <a:off x="8321040" y="3566160"/>
-            <a:ext cx="3200400" cy="914400"/>
-          </a:xfrm>
-          <a:prstGeom prst="rect">
-            <a:avLst/>
-          </a:prstGeom>
-          <a:noFill/>
-        </p:spPr>
-        <p:txBody>
-          <a:bodyPr wrap="square">
-            <a:spAutoFit/>
-          </a:bodyPr>
-          <a:lstStyle/>
-          <a:p>
-            <a:pPr algn="l">
-              <a:defRPr sz="1400" b="0">
-                <a:solidFill>
-                  <a:srgbClr val="2C3E50"/>
-                </a:solidFill>
-              </a:defRPr>
-            </a:pPr>
-            <a:r>
-              <a:t>金额 1K-100K</a:t>
-            </a:r>
-            <a:br/>
-            <a:r>
-              <a:t>many_to_many 模式 80%</a:t>
-            </a:r>
-          </a:p>
-        </p:txBody>
-      </p:sp>
-      <p:sp>
-        <p:nvSpPr>
-          <p:cNvPr id="23" name="Rounded Rectangle 22"/>
-          <p:cNvSpPr/>
-          <p:nvPr/>
-        </p:nvSpPr>
-        <p:spPr>
-          <a:xfrm>
-            <a:off x="457200" y="4754880"/>
-            <a:ext cx="3566160" cy="1508760"/>
-          </a:xfrm>
-          <a:prstGeom prst="roundRect">
-            <a:avLst/>
-          </a:prstGeom>
-          <a:solidFill>
-            <a:srgbClr val="FFFFFF"/>
-          </a:solidFill>
-          <a:ln w="12700">
-            <a:solidFill>
-              <a:srgbClr val="F39C12"/>
-            </a:solidFill>
-          </a:ln>
-        </p:spPr>
-        <p:style>
-          <a:lnRef idx="1">
-            <a:schemeClr val="accent1"/>
-          </a:lnRef>
-          <a:fillRef idx="3">
-            <a:schemeClr val="accent1"/>
-          </a:fillRef>
-          <a:effectRef idx="2">
-            <a:schemeClr val="accent1"/>
-          </a:effectRef>
-          <a:fontRef idx="minor">
-            <a:schemeClr val="lt1"/>
-          </a:fontRef>
-        </p:style>
-        <p:txBody>
-          <a:bodyPr rtlCol="0" anchor="ctr"/>
-          <a:lstStyle/>
-          <a:p>
-            <a:pPr algn="ctr"/>
-          </a:p>
-        </p:txBody>
-      </p:sp>
-      <p:sp>
-        <p:nvSpPr>
-          <p:cNvPr id="24" name="TextBox 23"/>
-          <p:cNvSpPr txBox="1"/>
-          <p:nvPr/>
-        </p:nvSpPr>
-        <p:spPr>
-          <a:xfrm>
-            <a:off x="640080" y="4864608"/>
-            <a:ext cx="3200400" cy="365760"/>
-          </a:xfrm>
-          <a:prstGeom prst="rect">
-            <a:avLst/>
-          </a:prstGeom>
-          <a:noFill/>
-        </p:spPr>
-        <p:txBody>
-          <a:bodyPr wrap="square">
-            <a:spAutoFit/>
-          </a:bodyPr>
-          <a:lstStyle/>
-          <a:p>
-            <a:pPr algn="l">
-              <a:defRPr sz="1600" b="1">
-                <a:solidFill>
-                  <a:srgbClr val="F39C12"/>
-                </a:solidFill>
-              </a:defRPr>
-            </a:pPr>
-            <a:r>
-              <a:t>4类钱包洗钱</a:t>
-            </a:r>
-          </a:p>
-        </p:txBody>
-      </p:sp>
-      <p:sp>
-        <p:nvSpPr>
-          <p:cNvPr id="25" name="TextBox 24"/>
-          <p:cNvSpPr txBox="1"/>
-          <p:nvPr/>
-        </p:nvSpPr>
-        <p:spPr>
-          <a:xfrm>
-            <a:off x="640080" y="5257800"/>
-            <a:ext cx="3200400" cy="914400"/>
-          </a:xfrm>
-          <a:prstGeom prst="rect">
-            <a:avLst/>
-          </a:prstGeom>
-          <a:noFill/>
-        </p:spPr>
-        <p:txBody>
-          <a:bodyPr wrap="square">
-            <a:spAutoFit/>
-          </a:bodyPr>
-          <a:lstStyle/>
-          <a:p>
-            <a:pPr algn="l">
-              <a:defRPr sz="1400" b="0">
-                <a:solidFill>
-                  <a:srgbClr val="2C3E50"/>
-                </a:solidFill>
-              </a:defRPr>
-            </a:pPr>
-            <a:r>
-              <a:t>金额 100-2K</a:t>
-            </a:r>
-            <a:br/>
-            <a:r>
-              <a:t>90% 夜间交易</a:t>
-            </a:r>
-          </a:p>
-        </p:txBody>
-      </p:sp>
-      <p:sp>
-        <p:nvSpPr>
-          <p:cNvPr id="26" name="Rounded Rectangle 25"/>
-          <p:cNvSpPr/>
-          <p:nvPr/>
-        </p:nvSpPr>
-        <p:spPr>
-          <a:xfrm>
-            <a:off x="4297680" y="4754880"/>
-            <a:ext cx="3566160" cy="1508760"/>
-          </a:xfrm>
-          <a:prstGeom prst="roundRect">
-            <a:avLst/>
-          </a:prstGeom>
-          <a:solidFill>
-            <a:srgbClr val="FFFFFF"/>
-          </a:solidFill>
-          <a:ln w="12700">
-            <a:solidFill>
-              <a:srgbClr val="9B59B6"/>
-            </a:solidFill>
-          </a:ln>
-        </p:spPr>
-        <p:style>
-          <a:lnRef idx="1">
-            <a:schemeClr val="accent1"/>
-          </a:lnRef>
-          <a:fillRef idx="3">
-            <a:schemeClr val="accent1"/>
-          </a:fillRef>
-          <a:effectRef idx="2">
-            <a:schemeClr val="accent1"/>
-          </a:effectRef>
-          <a:fontRef idx="minor">
-            <a:schemeClr val="lt1"/>
-          </a:fontRef>
-        </p:style>
-        <p:txBody>
-          <a:bodyPr rtlCol="0" anchor="ctr"/>
-          <a:lstStyle/>
-          <a:p>
-            <a:pPr algn="ctr"/>
-          </a:p>
-        </p:txBody>
-      </p:sp>
-      <p:sp>
-        <p:nvSpPr>
-          <p:cNvPr id="27" name="TextBox 26"/>
-          <p:cNvSpPr txBox="1"/>
-          <p:nvPr/>
-        </p:nvSpPr>
-        <p:spPr>
-          <a:xfrm>
-            <a:off x="4480560" y="4864608"/>
-            <a:ext cx="3200400" cy="365760"/>
-          </a:xfrm>
-          <a:prstGeom prst="rect">
-            <a:avLst/>
-          </a:prstGeom>
-          <a:noFill/>
-        </p:spPr>
-        <p:txBody>
-          <a:bodyPr wrap="square">
-            <a:spAutoFit/>
-          </a:bodyPr>
-          <a:lstStyle/>
-          <a:p>
-            <a:pPr algn="l">
-              <a:defRPr sz="1600" b="1">
-                <a:solidFill>
-                  <a:srgbClr val="9B59B6"/>
-                </a:solidFill>
-              </a:defRPr>
-            </a:pPr>
-            <a:r>
-              <a:t>线上跑分</a:t>
-            </a:r>
-          </a:p>
-        </p:txBody>
-      </p:sp>
-      <p:sp>
-        <p:nvSpPr>
-          <p:cNvPr id="28" name="TextBox 27"/>
-          <p:cNvSpPr txBox="1"/>
-          <p:nvPr/>
-        </p:nvSpPr>
-        <p:spPr>
-          <a:xfrm>
-            <a:off x="4480560" y="5257800"/>
-            <a:ext cx="3200400" cy="914400"/>
-          </a:xfrm>
-          <a:prstGeom prst="rect">
-            <a:avLst/>
-          </a:prstGeom>
-          <a:noFill/>
-        </p:spPr>
-        <p:txBody>
-          <a:bodyPr wrap="square">
-            <a:spAutoFit/>
-          </a:bodyPr>
-          <a:lstStyle/>
-          <a:p>
-            <a:pPr algn="l">
-              <a:defRPr sz="1400" b="0">
-                <a:solidFill>
-                  <a:srgbClr val="2C3E50"/>
-                </a:solidFill>
-              </a:defRPr>
-            </a:pPr>
-            <a:r>
-              <a:t>金额 10-1K</a:t>
-            </a:r>
-            <a:br/>
-            <a:r>
-              <a:t>80% 夜间(20-1时)</a:t>
-            </a:r>
-          </a:p>
-        </p:txBody>
-      </p:sp>
-      <p:sp>
-        <p:nvSpPr>
-          <p:cNvPr id="29" name="Rounded Rectangle 28"/>
-          <p:cNvSpPr/>
-          <p:nvPr/>
-        </p:nvSpPr>
-        <p:spPr>
-          <a:xfrm>
-            <a:off x="8138160" y="4754880"/>
-            <a:ext cx="3566160" cy="1508760"/>
-          </a:xfrm>
-          <a:prstGeom prst="roundRect">
-            <a:avLst/>
-          </a:prstGeom>
-          <a:solidFill>
-            <a:srgbClr val="FFFFFF"/>
-          </a:solidFill>
-          <a:ln w="12700">
-            <a:solidFill>
-              <a:srgbClr val="E74C3C"/>
-            </a:solidFill>
-          </a:ln>
-        </p:spPr>
-        <p:style>
-          <a:lnRef idx="1">
-            <a:schemeClr val="accent1"/>
-          </a:lnRef>
-          <a:fillRef idx="3">
-            <a:schemeClr val="accent1"/>
-          </a:fillRef>
-          <a:effectRef idx="2">
-            <a:schemeClr val="accent1"/>
-          </a:effectRef>
-          <a:fontRef idx="minor">
-            <a:schemeClr val="lt1"/>
-          </a:fontRef>
-        </p:style>
-        <p:txBody>
-          <a:bodyPr rtlCol="0" anchor="ctr"/>
-          <a:lstStyle/>
-          <a:p>
-            <a:pPr algn="ctr"/>
-          </a:p>
-        </p:txBody>
-      </p:sp>
-      <p:sp>
-        <p:nvSpPr>
-          <p:cNvPr id="30" name="TextBox 29"/>
-          <p:cNvSpPr txBox="1"/>
-          <p:nvPr/>
-        </p:nvSpPr>
-        <p:spPr>
-          <a:xfrm>
-            <a:off x="8321040" y="4864608"/>
-            <a:ext cx="3200400" cy="365760"/>
-          </a:xfrm>
-          <a:prstGeom prst="rect">
-            <a:avLst/>
-          </a:prstGeom>
-          <a:noFill/>
-        </p:spPr>
-        <p:txBody>
-          <a:bodyPr wrap="square">
-            <a:spAutoFit/>
-          </a:bodyPr>
-          <a:lstStyle/>
-          <a:p>
-            <a:pPr algn="l">
-              <a:defRPr sz="1600" b="1">
-                <a:solidFill>
-                  <a:srgbClr val="E74C3C"/>
-                </a:solidFill>
-              </a:defRPr>
-            </a:pPr>
-            <a:r>
-              <a:t>快速销户</a:t>
-            </a:r>
-          </a:p>
-        </p:txBody>
-      </p:sp>
-      <p:sp>
-        <p:nvSpPr>
-          <p:cNvPr id="31" name="TextBox 30"/>
-          <p:cNvSpPr txBox="1"/>
-          <p:nvPr/>
-        </p:nvSpPr>
-        <p:spPr>
-          <a:xfrm>
-            <a:off x="8321040" y="5257800"/>
-            <a:ext cx="3200400" cy="914400"/>
-          </a:xfrm>
-          <a:prstGeom prst="rect">
-            <a:avLst/>
-          </a:prstGeom>
-          <a:noFill/>
-        </p:spPr>
-        <p:txBody>
-          <a:bodyPr wrap="square">
-            <a:spAutoFit/>
-          </a:bodyPr>
-          <a:lstStyle/>
-          <a:p>
-            <a:pPr algn="l">
-              <a:defRPr sz="1400" b="0">
-                <a:solidFill>
-                  <a:srgbClr val="2C3E50"/>
-                </a:solidFill>
-              </a:defRPr>
-            </a:pPr>
-            <a:r>
-              <a:t>60% 风险钱包在</a:t>
-            </a:r>
-            <a:br/>
-            <a:r>
-              <a:t>最后交易 1-2 天内注销</a:t>
-            </a:r>
-          </a:p>
-        </p:txBody>
-      </p:sp>
-      <p:sp>
-        <p:nvSpPr>
-          <p:cNvPr id="32" name="Rounded Rectangle 31"/>
+              <a:t>诱导: 设备IP与开户一致</a:t>
+            </a:r>
+            <a:br/>
+            <a:r>
+              <a:t>盗用: 设备IP与开户不一致</a:t>
+            </a:r>
+            <a:br/>
+            <a:r>
+              <a:t>两种子模式</a:t>
+            </a:r>
+          </a:p>
+        </p:txBody>
+      </p:sp>
+      <p:sp>
+        <p:nvSpPr>
+          <p:cNvPr id="31" name="Rounded Rectangle 30"/>
           <p:cNvSpPr/>
           <p:nvPr/>
         </p:nvSpPr>
@@ -19813,7 +19797,7 @@
       </p:sp>
       <p:sp>
         <p:nvSpPr>
-          <p:cNvPr id="33" name="TextBox 32"/>
+          <p:cNvPr id="32" name="TextBox 31"/>
           <p:cNvSpPr txBox="1"/>
           <p:nvPr/>
         </p:nvSpPr>
@@ -19841,14 +19825,14 @@
               </a:defRPr>
             </a:pPr>
             <a:r>
-              <a:t>关键：这些模式不告诉 LLM，通过领域知识注入和 SHAP 引导让 LLM 自己发现。如果 LLM 发现了我们没预料到的方向，那才是真正的价值。</a:t>
-            </a:r>
-          </a:p>
-        </p:txBody>
-      </p:sp>
-      <p:sp>
-        <p:nvSpPr>
-          <p:cNvPr id="34" name="TextBox 33"/>
+              <a:t>这些模式说明作为浦发数据集文档注入 System Prompt（~1200 token），帮助 LLM 理解数据生成逻辑，精准构造特征。</a:t>
+            </a:r>
+          </a:p>
+        </p:txBody>
+      </p:sp>
+      <p:sp>
+        <p:nvSpPr>
+          <p:cNvPr id="33" name="TextBox 32"/>
           <p:cNvSpPr txBox="1"/>
           <p:nvPr/>
         </p:nvSpPr>
@@ -20074,7 +20058,7 @@
           </a:solidFill>
           <a:ln w="12700">
             <a:solidFill>
-              <a:srgbClr val="4F8EF7"/>
+              <a:srgbClr val="E74C3C"/>
             </a:solidFill>
           </a:ln>
         </p:spPr>
@@ -20109,6 +20093,203 @@
         <p:spPr>
           <a:xfrm>
             <a:off x="4663440" y="1965960"/>
+            <a:ext cx="1005840" cy="320040"/>
+          </a:xfrm>
+          <a:prstGeom prst="rect">
+            <a:avLst/>
+          </a:prstGeom>
+          <a:solidFill>
+            <a:srgbClr val="E74C3C"/>
+          </a:solidFill>
+          <a:ln>
+            <a:noFill/>
+          </a:ln>
+        </p:spPr>
+        <p:style>
+          <a:lnRef idx="1">
+            <a:schemeClr val="accent1"/>
+          </a:lnRef>
+          <a:fillRef idx="3">
+            <a:schemeClr val="accent1"/>
+          </a:fillRef>
+          <a:effectRef idx="2">
+            <a:schemeClr val="accent1"/>
+          </a:effectRef>
+          <a:fontRef idx="minor">
+            <a:schemeClr val="lt1"/>
+          </a:fontRef>
+        </p:style>
+        <p:txBody>
+          <a:bodyPr rtlCol="0" anchor="ctr"/>
+          <a:lstStyle/>
+          <a:p>
+            <a:pPr algn="ctr"/>
+          </a:p>
+        </p:txBody>
+      </p:sp>
+      <p:sp>
+        <p:nvSpPr>
+          <p:cNvPr id="8" name="TextBox 7"/>
+          <p:cNvSpPr txBox="1"/>
+          <p:nvPr/>
+        </p:nvSpPr>
+        <p:spPr>
+          <a:xfrm>
+            <a:off x="4663440" y="1965960"/>
+            <a:ext cx="1005840" cy="320040"/>
+          </a:xfrm>
+          <a:prstGeom prst="rect">
+            <a:avLst/>
+          </a:prstGeom>
+          <a:noFill/>
+        </p:spPr>
+        <p:txBody>
+          <a:bodyPr wrap="square">
+            <a:spAutoFit/>
+          </a:bodyPr>
+          <a:lstStyle/>
+          <a:p>
+            <a:pPr algn="ctr">
+              <a:defRPr sz="1100" b="0">
+                <a:solidFill>
+                  <a:srgbClr val="FFFFFF"/>
+                </a:solidFill>
+              </a:defRPr>
+            </a:pPr>
+            <a:r>
+              <a:t>~1200 token</a:t>
+            </a:r>
+          </a:p>
+        </p:txBody>
+      </p:sp>
+      <p:sp>
+        <p:nvSpPr>
+          <p:cNvPr id="9" name="TextBox 8"/>
+          <p:cNvSpPr txBox="1"/>
+          <p:nvPr/>
+        </p:nvSpPr>
+        <p:spPr>
+          <a:xfrm>
+            <a:off x="1005840" y="2011680"/>
+            <a:ext cx="3474720" cy="320040"/>
+          </a:xfrm>
+          <a:prstGeom prst="rect">
+            <a:avLst/>
+          </a:prstGeom>
+          <a:noFill/>
+        </p:spPr>
+        <p:txBody>
+          <a:bodyPr wrap="square">
+            <a:spAutoFit/>
+          </a:bodyPr>
+          <a:lstStyle/>
+          <a:p>
+            <a:pPr algn="l">
+              <a:defRPr sz="1600" b="1">
+                <a:solidFill>
+                  <a:srgbClr val="E74C3C"/>
+                </a:solidFill>
+              </a:defRPr>
+            </a:pPr>
+            <a:r>
+              <a:t>8种交易模式说明</a:t>
+            </a:r>
+          </a:p>
+        </p:txBody>
+      </p:sp>
+      <p:sp>
+        <p:nvSpPr>
+          <p:cNvPr id="10" name="TextBox 9"/>
+          <p:cNvSpPr txBox="1"/>
+          <p:nvPr/>
+        </p:nvSpPr>
+        <p:spPr>
+          <a:xfrm>
+            <a:off x="1005840" y="2377440"/>
+            <a:ext cx="4572000" cy="457200"/>
+          </a:xfrm>
+          <a:prstGeom prst="rect">
+            <a:avLst/>
+          </a:prstGeom>
+          <a:noFill/>
+        </p:spPr>
+        <p:txBody>
+          <a:bodyPr wrap="square">
+            <a:spAutoFit/>
+          </a:bodyPr>
+          <a:lstStyle/>
+          <a:p>
+            <a:pPr algn="l">
+              <a:defRPr sz="1300" b="0">
+                <a:solidFill>
+                  <a:srgbClr val="2C3E50"/>
+                </a:solidFill>
+              </a:defRPr>
+            </a:pPr>
+            <a:r>
+              <a:t>浦发数据集文档：3正常+5风险模式</a:t>
+            </a:r>
+            <a:br/>
+            <a:r>
+              <a:t>金额/时间/交易模式/特殊条件</a:t>
+            </a:r>
+          </a:p>
+        </p:txBody>
+      </p:sp>
+      <p:sp>
+        <p:nvSpPr>
+          <p:cNvPr id="11" name="Rounded Rectangle 10"/>
+          <p:cNvSpPr/>
+          <p:nvPr/>
+        </p:nvSpPr>
+        <p:spPr>
+          <a:xfrm>
+            <a:off x="731520" y="2971800"/>
+            <a:ext cx="5029200" cy="914400"/>
+          </a:xfrm>
+          <a:prstGeom prst="roundRect">
+            <a:avLst/>
+          </a:prstGeom>
+          <a:solidFill>
+            <a:srgbClr val="FFFFFF"/>
+          </a:solidFill>
+          <a:ln w="12700">
+            <a:solidFill>
+              <a:srgbClr val="4F8EF7"/>
+            </a:solidFill>
+          </a:ln>
+        </p:spPr>
+        <p:style>
+          <a:lnRef idx="1">
+            <a:schemeClr val="accent1"/>
+          </a:lnRef>
+          <a:fillRef idx="3">
+            <a:schemeClr val="accent1"/>
+          </a:fillRef>
+          <a:effectRef idx="2">
+            <a:schemeClr val="accent1"/>
+          </a:effectRef>
+          <a:fontRef idx="minor">
+            <a:schemeClr val="lt1"/>
+          </a:fontRef>
+        </p:style>
+        <p:txBody>
+          <a:bodyPr rtlCol="0" anchor="ctr"/>
+          <a:lstStyle/>
+          <a:p>
+            <a:pPr algn="ctr"/>
+          </a:p>
+        </p:txBody>
+      </p:sp>
+      <p:sp>
+        <p:nvSpPr>
+          <p:cNvPr id="12" name="Rectangle 11"/>
+          <p:cNvSpPr/>
+          <p:nvPr/>
+        </p:nvSpPr>
+        <p:spPr>
+          <a:xfrm>
+            <a:off x="4663440" y="3017520"/>
             <a:ext cx="1005840" cy="320040"/>
           </a:xfrm>
           <a:prstGeom prst="rect">
@@ -20145,13 +20326,13 @@
       </p:sp>
       <p:sp>
         <p:nvSpPr>
-          <p:cNvPr id="8" name="TextBox 7"/>
-          <p:cNvSpPr txBox="1"/>
-          <p:nvPr/>
-        </p:nvSpPr>
-        <p:spPr>
-          <a:xfrm>
-            <a:off x="4663440" y="1965960"/>
+          <p:cNvPr id="13" name="TextBox 12"/>
+          <p:cNvSpPr txBox="1"/>
+          <p:nvPr/>
+        </p:nvSpPr>
+        <p:spPr>
+          <a:xfrm>
+            <a:off x="4663440" y="3017520"/>
             <a:ext cx="1005840" cy="320040"/>
           </a:xfrm>
           <a:prstGeom prst="rect">
@@ -20180,13 +20361,13 @@
       </p:sp>
       <p:sp>
         <p:nvSpPr>
-          <p:cNvPr id="9" name="TextBox 8"/>
-          <p:cNvSpPr txBox="1"/>
-          <p:nvPr/>
-        </p:nvSpPr>
-        <p:spPr>
-          <a:xfrm>
-            <a:off x="1005840" y="2011680"/>
+          <p:cNvPr id="14" name="TextBox 13"/>
+          <p:cNvSpPr txBox="1"/>
+          <p:nvPr/>
+        </p:nvSpPr>
+        <p:spPr>
+          <a:xfrm>
+            <a:off x="1005840" y="3063240"/>
             <a:ext cx="3474720" cy="320040"/>
           </a:xfrm>
           <a:prstGeom prst="rect">
@@ -20208,20 +20389,20 @@
               </a:defRPr>
             </a:pPr>
             <a:r>
-              <a:t>邮储专家访谈</a:t>
-            </a:r>
-          </a:p>
-        </p:txBody>
-      </p:sp>
-      <p:sp>
-        <p:nvSpPr>
-          <p:cNvPr id="10" name="TextBox 9"/>
-          <p:cNvSpPr txBox="1"/>
-          <p:nvPr/>
-        </p:nvSpPr>
-        <p:spPr>
-          <a:xfrm>
-            <a:off x="1005840" y="2377440"/>
+              <a:t>专家访谈</a:t>
+            </a:r>
+          </a:p>
+        </p:txBody>
+      </p:sp>
+      <p:sp>
+        <p:nvSpPr>
+          <p:cNvPr id="15" name="TextBox 14"/>
+          <p:cNvSpPr txBox="1"/>
+          <p:nvPr/>
+        </p:nvSpPr>
+        <p:spPr>
+          <a:xfrm>
+            <a:off x="1005840" y="3429000"/>
             <a:ext cx="4572000" cy="457200"/>
           </a:xfrm>
           <a:prstGeom prst="rect">
@@ -20254,13 +20435,13 @@
       </p:sp>
       <p:sp>
         <p:nvSpPr>
-          <p:cNvPr id="11" name="Rounded Rectangle 10"/>
+          <p:cNvPr id="16" name="Rounded Rectangle 15"/>
           <p:cNvSpPr/>
           <p:nvPr/>
         </p:nvSpPr>
         <p:spPr>
           <a:xfrm>
-            <a:off x="731520" y="2971800"/>
+            <a:off x="731520" y="4023360"/>
             <a:ext cx="5029200" cy="914400"/>
           </a:xfrm>
           <a:prstGeom prst="roundRect">
@@ -20299,13 +20480,13 @@
       </p:sp>
       <p:sp>
         <p:nvSpPr>
-          <p:cNvPr id="12" name="Rectangle 11"/>
+          <p:cNvPr id="17" name="Rectangle 16"/>
           <p:cNvSpPr/>
           <p:nvPr/>
         </p:nvSpPr>
         <p:spPr>
           <a:xfrm>
-            <a:off x="4663440" y="3017520"/>
+            <a:off x="4663440" y="4069080"/>
             <a:ext cx="1005840" cy="320040"/>
           </a:xfrm>
           <a:prstGeom prst="rect">
@@ -20342,13 +20523,13 @@
       </p:sp>
       <p:sp>
         <p:nvSpPr>
-          <p:cNvPr id="13" name="TextBox 12"/>
-          <p:cNvSpPr txBox="1"/>
-          <p:nvPr/>
-        </p:nvSpPr>
-        <p:spPr>
-          <a:xfrm>
-            <a:off x="4663440" y="3017520"/>
+          <p:cNvPr id="18" name="TextBox 17"/>
+          <p:cNvSpPr txBox="1"/>
+          <p:nvPr/>
+        </p:nvSpPr>
+        <p:spPr>
+          <a:xfrm>
+            <a:off x="4663440" y="4069080"/>
             <a:ext cx="1005840" cy="320040"/>
           </a:xfrm>
           <a:prstGeom prst="rect">
@@ -20377,13 +20558,13 @@
       </p:sp>
       <p:sp>
         <p:nvSpPr>
-          <p:cNvPr id="14" name="TextBox 13"/>
-          <p:cNvSpPr txBox="1"/>
-          <p:nvPr/>
-        </p:nvSpPr>
-        <p:spPr>
-          <a:xfrm>
-            <a:off x="1005840" y="3063240"/>
+          <p:cNvPr id="19" name="TextBox 18"/>
+          <p:cNvSpPr txBox="1"/>
+          <p:nvPr/>
+        </p:nvSpPr>
+        <p:spPr>
+          <a:xfrm>
+            <a:off x="1005840" y="4114800"/>
             <a:ext cx="3474720" cy="320040"/>
           </a:xfrm>
           <a:prstGeom prst="rect">
@@ -20412,13 +20593,13 @@
       </p:sp>
       <p:sp>
         <p:nvSpPr>
-          <p:cNvPr id="15" name="TextBox 14"/>
-          <p:cNvSpPr txBox="1"/>
-          <p:nvPr/>
-        </p:nvSpPr>
-        <p:spPr>
-          <a:xfrm>
-            <a:off x="1005840" y="3429000"/>
+          <p:cNvPr id="20" name="TextBox 19"/>
+          <p:cNvSpPr txBox="1"/>
+          <p:nvPr/>
+        </p:nvSpPr>
+        <p:spPr>
+          <a:xfrm>
+            <a:off x="1005840" y="4480560"/>
             <a:ext cx="4572000" cy="457200"/>
           </a:xfrm>
           <a:prstGeom prst="rect">
@@ -20451,13 +20632,13 @@
       </p:sp>
       <p:sp>
         <p:nvSpPr>
-          <p:cNvPr id="16" name="Rounded Rectangle 15"/>
+          <p:cNvPr id="21" name="Rounded Rectangle 20"/>
           <p:cNvSpPr/>
           <p:nvPr/>
         </p:nvSpPr>
         <p:spPr>
           <a:xfrm>
-            <a:off x="731520" y="4023360"/>
+            <a:off x="731520" y="5074920"/>
             <a:ext cx="5029200" cy="914400"/>
           </a:xfrm>
           <a:prstGeom prst="roundRect">
@@ -20496,13 +20677,13 @@
       </p:sp>
       <p:sp>
         <p:nvSpPr>
-          <p:cNvPr id="17" name="Rectangle 16"/>
+          <p:cNvPr id="22" name="Rectangle 21"/>
           <p:cNvSpPr/>
           <p:nvPr/>
         </p:nvSpPr>
         <p:spPr>
           <a:xfrm>
-            <a:off x="4663440" y="4069080"/>
+            <a:off x="4663440" y="5120640"/>
             <a:ext cx="1005840" cy="320040"/>
           </a:xfrm>
           <a:prstGeom prst="rect">
@@ -20539,13 +20720,13 @@
       </p:sp>
       <p:sp>
         <p:nvSpPr>
-          <p:cNvPr id="18" name="TextBox 17"/>
-          <p:cNvSpPr txBox="1"/>
-          <p:nvPr/>
-        </p:nvSpPr>
-        <p:spPr>
-          <a:xfrm>
-            <a:off x="4663440" y="4069080"/>
+          <p:cNvPr id="23" name="TextBox 22"/>
+          <p:cNvSpPr txBox="1"/>
+          <p:nvPr/>
+        </p:nvSpPr>
+        <p:spPr>
+          <a:xfrm>
+            <a:off x="4663440" y="5120640"/>
             <a:ext cx="1005840" cy="320040"/>
           </a:xfrm>
           <a:prstGeom prst="rect">
@@ -20567,20 +20748,20 @@
               </a:defRPr>
             </a:pPr>
             <a:r>
-              <a:t>~600 token</a:t>
-            </a:r>
-          </a:p>
-        </p:txBody>
-      </p:sp>
-      <p:sp>
-        <p:nvSpPr>
-          <p:cNvPr id="19" name="TextBox 18"/>
-          <p:cNvSpPr txBox="1"/>
-          <p:nvPr/>
-        </p:nvSpPr>
-        <p:spPr>
-          <a:xfrm>
-            <a:off x="1005840" y="4114800"/>
+              <a:t>~1000 token</a:t>
+            </a:r>
+          </a:p>
+        </p:txBody>
+      </p:sp>
+      <p:sp>
+        <p:nvSpPr>
+          <p:cNvPr id="24" name="TextBox 23"/>
+          <p:cNvSpPr txBox="1"/>
+          <p:nvPr/>
+        </p:nvSpPr>
+        <p:spPr>
+          <a:xfrm>
+            <a:off x="1005840" y="5166360"/>
             <a:ext cx="3474720" cy="320040"/>
           </a:xfrm>
           <a:prstGeom prst="rect">
@@ -20602,20 +20783,20 @@
               </a:defRPr>
             </a:pPr>
             <a:r>
-              <a:t>风险分类表</a:t>
-            </a:r>
-          </a:p>
-        </p:txBody>
-      </p:sp>
-      <p:sp>
-        <p:nvSpPr>
-          <p:cNvPr id="20" name="TextBox 19"/>
-          <p:cNvSpPr txBox="1"/>
-          <p:nvPr/>
-        </p:nvSpPr>
-        <p:spPr>
-          <a:xfrm>
-            <a:off x="1005840" y="4480560"/>
+              <a:t>风险分类表+检测规则</a:t>
+            </a:r>
+          </a:p>
+        </p:txBody>
+      </p:sp>
+      <p:sp>
+        <p:nvSpPr>
+          <p:cNvPr id="25" name="TextBox 24"/>
+          <p:cNvSpPr txBox="1"/>
+          <p:nvPr/>
+        </p:nvSpPr>
+        <p:spPr>
+          <a:xfrm>
+            <a:off x="1005840" y="5532120"/>
             <a:ext cx="4572000" cy="457200"/>
           </a:xfrm>
           <a:prstGeom prst="rect">
@@ -20637,208 +20818,11 @@
               </a:defRPr>
             </a:pPr>
             <a:r>
-              <a:t>38 个风险指标</a:t>
-            </a:r>
-            <a:br/>
-            <a:r>
-              <a:t>4 个维度分类</a:t>
-            </a:r>
-          </a:p>
-        </p:txBody>
-      </p:sp>
-      <p:sp>
-        <p:nvSpPr>
-          <p:cNvPr id="21" name="Rounded Rectangle 20"/>
-          <p:cNvSpPr/>
-          <p:nvPr/>
-        </p:nvSpPr>
-        <p:spPr>
-          <a:xfrm>
-            <a:off x="731520" y="5074920"/>
-            <a:ext cx="5029200" cy="914400"/>
-          </a:xfrm>
-          <a:prstGeom prst="roundRect">
-            <a:avLst/>
-          </a:prstGeom>
-          <a:solidFill>
-            <a:srgbClr val="FFFFFF"/>
-          </a:solidFill>
-          <a:ln w="12700">
-            <a:solidFill>
-              <a:srgbClr val="9B59B6"/>
-            </a:solidFill>
-          </a:ln>
-        </p:spPr>
-        <p:style>
-          <a:lnRef idx="1">
-            <a:schemeClr val="accent1"/>
-          </a:lnRef>
-          <a:fillRef idx="3">
-            <a:schemeClr val="accent1"/>
-          </a:fillRef>
-          <a:effectRef idx="2">
-            <a:schemeClr val="accent1"/>
-          </a:effectRef>
-          <a:fontRef idx="minor">
-            <a:schemeClr val="lt1"/>
-          </a:fontRef>
-        </p:style>
-        <p:txBody>
-          <a:bodyPr rtlCol="0" anchor="ctr"/>
-          <a:lstStyle/>
-          <a:p>
-            <a:pPr algn="ctr"/>
-          </a:p>
-        </p:txBody>
-      </p:sp>
-      <p:sp>
-        <p:nvSpPr>
-          <p:cNvPr id="22" name="Rectangle 21"/>
-          <p:cNvSpPr/>
-          <p:nvPr/>
-        </p:nvSpPr>
-        <p:spPr>
-          <a:xfrm>
-            <a:off x="4663440" y="5120640"/>
-            <a:ext cx="1005840" cy="320040"/>
-          </a:xfrm>
-          <a:prstGeom prst="rect">
-            <a:avLst/>
-          </a:prstGeom>
-          <a:solidFill>
-            <a:srgbClr val="9B59B6"/>
-          </a:solidFill>
-          <a:ln>
-            <a:noFill/>
-          </a:ln>
-        </p:spPr>
-        <p:style>
-          <a:lnRef idx="1">
-            <a:schemeClr val="accent1"/>
-          </a:lnRef>
-          <a:fillRef idx="3">
-            <a:schemeClr val="accent1"/>
-          </a:fillRef>
-          <a:effectRef idx="2">
-            <a:schemeClr val="accent1"/>
-          </a:effectRef>
-          <a:fontRef idx="minor">
-            <a:schemeClr val="lt1"/>
-          </a:fontRef>
-        </p:style>
-        <p:txBody>
-          <a:bodyPr rtlCol="0" anchor="ctr"/>
-          <a:lstStyle/>
-          <a:p>
-            <a:pPr algn="ctr"/>
-          </a:p>
-        </p:txBody>
-      </p:sp>
-      <p:sp>
-        <p:nvSpPr>
-          <p:cNvPr id="23" name="TextBox 22"/>
-          <p:cNvSpPr txBox="1"/>
-          <p:nvPr/>
-        </p:nvSpPr>
-        <p:spPr>
-          <a:xfrm>
-            <a:off x="4663440" y="5120640"/>
-            <a:ext cx="1005840" cy="320040"/>
-          </a:xfrm>
-          <a:prstGeom prst="rect">
-            <a:avLst/>
-          </a:prstGeom>
-          <a:noFill/>
-        </p:spPr>
-        <p:txBody>
-          <a:bodyPr wrap="square">
-            <a:spAutoFit/>
-          </a:bodyPr>
-          <a:lstStyle/>
-          <a:p>
-            <a:pPr algn="ctr">
-              <a:defRPr sz="1100" b="0">
-                <a:solidFill>
-                  <a:srgbClr val="FFFFFF"/>
-                </a:solidFill>
-              </a:defRPr>
-            </a:pPr>
-            <a:r>
-              <a:t>~400 token</a:t>
-            </a:r>
-          </a:p>
-        </p:txBody>
-      </p:sp>
-      <p:sp>
-        <p:nvSpPr>
-          <p:cNvPr id="24" name="TextBox 23"/>
-          <p:cNvSpPr txBox="1"/>
-          <p:nvPr/>
-        </p:nvSpPr>
-        <p:spPr>
-          <a:xfrm>
-            <a:off x="1005840" y="5166360"/>
-            <a:ext cx="3474720" cy="320040"/>
-          </a:xfrm>
-          <a:prstGeom prst="rect">
-            <a:avLst/>
-          </a:prstGeom>
-          <a:noFill/>
-        </p:spPr>
-        <p:txBody>
-          <a:bodyPr wrap="square">
-            <a:spAutoFit/>
-          </a:bodyPr>
-          <a:lstStyle/>
-          <a:p>
-            <a:pPr algn="l">
-              <a:defRPr sz="1600" b="1">
-                <a:solidFill>
-                  <a:srgbClr val="9B59B6"/>
-                </a:solidFill>
-              </a:defRPr>
-            </a:pPr>
-            <a:r>
-              <a:t>检测规则</a:t>
-            </a:r>
-          </a:p>
-        </p:txBody>
-      </p:sp>
-      <p:sp>
-        <p:nvSpPr>
-          <p:cNvPr id="25" name="TextBox 24"/>
-          <p:cNvSpPr txBox="1"/>
-          <p:nvPr/>
-        </p:nvSpPr>
-        <p:spPr>
-          <a:xfrm>
-            <a:off x="1005840" y="5532120"/>
-            <a:ext cx="4572000" cy="457200"/>
-          </a:xfrm>
-          <a:prstGeom prst="rect">
-            <a:avLst/>
-          </a:prstGeom>
-          <a:noFill/>
-        </p:spPr>
-        <p:txBody>
-          <a:bodyPr wrap="square">
-            <a:spAutoFit/>
-          </a:bodyPr>
-          <a:lstStyle/>
-          <a:p>
-            <a:pPr algn="l">
-              <a:defRPr sz="1300" b="0">
-                <a:solidFill>
-                  <a:srgbClr val="2C3E50"/>
-                </a:solidFill>
-              </a:defRPr>
-            </a:pPr>
-            <a:r>
-              <a:t>15 条种子规则</a:t>
-            </a:r>
-            <a:br/>
-            <a:r>
-              <a:t>转为 Python 函数示例</a:t>
+              <a:t>38 个风险指标(4维度) + 15 条种子规则</a:t>
+            </a:r>
+            <a:br/>
+            <a:r>
+              <a:t>→ Python 函数示例</a:t>
             </a:r>
           </a:p>
         </p:txBody>
@@ -23054,7 +23038,7 @@
               </a:defRPr>
             </a:pPr>
             <a:r>
-              <a:t>我们的融合：LLM-FE 的多岛屿并行搜索效率 + MedFeat 的 SHAP 方向引导 = 高效且有方向的搜索</a:t>
+              <a:t>我们的融合：LLM-FE 的维度岛屿并行 + MedFeat 的 SHAP 引导 + 交易模式说明 = 高效 + 有方向 + 有分工的搜索</a:t>
             </a:r>
           </a:p>
         </p:txBody>
@@ -23386,11 +23370,11 @@
               </a:defRPr>
             </a:pPr>
             <a:r>
-              <a:t>领域知识</a:t>
-            </a:r>
-            <a:br/>
-            <a:r>
-              <a:t>（我们独有）</a:t>
+              <a:t>领域知识+</a:t>
+            </a:r>
+            <a:br/>
+            <a:r>
+              <a:t>交易模式说明</a:t>
             </a:r>
           </a:p>
         </p:txBody>
@@ -23429,7 +23413,7 @@
             </a:r>
             <a:br/>
             <a:r>
-              <a:t>+ 38风险指标 + 监管规则</a:t>
+              <a:t>+ 8种交易模式(浦发)</a:t>
             </a:r>
             <a:br/>
             <a:r>
@@ -23626,11 +23610,11 @@
               </a:defRPr>
             </a:pPr>
             <a:r>
-              <a:t>进化搜索引擎</a:t>
-            </a:r>
-            <a:br/>
-            <a:r>
-              <a:t>（LLM-FE）</a:t>
+              <a:t>维度岛屿搜索</a:t>
+            </a:r>
+            <a:br/>
+            <a:r>
+              <a:t>（改进LLM-FE）</a:t>
             </a:r>
           </a:p>
         </p:txBody>
@@ -23665,15 +23649,15 @@
               </a:defRPr>
             </a:pPr>
             <a:r>
-              <a:t>3 岛屿并行搜索</a:t>
-            </a:r>
-            <a:br/>
-            <a:r>
-              <a:t>Boltzmann 采样 in-context</a:t>
-            </a:r>
-            <a:br/>
-            <a:r>
-              <a:t>失败记忆（MedFeat）</a:t>
+              <a:t>4维度岛屿并行搜索</a:t>
+            </a:r>
+            <a:br/>
+            <a:r>
+              <a:t>金额/时间/行为/主体</a:t>
+            </a:r>
+            <a:br/>
+            <a:r>
+              <a:t>Boltzmann + 失败记忆</a:t>
             </a:r>
           </a:p>
         </p:txBody>
@@ -24153,7 +24137,7 @@
             </a:r>
             <a:br/>
             <a:r>
-              <a:t>反馈有价值/冗余方向</a:t>
+              <a:t>反馈有价值/冗余维度</a:t>
             </a:r>
           </a:p>
         </p:txBody>
@@ -24506,7 +24490,7 @@
               </a:defRPr>
             </a:pPr>
             <a:r>
-              <a:t>LLM-FE 提供搜索效率（多岛屿并行），但搜索方向盲目</a:t>
+              <a:t>LLM-FE 原论文：岛屿随机分组，搜索效率高但方向盲目 → 我们改为按风险维度划分 4 岛屿</a:t>
             </a:r>
           </a:p>
         </p:txBody>
@@ -24584,7 +24568,7 @@
               </a:defRPr>
             </a:pPr>
             <a:r>
-              <a:t>MedFeat 提供搜索方向（SHAP 引导），但搜索效率低（单线迭代）</a:t>
+              <a:t>MedFeat 提供 SHAP 引导，弱势维度天然对应到具体岛屿应该加强</a:t>
             </a:r>
           </a:p>
         </p:txBody>
@@ -24662,7 +24646,7 @@
               </a:defRPr>
             </a:pPr>
             <a:r>
-              <a:t>两者结合 = 高效且有方向的搜索</a:t>
+              <a:t>8 种交易模式说明（浦发文档）让 LLM 理解数据生成逻辑，大幅降低猜测成本</a:t>
             </a:r>
           </a:p>
         </p:txBody>
@@ -24747,85 +24731,7 @@
       </p:sp>
       <p:sp>
         <p:nvSpPr>
-          <p:cNvPr id="43" name="Rectangle 42"/>
-          <p:cNvSpPr/>
-          <p:nvPr/>
-        </p:nvSpPr>
-        <p:spPr>
-          <a:xfrm>
-            <a:off x="457200" y="6419088"/>
-            <a:ext cx="73152" cy="228600"/>
-          </a:xfrm>
-          <a:prstGeom prst="rect">
-            <a:avLst/>
-          </a:prstGeom>
-          <a:solidFill>
-            <a:srgbClr val="9B59B6"/>
-          </a:solidFill>
-          <a:ln>
-            <a:noFill/>
-          </a:ln>
-        </p:spPr>
-        <p:style>
-          <a:lnRef idx="1">
-            <a:schemeClr val="accent1"/>
-          </a:lnRef>
-          <a:fillRef idx="3">
-            <a:schemeClr val="accent1"/>
-          </a:fillRef>
-          <a:effectRef idx="2">
-            <a:schemeClr val="accent1"/>
-          </a:effectRef>
-          <a:fontRef idx="minor">
-            <a:schemeClr val="lt1"/>
-          </a:fontRef>
-        </p:style>
-        <p:txBody>
-          <a:bodyPr rtlCol="0" anchor="ctr"/>
-          <a:lstStyle/>
-          <a:p>
-            <a:pPr algn="ctr"/>
-          </a:p>
-        </p:txBody>
-      </p:sp>
-      <p:sp>
-        <p:nvSpPr>
-          <p:cNvPr id="44" name="TextBox 43"/>
-          <p:cNvSpPr txBox="1"/>
-          <p:nvPr/>
-        </p:nvSpPr>
-        <p:spPr>
-          <a:xfrm>
-            <a:off x="731520" y="6400800"/>
-            <a:ext cx="10515600" cy="274320"/>
-          </a:xfrm>
-          <a:prstGeom prst="rect">
-            <a:avLst/>
-          </a:prstGeom>
-          <a:noFill/>
-        </p:spPr>
-        <p:txBody>
-          <a:bodyPr wrap="square">
-            <a:spAutoFit/>
-          </a:bodyPr>
-          <a:lstStyle/>
-          <a:p>
-            <a:pPr algn="l">
-              <a:defRPr sz="1300" b="0">
-                <a:solidFill>
-                  <a:srgbClr val="2C3E50"/>
-                </a:solidFill>
-              </a:defRPr>
-            </a:pPr>
-            <a:r>
-              <a:t>我们的领域知识是所有论文都没有的独特信号源</a:t>
-            </a:r>
-          </a:p>
-        </p:txBody>
-      </p:sp>
-      <p:sp>
-        <p:nvSpPr>
-          <p:cNvPr id="45" name="TextBox 44"/>
+          <p:cNvPr id="43" name="TextBox 42"/>
           <p:cNvSpPr txBox="1"/>
           <p:nvPr/>
         </p:nvSpPr>

--- a/LLM_Feature_Engineering_Report.pptx
+++ b/LLM_Feature_Engineering_Report.pptx
@@ -4,29 +4,32 @@
   <p:sldMasterIdLst>
     <p:sldMasterId id="2147483648" r:id="rId1"/>
   </p:sldMasterIdLst>
+  <p:notesMasterIdLst>
+    <p:notesMasterId r:id="rId22"/>
+  </p:notesMasterIdLst>
   <p:sldIdLst>
-    <p:sldId id="256" r:id="rId7"/>
-    <p:sldId id="257" r:id="rId8"/>
-    <p:sldId id="258" r:id="rId9"/>
-    <p:sldId id="259" r:id="rId10"/>
-    <p:sldId id="260" r:id="rId11"/>
-    <p:sldId id="261" r:id="rId12"/>
-    <p:sldId id="262" r:id="rId13"/>
-    <p:sldId id="263" r:id="rId14"/>
-    <p:sldId id="264" r:id="rId15"/>
-    <p:sldId id="265" r:id="rId16"/>
-    <p:sldId id="266" r:id="rId17"/>
-    <p:sldId id="267" r:id="rId18"/>
-    <p:sldId id="268" r:id="rId19"/>
-    <p:sldId id="269" r:id="rId20"/>
-    <p:sldId id="270" r:id="rId21"/>
-    <p:sldId id="271" r:id="rId22"/>
-    <p:sldId id="272" r:id="rId23"/>
-    <p:sldId id="273" r:id="rId24"/>
-    <p:sldId id="274" r:id="rId25"/>
-    <p:sldId id="275" r:id="rId26"/>
+    <p:sldId id="256" r:id="rId2"/>
+    <p:sldId id="257" r:id="rId3"/>
+    <p:sldId id="258" r:id="rId4"/>
+    <p:sldId id="259" r:id="rId5"/>
+    <p:sldId id="260" r:id="rId6"/>
+    <p:sldId id="261" r:id="rId7"/>
+    <p:sldId id="262" r:id="rId8"/>
+    <p:sldId id="263" r:id="rId9"/>
+    <p:sldId id="264" r:id="rId10"/>
+    <p:sldId id="265" r:id="rId11"/>
+    <p:sldId id="266" r:id="rId12"/>
+    <p:sldId id="267" r:id="rId13"/>
+    <p:sldId id="268" r:id="rId14"/>
+    <p:sldId id="269" r:id="rId15"/>
+    <p:sldId id="270" r:id="rId16"/>
+    <p:sldId id="271" r:id="rId17"/>
+    <p:sldId id="272" r:id="rId18"/>
+    <p:sldId id="273" r:id="rId19"/>
+    <p:sldId id="274" r:id="rId20"/>
+    <p:sldId id="275" r:id="rId21"/>
   </p:sldIdLst>
-  <p:sldSz cx="12191695" cy="6858000" type="screen4x3"/>
+  <p:sldSz cx="12192000" cy="6858000"/>
   <p:notesSz cx="6858000" cy="9144000"/>
   <p:defaultTextStyle>
     <a:defPPr>
@@ -123,7 +126,540 @@
       </a:defRPr>
     </a:lvl9pPr>
   </p:defaultTextStyle>
+  <p:extLst>
+    <p:ext uri="{EFAFB233-063F-42B5-8137-9DF3F51BA10A}">
+      <p15:sldGuideLst xmlns:p15="http://schemas.microsoft.com/office/powerpoint/2012/main">
+        <p15:guide id="1" orient="horz" pos="2160">
+          <p15:clr>
+            <a:srgbClr val="A4A3A4"/>
+          </p15:clr>
+        </p15:guide>
+        <p15:guide id="2" pos="2880">
+          <p15:clr>
+            <a:srgbClr val="A4A3A4"/>
+          </p15:clr>
+        </p15:guide>
+      </p15:sldGuideLst>
+    </p:ext>
+  </p:extLst>
 </p:presentation>
+</file>
+
+<file path=ppt/notesMasters/notesMaster1.xml><?xml version="1.0" encoding="utf-8"?>
+<p:notesMaster xmlns:a="http://schemas.openxmlformats.org/drawingml/2006/main" xmlns:r="http://schemas.openxmlformats.org/officeDocument/2006/relationships" xmlns:p="http://schemas.openxmlformats.org/presentationml/2006/main">
+  <p:cSld>
+    <p:bg>
+      <p:bgRef idx="1001">
+        <a:schemeClr val="bg1"/>
+      </p:bgRef>
+    </p:bg>
+    <p:spTree>
+      <p:nvGrpSpPr>
+        <p:cNvPr id="1" name=""/>
+        <p:cNvGrpSpPr/>
+        <p:nvPr/>
+      </p:nvGrpSpPr>
+      <p:grpSpPr>
+        <a:xfrm>
+          <a:off x="0" y="0"/>
+          <a:ext cx="0" cy="0"/>
+          <a:chOff x="0" y="0"/>
+          <a:chExt cx="0" cy="0"/>
+        </a:xfrm>
+      </p:grpSpPr>
+      <p:sp>
+        <p:nvSpPr>
+          <p:cNvPr id="2" name="页眉占位符 1"/>
+          <p:cNvSpPr>
+            <a:spLocks noGrp="1"/>
+          </p:cNvSpPr>
+          <p:nvPr>
+            <p:ph type="hdr" sz="quarter"/>
+          </p:nvPr>
+        </p:nvSpPr>
+        <p:spPr>
+          <a:xfrm>
+            <a:off x="0" y="0"/>
+            <a:ext cx="2971800" cy="458788"/>
+          </a:xfrm>
+          <a:prstGeom prst="rect">
+            <a:avLst/>
+          </a:prstGeom>
+        </p:spPr>
+        <p:txBody>
+          <a:bodyPr vert="horz" lIns="91440" tIns="45720" rIns="91440" bIns="45720" rtlCol="0"/>
+          <a:lstStyle>
+            <a:lvl1pPr algn="l">
+              <a:defRPr sz="1200"/>
+            </a:lvl1pPr>
+          </a:lstStyle>
+          <a:p>
+            <a:endParaRPr kumimoji="1" lang="zh-CN" altLang="en-US"/>
+          </a:p>
+        </p:txBody>
+      </p:sp>
+      <p:sp>
+        <p:nvSpPr>
+          <p:cNvPr id="3" name="日期占位符 2"/>
+          <p:cNvSpPr>
+            <a:spLocks noGrp="1"/>
+          </p:cNvSpPr>
+          <p:nvPr>
+            <p:ph type="dt" idx="1"/>
+          </p:nvPr>
+        </p:nvSpPr>
+        <p:spPr>
+          <a:xfrm>
+            <a:off x="3884613" y="0"/>
+            <a:ext cx="2971800" cy="458788"/>
+          </a:xfrm>
+          <a:prstGeom prst="rect">
+            <a:avLst/>
+          </a:prstGeom>
+        </p:spPr>
+        <p:txBody>
+          <a:bodyPr vert="horz" lIns="91440" tIns="45720" rIns="91440" bIns="45720" rtlCol="0"/>
+          <a:lstStyle>
+            <a:lvl1pPr algn="r">
+              <a:defRPr sz="1200"/>
+            </a:lvl1pPr>
+          </a:lstStyle>
+          <a:p>
+            <a:fld id="{78457BD2-51E0-B242-9399-C5E6D9108009}" type="datetimeFigureOut">
+              <a:rPr kumimoji="1" lang="zh-CN" altLang="en-US" smtClean="0"/>
+              <a:t>2026/5/14</a:t>
+            </a:fld>
+            <a:endParaRPr kumimoji="1" lang="zh-CN" altLang="en-US"/>
+          </a:p>
+        </p:txBody>
+      </p:sp>
+      <p:sp>
+        <p:nvSpPr>
+          <p:cNvPr id="4" name="幻灯片图像占位符 3"/>
+          <p:cNvSpPr>
+            <a:spLocks noGrp="1" noRot="1" noChangeAspect="1"/>
+          </p:cNvSpPr>
+          <p:nvPr>
+            <p:ph type="sldImg" idx="2"/>
+          </p:nvPr>
+        </p:nvSpPr>
+        <p:spPr>
+          <a:xfrm>
+            <a:off x="685800" y="1143000"/>
+            <a:ext cx="5486400" cy="3086100"/>
+          </a:xfrm>
+          <a:prstGeom prst="rect">
+            <a:avLst/>
+          </a:prstGeom>
+          <a:noFill/>
+          <a:ln w="12700">
+            <a:solidFill>
+              <a:prstClr val="black"/>
+            </a:solidFill>
+          </a:ln>
+        </p:spPr>
+        <p:txBody>
+          <a:bodyPr vert="horz" lIns="91440" tIns="45720" rIns="91440" bIns="45720" rtlCol="0" anchor="ctr"/>
+          <a:lstStyle/>
+          <a:p>
+            <a:endParaRPr lang="zh-CN" altLang="en-US"/>
+          </a:p>
+        </p:txBody>
+      </p:sp>
+      <p:sp>
+        <p:nvSpPr>
+          <p:cNvPr id="5" name="备注占位符 4"/>
+          <p:cNvSpPr>
+            <a:spLocks noGrp="1"/>
+          </p:cNvSpPr>
+          <p:nvPr>
+            <p:ph type="body" sz="quarter" idx="3"/>
+          </p:nvPr>
+        </p:nvSpPr>
+        <p:spPr>
+          <a:xfrm>
+            <a:off x="685800" y="4400550"/>
+            <a:ext cx="5486400" cy="3600450"/>
+          </a:xfrm>
+          <a:prstGeom prst="rect">
+            <a:avLst/>
+          </a:prstGeom>
+        </p:spPr>
+        <p:txBody>
+          <a:bodyPr vert="horz" lIns="91440" tIns="45720" rIns="91440" bIns="45720" rtlCol="0"/>
+          <a:lstStyle/>
+          <a:p>
+            <a:pPr lvl="0"/>
+            <a:r>
+              <a:rPr kumimoji="1" lang="zh-CN" altLang="en-US"/>
+              <a:t>单击此处编辑母版文本样式</a:t>
+            </a:r>
+          </a:p>
+          <a:p>
+            <a:pPr lvl="1"/>
+            <a:r>
+              <a:rPr kumimoji="1" lang="zh-CN" altLang="en-US"/>
+              <a:t>二级</a:t>
+            </a:r>
+          </a:p>
+          <a:p>
+            <a:pPr lvl="2"/>
+            <a:r>
+              <a:rPr kumimoji="1" lang="zh-CN" altLang="en-US"/>
+              <a:t>三级</a:t>
+            </a:r>
+          </a:p>
+          <a:p>
+            <a:pPr lvl="3"/>
+            <a:r>
+              <a:rPr kumimoji="1" lang="zh-CN" altLang="en-US"/>
+              <a:t>四级</a:t>
+            </a:r>
+          </a:p>
+          <a:p>
+            <a:pPr lvl="4"/>
+            <a:r>
+              <a:rPr kumimoji="1" lang="zh-CN" altLang="en-US"/>
+              <a:t>五级</a:t>
+            </a:r>
+          </a:p>
+        </p:txBody>
+      </p:sp>
+      <p:sp>
+        <p:nvSpPr>
+          <p:cNvPr id="6" name="页脚占位符 5"/>
+          <p:cNvSpPr>
+            <a:spLocks noGrp="1"/>
+          </p:cNvSpPr>
+          <p:nvPr>
+            <p:ph type="ftr" sz="quarter" idx="4"/>
+          </p:nvPr>
+        </p:nvSpPr>
+        <p:spPr>
+          <a:xfrm>
+            <a:off x="0" y="8685213"/>
+            <a:ext cx="2971800" cy="458787"/>
+          </a:xfrm>
+          <a:prstGeom prst="rect">
+            <a:avLst/>
+          </a:prstGeom>
+        </p:spPr>
+        <p:txBody>
+          <a:bodyPr vert="horz" lIns="91440" tIns="45720" rIns="91440" bIns="45720" rtlCol="0" anchor="b"/>
+          <a:lstStyle>
+            <a:lvl1pPr algn="l">
+              <a:defRPr sz="1200"/>
+            </a:lvl1pPr>
+          </a:lstStyle>
+          <a:p>
+            <a:endParaRPr kumimoji="1" lang="zh-CN" altLang="en-US"/>
+          </a:p>
+        </p:txBody>
+      </p:sp>
+      <p:sp>
+        <p:nvSpPr>
+          <p:cNvPr id="7" name="灯片编号占位符 6"/>
+          <p:cNvSpPr>
+            <a:spLocks noGrp="1"/>
+          </p:cNvSpPr>
+          <p:nvPr>
+            <p:ph type="sldNum" sz="quarter" idx="5"/>
+          </p:nvPr>
+        </p:nvSpPr>
+        <p:spPr>
+          <a:xfrm>
+            <a:off x="3884613" y="8685213"/>
+            <a:ext cx="2971800" cy="458787"/>
+          </a:xfrm>
+          <a:prstGeom prst="rect">
+            <a:avLst/>
+          </a:prstGeom>
+        </p:spPr>
+        <p:txBody>
+          <a:bodyPr vert="horz" lIns="91440" tIns="45720" rIns="91440" bIns="45720" rtlCol="0" anchor="b"/>
+          <a:lstStyle>
+            <a:lvl1pPr algn="r">
+              <a:defRPr sz="1200"/>
+            </a:lvl1pPr>
+          </a:lstStyle>
+          <a:p>
+            <a:fld id="{76A2A38C-591E-9649-AAD9-143AB214852D}" type="slidenum">
+              <a:rPr kumimoji="1" lang="zh-CN" altLang="en-US" smtClean="0"/>
+              <a:t>‹#›</a:t>
+            </a:fld>
+            <a:endParaRPr kumimoji="1" lang="zh-CN" altLang="en-US"/>
+          </a:p>
+        </p:txBody>
+      </p:sp>
+    </p:spTree>
+    <p:extLst>
+      <p:ext uri="{BB962C8B-B14F-4D97-AF65-F5344CB8AC3E}">
+        <p14:creationId xmlns:p14="http://schemas.microsoft.com/office/powerpoint/2010/main" val="3060400734"/>
+      </p:ext>
+    </p:extLst>
+  </p:cSld>
+  <p:clrMap bg1="lt1" tx1="dk1" bg2="lt2" tx2="dk2" accent1="accent1" accent2="accent2" accent3="accent3" accent4="accent4" accent5="accent5" accent6="accent6" hlink="hlink" folHlink="folHlink"/>
+  <p:notesStyle>
+    <a:lvl1pPr marL="0" algn="l" defTabSz="914400" rtl="0" eaLnBrk="1" latinLnBrk="0" hangingPunct="1">
+      <a:defRPr sz="1200" kern="1200">
+        <a:solidFill>
+          <a:schemeClr val="tx1"/>
+        </a:solidFill>
+        <a:latin typeface="+mn-lt"/>
+        <a:ea typeface="+mn-ea"/>
+        <a:cs typeface="+mn-cs"/>
+      </a:defRPr>
+    </a:lvl1pPr>
+    <a:lvl2pPr marL="457200" algn="l" defTabSz="914400" rtl="0" eaLnBrk="1" latinLnBrk="0" hangingPunct="1">
+      <a:defRPr sz="1200" kern="1200">
+        <a:solidFill>
+          <a:schemeClr val="tx1"/>
+        </a:solidFill>
+        <a:latin typeface="+mn-lt"/>
+        <a:ea typeface="+mn-ea"/>
+        <a:cs typeface="+mn-cs"/>
+      </a:defRPr>
+    </a:lvl2pPr>
+    <a:lvl3pPr marL="914400" algn="l" defTabSz="914400" rtl="0" eaLnBrk="1" latinLnBrk="0" hangingPunct="1">
+      <a:defRPr sz="1200" kern="1200">
+        <a:solidFill>
+          <a:schemeClr val="tx1"/>
+        </a:solidFill>
+        <a:latin typeface="+mn-lt"/>
+        <a:ea typeface="+mn-ea"/>
+        <a:cs typeface="+mn-cs"/>
+      </a:defRPr>
+    </a:lvl3pPr>
+    <a:lvl4pPr marL="1371600" algn="l" defTabSz="914400" rtl="0" eaLnBrk="1" latinLnBrk="0" hangingPunct="1">
+      <a:defRPr sz="1200" kern="1200">
+        <a:solidFill>
+          <a:schemeClr val="tx1"/>
+        </a:solidFill>
+        <a:latin typeface="+mn-lt"/>
+        <a:ea typeface="+mn-ea"/>
+        <a:cs typeface="+mn-cs"/>
+      </a:defRPr>
+    </a:lvl4pPr>
+    <a:lvl5pPr marL="1828800" algn="l" defTabSz="914400" rtl="0" eaLnBrk="1" latinLnBrk="0" hangingPunct="1">
+      <a:defRPr sz="1200" kern="1200">
+        <a:solidFill>
+          <a:schemeClr val="tx1"/>
+        </a:solidFill>
+        <a:latin typeface="+mn-lt"/>
+        <a:ea typeface="+mn-ea"/>
+        <a:cs typeface="+mn-cs"/>
+      </a:defRPr>
+    </a:lvl5pPr>
+    <a:lvl6pPr marL="2286000" algn="l" defTabSz="914400" rtl="0" eaLnBrk="1" latinLnBrk="0" hangingPunct="1">
+      <a:defRPr sz="1200" kern="1200">
+        <a:solidFill>
+          <a:schemeClr val="tx1"/>
+        </a:solidFill>
+        <a:latin typeface="+mn-lt"/>
+        <a:ea typeface="+mn-ea"/>
+        <a:cs typeface="+mn-cs"/>
+      </a:defRPr>
+    </a:lvl6pPr>
+    <a:lvl7pPr marL="2743200" algn="l" defTabSz="914400" rtl="0" eaLnBrk="1" latinLnBrk="0" hangingPunct="1">
+      <a:defRPr sz="1200" kern="1200">
+        <a:solidFill>
+          <a:schemeClr val="tx1"/>
+        </a:solidFill>
+        <a:latin typeface="+mn-lt"/>
+        <a:ea typeface="+mn-ea"/>
+        <a:cs typeface="+mn-cs"/>
+      </a:defRPr>
+    </a:lvl7pPr>
+    <a:lvl8pPr marL="3200400" algn="l" defTabSz="914400" rtl="0" eaLnBrk="1" latinLnBrk="0" hangingPunct="1">
+      <a:defRPr sz="1200" kern="1200">
+        <a:solidFill>
+          <a:schemeClr val="tx1"/>
+        </a:solidFill>
+        <a:latin typeface="+mn-lt"/>
+        <a:ea typeface="+mn-ea"/>
+        <a:cs typeface="+mn-cs"/>
+      </a:defRPr>
+    </a:lvl8pPr>
+    <a:lvl9pPr marL="3657600" algn="l" defTabSz="914400" rtl="0" eaLnBrk="1" latinLnBrk="0" hangingPunct="1">
+      <a:defRPr sz="1200" kern="1200">
+        <a:solidFill>
+          <a:schemeClr val="tx1"/>
+        </a:solidFill>
+        <a:latin typeface="+mn-lt"/>
+        <a:ea typeface="+mn-ea"/>
+        <a:cs typeface="+mn-cs"/>
+      </a:defRPr>
+    </a:lvl9pPr>
+  </p:notesStyle>
+</p:notesMaster>
+</file>
+
+<file path=ppt/notesSlides/notesSlide1.xml><?xml version="1.0" encoding="utf-8"?>
+<p:notes xmlns:a="http://schemas.openxmlformats.org/drawingml/2006/main" xmlns:r="http://schemas.openxmlformats.org/officeDocument/2006/relationships" xmlns:p="http://schemas.openxmlformats.org/presentationml/2006/main">
+  <p:cSld>
+    <p:spTree>
+      <p:nvGrpSpPr>
+        <p:cNvPr id="1" name=""/>
+        <p:cNvGrpSpPr/>
+        <p:nvPr/>
+      </p:nvGrpSpPr>
+      <p:grpSpPr>
+        <a:xfrm>
+          <a:off x="0" y="0"/>
+          <a:ext cx="0" cy="0"/>
+          <a:chOff x="0" y="0"/>
+          <a:chExt cx="0" cy="0"/>
+        </a:xfrm>
+      </p:grpSpPr>
+      <p:sp>
+        <p:nvSpPr>
+          <p:cNvPr id="2" name="幻灯片图像占位符 1"/>
+          <p:cNvSpPr>
+            <a:spLocks noGrp="1" noRot="1" noChangeAspect="1"/>
+          </p:cNvSpPr>
+          <p:nvPr>
+            <p:ph type="sldImg"/>
+          </p:nvPr>
+        </p:nvSpPr>
+        <p:spPr/>
+      </p:sp>
+      <p:sp>
+        <p:nvSpPr>
+          <p:cNvPr id="3" name="备注占位符 2"/>
+          <p:cNvSpPr>
+            <a:spLocks noGrp="1"/>
+          </p:cNvSpPr>
+          <p:nvPr>
+            <p:ph type="body" idx="1"/>
+          </p:nvPr>
+        </p:nvSpPr>
+        <p:spPr/>
+        <p:txBody>
+          <a:bodyPr/>
+          <a:lstStyle/>
+          <a:p>
+            <a:endParaRPr kumimoji="1" lang="zh-CN" altLang="en-US" dirty="0"/>
+          </a:p>
+        </p:txBody>
+      </p:sp>
+      <p:sp>
+        <p:nvSpPr>
+          <p:cNvPr id="4" name="灯片编号占位符 3"/>
+          <p:cNvSpPr>
+            <a:spLocks noGrp="1"/>
+          </p:cNvSpPr>
+          <p:nvPr>
+            <p:ph type="sldNum" sz="quarter" idx="5"/>
+          </p:nvPr>
+        </p:nvSpPr>
+        <p:spPr/>
+        <p:txBody>
+          <a:bodyPr/>
+          <a:lstStyle/>
+          <a:p>
+            <a:fld id="{76A2A38C-591E-9649-AAD9-143AB214852D}" type="slidenum">
+              <a:rPr kumimoji="1" lang="zh-CN" altLang="en-US" smtClean="0"/>
+              <a:t>3</a:t>
+            </a:fld>
+            <a:endParaRPr kumimoji="1" lang="zh-CN" altLang="en-US"/>
+          </a:p>
+        </p:txBody>
+      </p:sp>
+    </p:spTree>
+    <p:extLst>
+      <p:ext uri="{BB962C8B-B14F-4D97-AF65-F5344CB8AC3E}">
+        <p14:creationId xmlns:p14="http://schemas.microsoft.com/office/powerpoint/2010/main" val="1121836353"/>
+      </p:ext>
+    </p:extLst>
+  </p:cSld>
+  <p:clrMapOvr>
+    <a:masterClrMapping/>
+  </p:clrMapOvr>
+</p:notes>
+</file>
+
+<file path=ppt/notesSlides/notesSlide2.xml><?xml version="1.0" encoding="utf-8"?>
+<p:notes xmlns:a="http://schemas.openxmlformats.org/drawingml/2006/main" xmlns:r="http://schemas.openxmlformats.org/officeDocument/2006/relationships" xmlns:p="http://schemas.openxmlformats.org/presentationml/2006/main">
+  <p:cSld>
+    <p:spTree>
+      <p:nvGrpSpPr>
+        <p:cNvPr id="1" name=""/>
+        <p:cNvGrpSpPr/>
+        <p:nvPr/>
+      </p:nvGrpSpPr>
+      <p:grpSpPr>
+        <a:xfrm>
+          <a:off x="0" y="0"/>
+          <a:ext cx="0" cy="0"/>
+          <a:chOff x="0" y="0"/>
+          <a:chExt cx="0" cy="0"/>
+        </a:xfrm>
+      </p:grpSpPr>
+      <p:sp>
+        <p:nvSpPr>
+          <p:cNvPr id="2" name="幻灯片图像占位符 1"/>
+          <p:cNvSpPr>
+            <a:spLocks noGrp="1" noRot="1" noChangeAspect="1"/>
+          </p:cNvSpPr>
+          <p:nvPr>
+            <p:ph type="sldImg"/>
+          </p:nvPr>
+        </p:nvSpPr>
+        <p:spPr/>
+      </p:sp>
+      <p:sp>
+        <p:nvSpPr>
+          <p:cNvPr id="3" name="备注占位符 2"/>
+          <p:cNvSpPr>
+            <a:spLocks noGrp="1"/>
+          </p:cNvSpPr>
+          <p:nvPr>
+            <p:ph type="body" idx="1"/>
+          </p:nvPr>
+        </p:nvSpPr>
+        <p:spPr/>
+        <p:txBody>
+          <a:bodyPr/>
+          <a:lstStyle/>
+          <a:p>
+            <a:endParaRPr kumimoji="1" lang="zh-CN" altLang="en-US" dirty="0"/>
+          </a:p>
+        </p:txBody>
+      </p:sp>
+      <p:sp>
+        <p:nvSpPr>
+          <p:cNvPr id="4" name="灯片编号占位符 3"/>
+          <p:cNvSpPr>
+            <a:spLocks noGrp="1"/>
+          </p:cNvSpPr>
+          <p:nvPr>
+            <p:ph type="sldNum" sz="quarter" idx="5"/>
+          </p:nvPr>
+        </p:nvSpPr>
+        <p:spPr/>
+        <p:txBody>
+          <a:bodyPr/>
+          <a:lstStyle/>
+          <a:p>
+            <a:fld id="{76A2A38C-591E-9649-AAD9-143AB214852D}" type="slidenum">
+              <a:rPr kumimoji="1" lang="zh-CN" altLang="en-US" smtClean="0"/>
+              <a:t>6</a:t>
+            </a:fld>
+            <a:endParaRPr kumimoji="1" lang="zh-CN" altLang="en-US"/>
+          </a:p>
+        </p:txBody>
+      </p:sp>
+    </p:spTree>
+    <p:extLst>
+      <p:ext uri="{BB962C8B-B14F-4D97-AF65-F5344CB8AC3E}">
+        <p14:creationId xmlns:p14="http://schemas.microsoft.com/office/powerpoint/2010/main" val="3551374963"/>
+      </p:ext>
+    </p:extLst>
+  </p:cSld>
+  <p:clrMapOvr>
+    <a:masterClrMapping/>
+  </p:clrMapOvr>
+</p:notes>
 </file>
 
 <file path=ppt/slideLayouts/slideLayout1.xml><?xml version="1.0" encoding="utf-8"?>
@@ -164,10 +700,9 @@
           <a:lstStyle/>
           <a:p>
             <a:r>
-              <a:rPr lang="en-US" smtClean="0"/>
+              <a:rPr lang="en-US"/>
               <a:t>Click to edit Master title style</a:t>
             </a:r>
-            <a:endParaRPr lang="en-US"/>
           </a:p>
         </p:txBody>
       </p:sp>
@@ -283,10 +818,9 @@
           </a:lstStyle>
           <a:p>
             <a:r>
-              <a:rPr lang="en-US" smtClean="0"/>
+              <a:rPr lang="en-US"/>
               <a:t>Click to edit Master subtitle style</a:t>
             </a:r>
-            <a:endParaRPr lang="en-US"/>
           </a:p>
         </p:txBody>
       </p:sp>
@@ -307,7 +841,7 @@
           <a:p>
             <a:fld id="{5BCAD085-E8A6-8845-BD4E-CB4CCA059FC4}" type="datetimeFigureOut">
               <a:rPr lang="en-US" smtClean="0"/>
-              <a:t>1/27/13</a:t>
+              <a:t>5/14/26</a:t>
             </a:fld>
             <a:endParaRPr lang="en-US"/>
           </a:p>
@@ -401,10 +935,9 @@
           <a:lstStyle/>
           <a:p>
             <a:r>
-              <a:rPr lang="en-US" smtClean="0"/>
+              <a:rPr lang="en-US"/>
               <a:t>Click to edit Master title style</a:t>
             </a:r>
-            <a:endParaRPr lang="en-US"/>
           </a:p>
         </p:txBody>
       </p:sp>
@@ -425,38 +958,37 @@
           <a:p>
             <a:pPr lvl="0"/>
             <a:r>
-              <a:rPr lang="en-US" smtClean="0"/>
+              <a:rPr lang="en-US"/>
               <a:t>Click to edit Master text styles</a:t>
             </a:r>
           </a:p>
           <a:p>
             <a:pPr lvl="1"/>
             <a:r>
-              <a:rPr lang="en-US" smtClean="0"/>
+              <a:rPr lang="en-US"/>
               <a:t>Second level</a:t>
             </a:r>
           </a:p>
           <a:p>
             <a:pPr lvl="2"/>
             <a:r>
-              <a:rPr lang="en-US" smtClean="0"/>
+              <a:rPr lang="en-US"/>
               <a:t>Third level</a:t>
             </a:r>
           </a:p>
           <a:p>
             <a:pPr lvl="3"/>
             <a:r>
-              <a:rPr lang="en-US" smtClean="0"/>
+              <a:rPr lang="en-US"/>
               <a:t>Fourth level</a:t>
             </a:r>
           </a:p>
           <a:p>
             <a:pPr lvl="4"/>
             <a:r>
-              <a:rPr lang="en-US" smtClean="0"/>
+              <a:rPr lang="en-US"/>
               <a:t>Fifth level</a:t>
             </a:r>
-            <a:endParaRPr lang="en-US"/>
           </a:p>
         </p:txBody>
       </p:sp>
@@ -477,7 +1009,7 @@
           <a:p>
             <a:fld id="{5BCAD085-E8A6-8845-BD4E-CB4CCA059FC4}" type="datetimeFigureOut">
               <a:rPr lang="en-US" smtClean="0"/>
-              <a:t>1/27/13</a:t>
+              <a:t>5/14/26</a:t>
             </a:fld>
             <a:endParaRPr lang="en-US"/>
           </a:p>
@@ -576,10 +1108,9 @@
           <a:lstStyle/>
           <a:p>
             <a:r>
-              <a:rPr lang="en-US" smtClean="0"/>
+              <a:rPr lang="en-US"/>
               <a:t>Click to edit Master title style</a:t>
             </a:r>
-            <a:endParaRPr lang="en-US"/>
           </a:p>
         </p:txBody>
       </p:sp>
@@ -605,38 +1136,37 @@
           <a:p>
             <a:pPr lvl="0"/>
             <a:r>
-              <a:rPr lang="en-US" smtClean="0"/>
+              <a:rPr lang="en-US"/>
               <a:t>Click to edit Master text styles</a:t>
             </a:r>
           </a:p>
           <a:p>
             <a:pPr lvl="1"/>
             <a:r>
-              <a:rPr lang="en-US" smtClean="0"/>
+              <a:rPr lang="en-US"/>
               <a:t>Second level</a:t>
             </a:r>
           </a:p>
           <a:p>
             <a:pPr lvl="2"/>
             <a:r>
-              <a:rPr lang="en-US" smtClean="0"/>
+              <a:rPr lang="en-US"/>
               <a:t>Third level</a:t>
             </a:r>
           </a:p>
           <a:p>
             <a:pPr lvl="3"/>
             <a:r>
-              <a:rPr lang="en-US" smtClean="0"/>
+              <a:rPr lang="en-US"/>
               <a:t>Fourth level</a:t>
             </a:r>
           </a:p>
           <a:p>
             <a:pPr lvl="4"/>
             <a:r>
-              <a:rPr lang="en-US" smtClean="0"/>
+              <a:rPr lang="en-US"/>
               <a:t>Fifth level</a:t>
             </a:r>
-            <a:endParaRPr lang="en-US"/>
           </a:p>
         </p:txBody>
       </p:sp>
@@ -657,7 +1187,7 @@
           <a:p>
             <a:fld id="{5BCAD085-E8A6-8845-BD4E-CB4CCA059FC4}" type="datetimeFigureOut">
               <a:rPr lang="en-US" smtClean="0"/>
-              <a:t>1/27/13</a:t>
+              <a:t>5/14/26</a:t>
             </a:fld>
             <a:endParaRPr lang="en-US"/>
           </a:p>
@@ -751,10 +1281,9 @@
           <a:lstStyle/>
           <a:p>
             <a:r>
-              <a:rPr lang="en-US" smtClean="0"/>
+              <a:rPr lang="en-US"/>
               <a:t>Click to edit Master title style</a:t>
             </a:r>
-            <a:endParaRPr lang="en-US"/>
           </a:p>
         </p:txBody>
       </p:sp>
@@ -775,38 +1304,37 @@
           <a:p>
             <a:pPr lvl="0"/>
             <a:r>
-              <a:rPr lang="en-US" smtClean="0"/>
+              <a:rPr lang="en-US"/>
               <a:t>Click to edit Master text styles</a:t>
             </a:r>
           </a:p>
           <a:p>
             <a:pPr lvl="1"/>
             <a:r>
-              <a:rPr lang="en-US" smtClean="0"/>
+              <a:rPr lang="en-US"/>
               <a:t>Second level</a:t>
             </a:r>
           </a:p>
           <a:p>
             <a:pPr lvl="2"/>
             <a:r>
-              <a:rPr lang="en-US" smtClean="0"/>
+              <a:rPr lang="en-US"/>
               <a:t>Third level</a:t>
             </a:r>
           </a:p>
           <a:p>
             <a:pPr lvl="3"/>
             <a:r>
-              <a:rPr lang="en-US" smtClean="0"/>
+              <a:rPr lang="en-US"/>
               <a:t>Fourth level</a:t>
             </a:r>
           </a:p>
           <a:p>
             <a:pPr lvl="4"/>
             <a:r>
-              <a:rPr lang="en-US" smtClean="0"/>
+              <a:rPr lang="en-US"/>
               <a:t>Fifth level</a:t>
             </a:r>
-            <a:endParaRPr lang="en-US"/>
           </a:p>
         </p:txBody>
       </p:sp>
@@ -827,7 +1355,7 @@
           <a:p>
             <a:fld id="{5BCAD085-E8A6-8845-BD4E-CB4CCA059FC4}" type="datetimeFigureOut">
               <a:rPr lang="en-US" smtClean="0"/>
-              <a:t>1/27/13</a:t>
+              <a:t>5/14/26</a:t>
             </a:fld>
             <a:endParaRPr lang="en-US"/>
           </a:p>
@@ -930,10 +1458,9 @@
           </a:lstStyle>
           <a:p>
             <a:r>
-              <a:rPr lang="en-US" smtClean="0"/>
+              <a:rPr lang="en-US"/>
               <a:t>Click to edit Master title style</a:t>
             </a:r>
-            <a:endParaRPr lang="en-US"/>
           </a:p>
         </p:txBody>
       </p:sp>
@@ -1050,7 +1577,7 @@
           <a:p>
             <a:pPr lvl="0"/>
             <a:r>
-              <a:rPr lang="en-US" smtClean="0"/>
+              <a:rPr lang="en-US"/>
               <a:t>Click to edit Master text styles</a:t>
             </a:r>
           </a:p>
@@ -1073,7 +1600,7 @@
           <a:p>
             <a:fld id="{5BCAD085-E8A6-8845-BD4E-CB4CCA059FC4}" type="datetimeFigureOut">
               <a:rPr lang="en-US" smtClean="0"/>
-              <a:t>1/27/13</a:t>
+              <a:t>5/14/26</a:t>
             </a:fld>
             <a:endParaRPr lang="en-US"/>
           </a:p>
@@ -1167,10 +1694,9 @@
           <a:lstStyle/>
           <a:p>
             <a:r>
-              <a:rPr lang="en-US" smtClean="0"/>
+              <a:rPr lang="en-US"/>
               <a:t>Click to edit Master title style</a:t>
             </a:r>
-            <a:endParaRPr lang="en-US"/>
           </a:p>
         </p:txBody>
       </p:sp>
@@ -1224,38 +1750,37 @@
           <a:p>
             <a:pPr lvl="0"/>
             <a:r>
-              <a:rPr lang="en-US" smtClean="0"/>
+              <a:rPr lang="en-US"/>
               <a:t>Click to edit Master text styles</a:t>
             </a:r>
           </a:p>
           <a:p>
             <a:pPr lvl="1"/>
             <a:r>
-              <a:rPr lang="en-US" smtClean="0"/>
+              <a:rPr lang="en-US"/>
               <a:t>Second level</a:t>
             </a:r>
           </a:p>
           <a:p>
             <a:pPr lvl="2"/>
             <a:r>
-              <a:rPr lang="en-US" smtClean="0"/>
+              <a:rPr lang="en-US"/>
               <a:t>Third level</a:t>
             </a:r>
           </a:p>
           <a:p>
             <a:pPr lvl="3"/>
             <a:r>
-              <a:rPr lang="en-US" smtClean="0"/>
+              <a:rPr lang="en-US"/>
               <a:t>Fourth level</a:t>
             </a:r>
           </a:p>
           <a:p>
             <a:pPr lvl="4"/>
             <a:r>
-              <a:rPr lang="en-US" smtClean="0"/>
+              <a:rPr lang="en-US"/>
               <a:t>Fifth level</a:t>
             </a:r>
-            <a:endParaRPr lang="en-US"/>
           </a:p>
         </p:txBody>
       </p:sp>
@@ -1309,38 +1834,37 @@
           <a:p>
             <a:pPr lvl="0"/>
             <a:r>
-              <a:rPr lang="en-US" smtClean="0"/>
+              <a:rPr lang="en-US"/>
               <a:t>Click to edit Master text styles</a:t>
             </a:r>
           </a:p>
           <a:p>
             <a:pPr lvl="1"/>
             <a:r>
-              <a:rPr lang="en-US" smtClean="0"/>
+              <a:rPr lang="en-US"/>
               <a:t>Second level</a:t>
             </a:r>
           </a:p>
           <a:p>
             <a:pPr lvl="2"/>
             <a:r>
-              <a:rPr lang="en-US" smtClean="0"/>
+              <a:rPr lang="en-US"/>
               <a:t>Third level</a:t>
             </a:r>
           </a:p>
           <a:p>
             <a:pPr lvl="3"/>
             <a:r>
-              <a:rPr lang="en-US" smtClean="0"/>
+              <a:rPr lang="en-US"/>
               <a:t>Fourth level</a:t>
             </a:r>
           </a:p>
           <a:p>
             <a:pPr lvl="4"/>
             <a:r>
-              <a:rPr lang="en-US" smtClean="0"/>
+              <a:rPr lang="en-US"/>
               <a:t>Fifth level</a:t>
             </a:r>
-            <a:endParaRPr lang="en-US"/>
           </a:p>
         </p:txBody>
       </p:sp>
@@ -1361,7 +1885,7 @@
           <a:p>
             <a:fld id="{5BCAD085-E8A6-8845-BD4E-CB4CCA059FC4}" type="datetimeFigureOut">
               <a:rPr lang="en-US" smtClean="0"/>
-              <a:t>1/27/13</a:t>
+              <a:t>5/14/26</a:t>
             </a:fld>
             <a:endParaRPr lang="en-US"/>
           </a:p>
@@ -1459,10 +1983,9 @@
           </a:lstStyle>
           <a:p>
             <a:r>
-              <a:rPr lang="en-US" smtClean="0"/>
+              <a:rPr lang="en-US"/>
               <a:t>Click to edit Master title style</a:t>
             </a:r>
-            <a:endParaRPr lang="en-US"/>
           </a:p>
         </p:txBody>
       </p:sp>
@@ -1525,7 +2048,7 @@
           <a:p>
             <a:pPr lvl="0"/>
             <a:r>
-              <a:rPr lang="en-US" smtClean="0"/>
+              <a:rPr lang="en-US"/>
               <a:t>Click to edit Master text styles</a:t>
             </a:r>
           </a:p>
@@ -1581,38 +2104,37 @@
           <a:p>
             <a:pPr lvl="0"/>
             <a:r>
-              <a:rPr lang="en-US" smtClean="0"/>
+              <a:rPr lang="en-US"/>
               <a:t>Click to edit Master text styles</a:t>
             </a:r>
           </a:p>
           <a:p>
             <a:pPr lvl="1"/>
             <a:r>
-              <a:rPr lang="en-US" smtClean="0"/>
+              <a:rPr lang="en-US"/>
               <a:t>Second level</a:t>
             </a:r>
           </a:p>
           <a:p>
             <a:pPr lvl="2"/>
             <a:r>
-              <a:rPr lang="en-US" smtClean="0"/>
+              <a:rPr lang="en-US"/>
               <a:t>Third level</a:t>
             </a:r>
           </a:p>
           <a:p>
             <a:pPr lvl="3"/>
             <a:r>
-              <a:rPr lang="en-US" smtClean="0"/>
+              <a:rPr lang="en-US"/>
               <a:t>Fourth level</a:t>
             </a:r>
           </a:p>
           <a:p>
             <a:pPr lvl="4"/>
             <a:r>
-              <a:rPr lang="en-US" smtClean="0"/>
+              <a:rPr lang="en-US"/>
               <a:t>Fifth level</a:t>
             </a:r>
-            <a:endParaRPr lang="en-US"/>
           </a:p>
         </p:txBody>
       </p:sp>
@@ -1675,7 +2197,7 @@
           <a:p>
             <a:pPr lvl="0"/>
             <a:r>
-              <a:rPr lang="en-US" smtClean="0"/>
+              <a:rPr lang="en-US"/>
               <a:t>Click to edit Master text styles</a:t>
             </a:r>
           </a:p>
@@ -1731,38 +2253,37 @@
           <a:p>
             <a:pPr lvl="0"/>
             <a:r>
-              <a:rPr lang="en-US" smtClean="0"/>
+              <a:rPr lang="en-US"/>
               <a:t>Click to edit Master text styles</a:t>
             </a:r>
           </a:p>
           <a:p>
             <a:pPr lvl="1"/>
             <a:r>
-              <a:rPr lang="en-US" smtClean="0"/>
+              <a:rPr lang="en-US"/>
               <a:t>Second level</a:t>
             </a:r>
           </a:p>
           <a:p>
             <a:pPr lvl="2"/>
             <a:r>
-              <a:rPr lang="en-US" smtClean="0"/>
+              <a:rPr lang="en-US"/>
               <a:t>Third level</a:t>
             </a:r>
           </a:p>
           <a:p>
             <a:pPr lvl="3"/>
             <a:r>
-              <a:rPr lang="en-US" smtClean="0"/>
+              <a:rPr lang="en-US"/>
               <a:t>Fourth level</a:t>
             </a:r>
           </a:p>
           <a:p>
             <a:pPr lvl="4"/>
             <a:r>
-              <a:rPr lang="en-US" smtClean="0"/>
+              <a:rPr lang="en-US"/>
               <a:t>Fifth level</a:t>
             </a:r>
-            <a:endParaRPr lang="en-US"/>
           </a:p>
         </p:txBody>
       </p:sp>
@@ -1783,7 +2304,7 @@
           <a:p>
             <a:fld id="{5BCAD085-E8A6-8845-BD4E-CB4CCA059FC4}" type="datetimeFigureOut">
               <a:rPr lang="en-US" smtClean="0"/>
-              <a:t>1/27/13</a:t>
+              <a:t>5/14/26</a:t>
             </a:fld>
             <a:endParaRPr lang="en-US"/>
           </a:p>
@@ -1877,10 +2398,9 @@
           <a:lstStyle/>
           <a:p>
             <a:r>
-              <a:rPr lang="en-US" smtClean="0"/>
+              <a:rPr lang="en-US"/>
               <a:t>Click to edit Master title style</a:t>
             </a:r>
-            <a:endParaRPr lang="en-US"/>
           </a:p>
         </p:txBody>
       </p:sp>
@@ -1901,7 +2421,7 @@
           <a:p>
             <a:fld id="{5BCAD085-E8A6-8845-BD4E-CB4CCA059FC4}" type="datetimeFigureOut">
               <a:rPr lang="en-US" smtClean="0"/>
-              <a:t>1/27/13</a:t>
+              <a:t>5/14/26</a:t>
             </a:fld>
             <a:endParaRPr lang="en-US"/>
           </a:p>
@@ -1996,7 +2516,7 @@
           <a:p>
             <a:fld id="{5BCAD085-E8A6-8845-BD4E-CB4CCA059FC4}" type="datetimeFigureOut">
               <a:rPr lang="en-US" smtClean="0"/>
-              <a:t>1/27/13</a:t>
+              <a:t>5/14/26</a:t>
             </a:fld>
             <a:endParaRPr lang="en-US"/>
           </a:p>
@@ -2099,10 +2619,9 @@
           </a:lstStyle>
           <a:p>
             <a:r>
-              <a:rPr lang="en-US" smtClean="0"/>
+              <a:rPr lang="en-US"/>
               <a:t>Click to edit Master title style</a:t>
             </a:r>
-            <a:endParaRPr lang="en-US"/>
           </a:p>
         </p:txBody>
       </p:sp>
@@ -2156,38 +2675,37 @@
           <a:p>
             <a:pPr lvl="0"/>
             <a:r>
-              <a:rPr lang="en-US" smtClean="0"/>
+              <a:rPr lang="en-US"/>
               <a:t>Click to edit Master text styles</a:t>
             </a:r>
           </a:p>
           <a:p>
             <a:pPr lvl="1"/>
             <a:r>
-              <a:rPr lang="en-US" smtClean="0"/>
+              <a:rPr lang="en-US"/>
               <a:t>Second level</a:t>
             </a:r>
           </a:p>
           <a:p>
             <a:pPr lvl="2"/>
             <a:r>
-              <a:rPr lang="en-US" smtClean="0"/>
+              <a:rPr lang="en-US"/>
               <a:t>Third level</a:t>
             </a:r>
           </a:p>
           <a:p>
             <a:pPr lvl="3"/>
             <a:r>
-              <a:rPr lang="en-US" smtClean="0"/>
+              <a:rPr lang="en-US"/>
               <a:t>Fourth level</a:t>
             </a:r>
           </a:p>
           <a:p>
             <a:pPr lvl="4"/>
             <a:r>
-              <a:rPr lang="en-US" smtClean="0"/>
+              <a:rPr lang="en-US"/>
               <a:t>Fifth level</a:t>
             </a:r>
-            <a:endParaRPr lang="en-US"/>
           </a:p>
         </p:txBody>
       </p:sp>
@@ -2250,7 +2768,7 @@
           <a:p>
             <a:pPr lvl="0"/>
             <a:r>
-              <a:rPr lang="en-US" smtClean="0"/>
+              <a:rPr lang="en-US"/>
               <a:t>Click to edit Master text styles</a:t>
             </a:r>
           </a:p>
@@ -2273,7 +2791,7 @@
           <a:p>
             <a:fld id="{5BCAD085-E8A6-8845-BD4E-CB4CCA059FC4}" type="datetimeFigureOut">
               <a:rPr lang="en-US" smtClean="0"/>
-              <a:t>1/27/13</a:t>
+              <a:t>5/14/26</a:t>
             </a:fld>
             <a:endParaRPr lang="en-US"/>
           </a:p>
@@ -2376,10 +2894,9 @@
           </a:lstStyle>
           <a:p>
             <a:r>
-              <a:rPr lang="en-US" smtClean="0"/>
+              <a:rPr lang="en-US"/>
               <a:t>Click to edit Master title style</a:t>
             </a:r>
-            <a:endParaRPr lang="en-US"/>
           </a:p>
         </p:txBody>
       </p:sp>
@@ -2503,7 +3020,7 @@
           <a:p>
             <a:pPr lvl="0"/>
             <a:r>
-              <a:rPr lang="en-US" smtClean="0"/>
+              <a:rPr lang="en-US"/>
               <a:t>Click to edit Master text styles</a:t>
             </a:r>
           </a:p>
@@ -2526,7 +3043,7 @@
           <a:p>
             <a:fld id="{5BCAD085-E8A6-8845-BD4E-CB4CCA059FC4}" type="datetimeFigureOut">
               <a:rPr lang="en-US" smtClean="0"/>
-              <a:t>1/27/13</a:t>
+              <a:t>5/14/26</a:t>
             </a:fld>
             <a:endParaRPr lang="en-US"/>
           </a:p>
@@ -2635,10 +3152,9 @@
           <a:lstStyle/>
           <a:p>
             <a:r>
-              <a:rPr lang="en-US" smtClean="0"/>
+              <a:rPr lang="en-US"/>
               <a:t>Click to edit Master title style</a:t>
             </a:r>
-            <a:endParaRPr lang="en-US"/>
           </a:p>
         </p:txBody>
       </p:sp>
@@ -2669,38 +3185,37 @@
           <a:p>
             <a:pPr lvl="0"/>
             <a:r>
-              <a:rPr lang="en-US" smtClean="0"/>
+              <a:rPr lang="en-US"/>
               <a:t>Click to edit Master text styles</a:t>
             </a:r>
           </a:p>
           <a:p>
             <a:pPr lvl="1"/>
             <a:r>
-              <a:rPr lang="en-US" smtClean="0"/>
+              <a:rPr lang="en-US"/>
               <a:t>Second level</a:t>
             </a:r>
           </a:p>
           <a:p>
             <a:pPr lvl="2"/>
             <a:r>
-              <a:rPr lang="en-US" smtClean="0"/>
+              <a:rPr lang="en-US"/>
               <a:t>Third level</a:t>
             </a:r>
           </a:p>
           <a:p>
             <a:pPr lvl="3"/>
             <a:r>
-              <a:rPr lang="en-US" smtClean="0"/>
+              <a:rPr lang="en-US"/>
               <a:t>Fourth level</a:t>
             </a:r>
           </a:p>
           <a:p>
             <a:pPr lvl="4"/>
             <a:r>
-              <a:rPr lang="en-US" smtClean="0"/>
+              <a:rPr lang="en-US"/>
               <a:t>Fifth level</a:t>
             </a:r>
-            <a:endParaRPr lang="en-US"/>
           </a:p>
         </p:txBody>
       </p:sp>
@@ -2739,7 +3254,7 @@
           <a:p>
             <a:fld id="{5BCAD085-E8A6-8845-BD4E-CB4CCA059FC4}" type="datetimeFigureOut">
               <a:rPr lang="en-US" smtClean="0"/>
-              <a:t>1/27/13</a:t>
+              <a:t>5/14/26</a:t>
             </a:fld>
             <a:endParaRPr lang="en-US"/>
           </a:p>
@@ -3098,7 +3613,7 @@
 </file>
 
 <file path=ppt/slides/slide1.xml><?xml version="1.0" encoding="utf-8"?>
-<p:sld xmlns:a="http://schemas.openxmlformats.org/drawingml/2006/main" xmlns:p="http://schemas.openxmlformats.org/presentationml/2006/main" xmlns:r="http://schemas.openxmlformats.org/officeDocument/2006/relationships">
+<p:sld xmlns:a="http://schemas.openxmlformats.org/drawingml/2006/main" xmlns:r="http://schemas.openxmlformats.org/officeDocument/2006/relationships" xmlns:p="http://schemas.openxmlformats.org/presentationml/2006/main">
   <p:cSld>
     <p:bg>
       <p:bgPr>
@@ -3114,7 +3629,14 @@
         <p:cNvGrpSpPr/>
         <p:nvPr/>
       </p:nvGrpSpPr>
-      <p:grpSpPr/>
+      <p:grpSpPr>
+        <a:xfrm>
+          <a:off x="0" y="0"/>
+          <a:ext cx="0" cy="0"/>
+          <a:chOff x="0" y="0"/>
+          <a:chExt cx="0" cy="0"/>
+        </a:xfrm>
+      </p:grpSpPr>
       <p:sp>
         <p:nvSpPr>
           <p:cNvPr id="2" name="Rectangle 1"/>
@@ -3155,6 +3677,7 @@
           <a:lstStyle/>
           <a:p>
             <a:pPr algn="ctr"/>
+            <a:endParaRPr/>
           </a:p>
         </p:txBody>
       </p:sp>
@@ -3268,6 +3791,7 @@
           <a:lstStyle/>
           <a:p>
             <a:pPr algn="ctr"/>
+            <a:endParaRPr/>
           </a:p>
         </p:txBody>
       </p:sp>
@@ -3385,7 +3909,7 @@
 </file>
 
 <file path=ppt/slides/slide10.xml><?xml version="1.0" encoding="utf-8"?>
-<p:sld xmlns:a="http://schemas.openxmlformats.org/drawingml/2006/main" xmlns:p="http://schemas.openxmlformats.org/presentationml/2006/main" xmlns:r="http://schemas.openxmlformats.org/officeDocument/2006/relationships">
+<p:sld xmlns:a="http://schemas.openxmlformats.org/drawingml/2006/main" xmlns:r="http://schemas.openxmlformats.org/officeDocument/2006/relationships" xmlns:p="http://schemas.openxmlformats.org/presentationml/2006/main">
   <p:cSld>
     <p:bg>
       <p:bgPr>
@@ -3401,7 +3925,14 @@
         <p:cNvGrpSpPr/>
         <p:nvPr/>
       </p:nvGrpSpPr>
-      <p:grpSpPr/>
+      <p:grpSpPr>
+        <a:xfrm>
+          <a:off x="0" y="0"/>
+          <a:ext cx="0" cy="0"/>
+          <a:chOff x="0" y="0"/>
+          <a:chExt cx="0" cy="0"/>
+        </a:xfrm>
+      </p:grpSpPr>
       <p:sp>
         <p:nvSpPr>
           <p:cNvPr id="2" name="Rectangle 1"/>
@@ -3442,6 +3973,7 @@
           <a:lstStyle/>
           <a:p>
             <a:pPr algn="ctr"/>
+            <a:endParaRPr/>
           </a:p>
         </p:txBody>
       </p:sp>
@@ -3555,6 +4087,7 @@
           <a:lstStyle/>
           <a:p>
             <a:pPr algn="ctr"/>
+            <a:endParaRPr/>
           </a:p>
         </p:txBody>
       </p:sp>
@@ -3635,6 +4168,7 @@
           <a:lstStyle/>
           <a:p>
             <a:pPr algn="ctr"/>
+            <a:endParaRPr/>
           </a:p>
         </p:txBody>
       </p:sp>
@@ -3686,7 +4220,7 @@
         <p:spPr>
           <a:xfrm>
             <a:off x="640080" y="2651760"/>
-            <a:ext cx="3200400" cy="822960"/>
+            <a:ext cx="3200400" cy="492443"/>
           </a:xfrm>
           <a:prstGeom prst="rect">
             <a:avLst/>
@@ -3707,16 +4241,29 @@
               </a:defRPr>
             </a:pPr>
             <a:r>
-              <a:t>开户/交易/销户</a:t>
-            </a:r>
-            <a:br/>
-            <a:r>
-              <a:t>100K 钱包</a:t>
-            </a:r>
-            <a:br/>
-            <a:r>
-              <a:t>~5% 异常率</a:t>
-            </a:r>
+              <a:rPr dirty="0" err="1"/>
+              <a:t>开户</a:t>
+            </a:r>
+            <a:r>
+              <a:rPr dirty="0"/>
+              <a:t>/</a:t>
+            </a:r>
+            <a:r>
+              <a:rPr dirty="0" err="1"/>
+              <a:t>交易</a:t>
+            </a:r>
+            <a:r>
+              <a:rPr dirty="0"/>
+              <a:t>/</a:t>
+            </a:r>
+            <a:r>
+              <a:rPr dirty="0" err="1"/>
+              <a:t>销户</a:t>
+            </a:r>
+            <a:br>
+              <a:rPr dirty="0"/>
+            </a:br>
+            <a:endParaRPr dirty="0"/>
           </a:p>
         </p:txBody>
       </p:sp>
@@ -3760,6 +4307,7 @@
           <a:lstStyle/>
           <a:p>
             <a:pPr algn="ctr"/>
+            <a:endParaRPr/>
           </a:p>
         </p:txBody>
       </p:sp>
@@ -3840,6 +4388,7 @@
           <a:lstStyle/>
           <a:p>
             <a:pPr algn="ctr"/>
+            <a:endParaRPr/>
           </a:p>
         </p:txBody>
       </p:sp>
@@ -3965,6 +4514,7 @@
           <a:lstStyle/>
           <a:p>
             <a:pPr algn="ctr"/>
+            <a:endParaRPr/>
           </a:p>
         </p:txBody>
       </p:sp>
@@ -4045,6 +4595,7 @@
           <a:lstStyle/>
           <a:p>
             <a:pPr algn="ctr"/>
+            <a:endParaRPr/>
           </a:p>
         </p:txBody>
       </p:sp>
@@ -4117,15 +4668,15 @@
               </a:defRPr>
             </a:pPr>
             <a:r>
-              <a:t>8种交易模式说明(~1200)</a:t>
+              <a:t>专家访谈 → 压缩</a:t>
             </a:r>
             <a:br/>
             <a:r>
-              <a:t>专家访谈+识别点(~1800)</a:t>
+              <a:t>识别点 → top-3/类</a:t>
             </a:r>
             <a:br/>
             <a:r>
-              <a:t>总计 ~4000 token</a:t>
+              <a:t>总计 ~2800 token</a:t>
             </a:r>
           </a:p>
         </p:txBody>
@@ -4170,6 +4721,7 @@
           <a:lstStyle/>
           <a:p>
             <a:pPr algn="ctr"/>
+            <a:endParaRPr/>
           </a:p>
         </p:txBody>
       </p:sp>
@@ -4250,6 +4802,7 @@
           <a:lstStyle/>
           <a:p>
             <a:pPr algn="ctr"/>
+            <a:endParaRPr/>
           </a:p>
         </p:txBody>
       </p:sp>
@@ -4375,6 +4928,7 @@
           <a:lstStyle/>
           <a:p>
             <a:pPr algn="ctr"/>
+            <a:endParaRPr/>
           </a:p>
         </p:txBody>
       </p:sp>
@@ -4455,6 +5009,7 @@
           <a:lstStyle/>
           <a:p>
             <a:pPr algn="ctr"/>
+            <a:endParaRPr/>
           </a:p>
         </p:txBody>
       </p:sp>
@@ -4580,6 +5135,7 @@
           <a:lstStyle/>
           <a:p>
             <a:pPr algn="ctr"/>
+            <a:endParaRPr/>
           </a:p>
         </p:txBody>
       </p:sp>
@@ -4660,6 +5216,7 @@
           <a:lstStyle/>
           <a:p>
             <a:pPr algn="ctr"/>
+            <a:endParaRPr/>
           </a:p>
         </p:txBody>
       </p:sp>
@@ -4732,7 +5289,7 @@
               </a:defRPr>
             </a:pPr>
             <a:r>
-              <a:t>~5100 token</a:t>
+              <a:t>~3900 token</a:t>
             </a:r>
             <a:br/>
             <a:r>
@@ -4740,7 +5297,7 @@
             </a:r>
             <a:br/>
             <a:r>
-              <a:t>16K+ 模型宽裕</a:t>
+              <a:t>8K 模型可容纳</a:t>
             </a:r>
           </a:p>
         </p:txBody>
@@ -4789,7 +5346,7 @@
 </file>
 
 <file path=ppt/slides/slide11.xml><?xml version="1.0" encoding="utf-8"?>
-<p:sld xmlns:a="http://schemas.openxmlformats.org/drawingml/2006/main" xmlns:p="http://schemas.openxmlformats.org/presentationml/2006/main" xmlns:r="http://schemas.openxmlformats.org/officeDocument/2006/relationships">
+<p:sld xmlns:a="http://schemas.openxmlformats.org/drawingml/2006/main" xmlns:r="http://schemas.openxmlformats.org/officeDocument/2006/relationships" xmlns:p="http://schemas.openxmlformats.org/presentationml/2006/main">
   <p:cSld>
     <p:bg>
       <p:bgPr>
@@ -4805,7 +5362,14 @@
         <p:cNvGrpSpPr/>
         <p:nvPr/>
       </p:nvGrpSpPr>
-      <p:grpSpPr/>
+      <p:grpSpPr>
+        <a:xfrm>
+          <a:off x="0" y="0"/>
+          <a:ext cx="0" cy="0"/>
+          <a:chOff x="0" y="0"/>
+          <a:chExt cx="0" cy="0"/>
+        </a:xfrm>
+      </p:grpSpPr>
       <p:sp>
         <p:nvSpPr>
           <p:cNvPr id="2" name="Rectangle 1"/>
@@ -4846,6 +5410,7 @@
           <a:lstStyle/>
           <a:p>
             <a:pPr algn="ctr"/>
+            <a:endParaRPr/>
           </a:p>
         </p:txBody>
       </p:sp>
@@ -4879,7 +5444,7 @@
               </a:defRPr>
             </a:pPr>
             <a:r>
-              <a:t>05 核心流程：Phase 1-2 维度岛屿搜索循环</a:t>
+              <a:t>05 核心流程：Phase 1-2 进化搜索循环</a:t>
             </a:r>
           </a:p>
         </p:txBody>
@@ -4914,7 +5479,7 @@
               </a:defRPr>
             </a:pPr>
             <a:r>
-              <a:t>4 维度岛屿 × 3 候选 × 最多 10 轮</a:t>
+              <a:t>3 岛屿 × 3 候选 × 最多 10 轮</a:t>
             </a:r>
           </a:p>
         </p:txBody>
@@ -4959,6 +5524,7 @@
           <a:lstStyle/>
           <a:p>
             <a:pPr algn="ctr"/>
+            <a:endParaRPr/>
           </a:p>
         </p:txBody>
       </p:sp>
@@ -5039,6 +5605,7 @@
           <a:lstStyle/>
           <a:p>
             <a:pPr algn="ctr"/>
+            <a:endParaRPr/>
           </a:p>
         </p:txBody>
       </p:sp>
@@ -5072,23 +5639,27 @@
               </a:defRPr>
             </a:pPr>
             <a:r>
-              <a:t>4 个维度岛屿各自：</a:t>
+              <a:t>3 个岛屿各自：</a:t>
             </a:r>
             <a:br/>
             <a:r>
-              <a:t>• 金额/时间/行为/主体</a:t>
+              <a:t>• Boltzmann 采样 k=2 示例</a:t>
             </a:r>
             <a:br/>
             <a:r>
-              <a:t>• Boltzmann采样 + 维度引导</a:t>
+              <a:t>• 构建 User Prompt</a:t>
             </a:r>
             <a:br/>
             <a:r>
+              <a:t>  (SHAP + 示例 + 失败记录)</a:t>
+            </a:r>
+            <a:br/>
+            <a:r>
               <a:t>• 调用 LLM 生成 b=3 候选</a:t>
             </a:r>
             <a:br/>
             <a:r>
-              <a:t>→ 本轮共 12 个候选特征</a:t>
+              <a:t>→ 本轮共 9 个候选特征</a:t>
             </a:r>
           </a:p>
         </p:txBody>
@@ -5168,6 +5739,7 @@
           <a:lstStyle/>
           <a:p>
             <a:pPr algn="ctr"/>
+            <a:endParaRPr/>
           </a:p>
         </p:txBody>
       </p:sp>
@@ -5248,6 +5820,7 @@
           <a:lstStyle/>
           <a:p>
             <a:pPr algn="ctr"/>
+            <a:endParaRPr/>
           </a:p>
         </p:txBody>
       </p:sp>
@@ -5381,6 +5954,7 @@
           <a:lstStyle/>
           <a:p>
             <a:pPr algn="ctr"/>
+            <a:endParaRPr/>
           </a:p>
         </p:txBody>
       </p:sp>
@@ -5461,6 +6035,7 @@
           <a:lstStyle/>
           <a:p>
             <a:pPr algn="ctr"/>
+            <a:endParaRPr/>
           </a:p>
         </p:txBody>
       </p:sp>
@@ -5594,6 +6169,7 @@
           <a:lstStyle/>
           <a:p>
             <a:pPr algn="ctr"/>
+            <a:endParaRPr/>
           </a:p>
         </p:txBody>
       </p:sp>
@@ -5674,6 +6250,7 @@
           <a:lstStyle/>
           <a:p>
             <a:pPr algn="ctr"/>
+            <a:endParaRPr/>
           </a:p>
         </p:txBody>
       </p:sp>
@@ -5774,6 +6351,7 @@
           <a:lstStyle/>
           <a:p>
             <a:pPr algn="ctr"/>
+            <a:endParaRPr/>
           </a:p>
         </p:txBody>
       </p:sp>
@@ -5807,7 +6385,7 @@
               </a:defRPr>
             </a:pPr>
             <a:r>
-              <a:t>收敛判断：连续 2 轮无新特征通过 → 停止    |    SHAP 全局共享 + 维度引导岛屿专属 + Boltzmann 岛屿独立</a:t>
+              <a:t>收敛判断：连续 2 轮无新特征通过接受条件 → 停止    |    SHAP 全局共享（搜索方向）+ Boltzmann 岛屿独立（搜索多样性）</a:t>
             </a:r>
           </a:p>
         </p:txBody>
@@ -5842,7 +6420,7 @@
               </a:defRPr>
             </a:pPr>
             <a:r>
-              <a:t>关键参数：m=4 维度岛屿  |  b=3 候选/岛/轮  |  k=2 示例  |  T&lt;=10 轮  |  最多 120 次 LLM 调用  |  beta=0.01</a:t>
+              <a:t>关键参数：m=3 岛屿  |  b=3 候选/岛/轮  |  k=2 in-context 示例  |  T≤10 轮  |  最多 90 次 LLM 调用  |  β=0.01 接受容忍度</a:t>
             </a:r>
           </a:p>
         </p:txBody>
@@ -5891,7 +6469,7 @@
 </file>
 
 <file path=ppt/slides/slide12.xml><?xml version="1.0" encoding="utf-8"?>
-<p:sld xmlns:a="http://schemas.openxmlformats.org/drawingml/2006/main" xmlns:p="http://schemas.openxmlformats.org/presentationml/2006/main" xmlns:r="http://schemas.openxmlformats.org/officeDocument/2006/relationships">
+<p:sld xmlns:a="http://schemas.openxmlformats.org/drawingml/2006/main" xmlns:r="http://schemas.openxmlformats.org/officeDocument/2006/relationships" xmlns:p="http://schemas.openxmlformats.org/presentationml/2006/main">
   <p:cSld>
     <p:bg>
       <p:bgPr>
@@ -5907,7 +6485,14 @@
         <p:cNvGrpSpPr/>
         <p:nvPr/>
       </p:nvGrpSpPr>
-      <p:grpSpPr/>
+      <p:grpSpPr>
+        <a:xfrm>
+          <a:off x="0" y="0"/>
+          <a:ext cx="0" cy="0"/>
+          <a:chOff x="0" y="0"/>
+          <a:chExt cx="0" cy="0"/>
+        </a:xfrm>
+      </p:grpSpPr>
       <p:sp>
         <p:nvSpPr>
           <p:cNvPr id="2" name="Rectangle 1"/>
@@ -5948,6 +6533,7 @@
           <a:lstStyle/>
           <a:p>
             <a:pPr algn="ctr"/>
+            <a:endParaRPr/>
           </a:p>
         </p:txBody>
       </p:sp>
@@ -5981,7 +6567,7 @@
               </a:defRPr>
             </a:pPr>
             <a:r>
-              <a:t>05 维度岛屿与 SHAP 融合细节</a:t>
+              <a:t>05 SHAP 与岛屿进化的融合细节</a:t>
             </a:r>
           </a:p>
         </p:txBody>
@@ -6016,7 +6602,7 @@
               </a:defRPr>
             </a:pPr>
             <a:r>
-              <a:t>维度分工 + 全局引导 + 局部多样性</a:t>
+              <a:t>全局引导 + 局部多样性</a:t>
             </a:r>
           </a:p>
         </p:txBody>
@@ -6096,6 +6682,7 @@
           <a:lstStyle/>
           <a:p>
             <a:pPr algn="ctr"/>
+            <a:endParaRPr/>
           </a:p>
         </p:txBody>
       </p:sp>
@@ -6168,7 +6755,7 @@
             </a:r>
             <a:br/>
             <a:r>
-              <a:t>所有岛屿共享 SHAP 反馈，弱势维度对应到具体岛屿</a:t>
+              <a:t>所有岛屿共享同一份 SHAP 反馈</a:t>
             </a:r>
           </a:p>
         </p:txBody>
@@ -6213,6 +6800,7 @@
           <a:lstStyle/>
           <a:p>
             <a:pPr algn="ctr"/>
+            <a:endParaRPr/>
           </a:p>
         </p:txBody>
       </p:sp>
@@ -6246,7 +6834,7 @@
               </a:defRPr>
             </a:pPr>
             <a:r>
-              <a:t>2. 维度引导 + 岛屿独立采样</a:t>
+              <a:t>2. 岛屿独立采样</a:t>
             </a:r>
           </a:p>
         </p:txBody>
@@ -6281,11 +6869,11 @@
               </a:defRPr>
             </a:pPr>
             <a:r>
-              <a:t>每个岛屿附加维度引导词(如'重点探索金额频次')</a:t>
+              <a:t>每个岛屿独立 Boltzmann 采样 k=2 示例</a:t>
             </a:r>
             <a:br/>
             <a:r>
-              <a:t>Boltzmann 独立采样 k=2 示例 → 岛屿 prompt 不同</a:t>
+              <a:t>不同岛屿看到不同 in-context 示例 → 多样性</a:t>
             </a:r>
           </a:p>
         </p:txBody>
@@ -6330,6 +6918,7 @@
           <a:lstStyle/>
           <a:p>
             <a:pPr algn="ctr"/>
+            <a:endParaRPr/>
           </a:p>
         </p:txBody>
       </p:sp>
@@ -6363,7 +6952,7 @@
               </a:defRPr>
             </a:pPr>
             <a:r>
-              <a:t>3. Prompt = 维度引导(专属) + SHAP(共享) + 示例(独立)</a:t>
+              <a:t>3. Prompt = SHAP(共享) + 示例(独立) + 失败记忆(共享)</a:t>
             </a:r>
           </a:p>
         </p:txBody>
@@ -6398,11 +6987,11 @@
               </a:defRPr>
             </a:pPr>
             <a:r>
-              <a:t>User Prompt 三部分组合</a:t>
+              <a:t>User Prompt 三部分组合，每个岛屿的 prompt 不同</a:t>
             </a:r>
             <a:br/>
             <a:r>
-              <a:t>维度引导让 LLM 聚焦，SHAP 提供全局方向</a:t>
+              <a:t>因为 in-context 示例不同</a:t>
             </a:r>
           </a:p>
         </p:txBody>
@@ -6447,6 +7036,7 @@
           <a:lstStyle/>
           <a:p>
             <a:pPr algn="ctr"/>
+            <a:endParaRPr/>
           </a:p>
         </p:txBody>
       </p:sp>
@@ -6480,7 +7070,7 @@
               </a:defRPr>
             </a:pPr>
             <a:r>
-              <a:t>4. 跨维度迁移</a:t>
+              <a:t>4. 岛屿间迁移</a:t>
             </a:r>
           </a:p>
         </p:txBody>
@@ -6519,7 +7109,7 @@
             </a:r>
             <a:br/>
             <a:r>
-              <a:t>好经验跨维度传播，如金额发现启发主体关联</a:t>
+              <a:t>好特征传播，提高整体搜索质量</a:t>
             </a:r>
           </a:p>
         </p:txBody>
@@ -6601,6 +7191,7 @@
           <a:lstStyle/>
           <a:p>
             <a:pPr algn="ctr"/>
+            <a:endParaRPr/>
           </a:p>
         </p:txBody>
       </p:sp>
@@ -6634,47 +7225,47 @@
               </a:defRPr>
             </a:pPr>
             <a:r>
-              <a:t>三层改进：</a:t>
+              <a:t>问题：搜索效率 vs 搜索方向</a:t>
             </a:r>
             <a:br/>
             <a:br/>
             <a:r>
-              <a:t>1. 维度划分（我们的改进）</a:t>
+              <a:t>• LLM-FE 原论文：多岛屿并行，搜索效率高</a:t>
             </a:r>
             <a:br/>
             <a:r>
-              <a:t>   原论文岛屿随机分组 → 我们按风险维度分</a:t>
-            </a:r>
-            <a:br/>
-            <a:r>
-              <a:t>   金额频次 / 时间地域 / 行为序列 / 主体关联</a:t>
+              <a:t>  但搜索方向完全随机，靠运气</a:t>
             </a:r>
             <a:br/>
             <a:br/>
             <a:r>
-              <a:t>2. SHAP 全局引导（MedFeat）</a:t>
+              <a:t>• MedFeat 原论文：SHAP 引导方向精准</a:t>
             </a:r>
             <a:br/>
             <a:r>
-              <a:t>   弱势维度 → 对应岛屿加强探索</a:t>
+              <a:t>  但单线迭代，搜索效率低</a:t>
             </a:r>
             <a:br/>
             <a:br/>
             <a:r>
-              <a:t>3. 交易模式说明（浦发文档）</a:t>
+              <a:t>我们的融合方案：</a:t>
             </a:r>
             <a:br/>
             <a:r>
-              <a:t>   LLM 知道每种风险模式的参数</a:t>
+              <a:t>✓ SHAP 全局共享 → 所有岛屿知道方向</a:t>
             </a:r>
             <a:br/>
             <a:r>
-              <a:t>   → 精准构造交叉特征</a:t>
+              <a:t>✓ Boltzmann 独立 → 各岛屿保持多样性</a:t>
+            </a:r>
+            <a:br/>
+            <a:r>
+              <a:t>✓ 迁移最优 → 好经验快速传播</a:t>
             </a:r>
             <a:br/>
             <a:br/>
             <a:r>
-              <a:t>= 高效 + 有方向 + 有分工</a:t>
+              <a:t>= 高效 + 有方向 + 多样性</a:t>
             </a:r>
           </a:p>
         </p:txBody>
@@ -6723,7 +7314,7 @@
 </file>
 
 <file path=ppt/slides/slide13.xml><?xml version="1.0" encoding="utf-8"?>
-<p:sld xmlns:a="http://schemas.openxmlformats.org/drawingml/2006/main" xmlns:p="http://schemas.openxmlformats.org/presentationml/2006/main" xmlns:r="http://schemas.openxmlformats.org/officeDocument/2006/relationships">
+<p:sld xmlns:a="http://schemas.openxmlformats.org/drawingml/2006/main" xmlns:r="http://schemas.openxmlformats.org/officeDocument/2006/relationships" xmlns:p="http://schemas.openxmlformats.org/presentationml/2006/main">
   <p:cSld>
     <p:bg>
       <p:bgPr>
@@ -6739,7 +7330,14 @@
         <p:cNvGrpSpPr/>
         <p:nvPr/>
       </p:nvGrpSpPr>
-      <p:grpSpPr/>
+      <p:grpSpPr>
+        <a:xfrm>
+          <a:off x="0" y="0"/>
+          <a:ext cx="0" cy="0"/>
+          <a:chOff x="0" y="0"/>
+          <a:chExt cx="0" cy="0"/>
+        </a:xfrm>
+      </p:grpSpPr>
       <p:sp>
         <p:nvSpPr>
           <p:cNvPr id="2" name="Rectangle 1"/>
@@ -6780,6 +7378,7 @@
           <a:lstStyle/>
           <a:p>
             <a:pPr algn="ctr"/>
+            <a:endParaRPr/>
           </a:p>
         </p:txBody>
       </p:sp>
@@ -6883,7 +7482,7 @@
               </a:defRPr>
             </a:pPr>
             <a:r>
-              <a:t>System Prompt（固定, ~5100 token）</a:t>
+              <a:t>System Prompt（固定, ~3900 token）</a:t>
             </a:r>
           </a:p>
         </p:txBody>
@@ -6930,6 +7529,7 @@
           <a:lstStyle/>
           <a:p>
             <a:pPr algn="ctr"/>
+            <a:endParaRPr/>
           </a:p>
         </p:txBody>
       </p:sp>
@@ -6985,42 +7585,37 @@
             <a:br/>
             <a:br/>
             <a:r>
-              <a:t>## 交易模式说明（浦发，~1200 token）</a:t>
+              <a:t>## 领域知识</a:t>
             </a:r>
             <a:br/>
             <a:r>
-              <a:t>3 种正常模式 + 5 种风险模式的详细参数</a:t>
+              <a:t>4 类洗钱模式（~800 token）</a:t>
+            </a:r>
+            <a:br/>
+            <a:r>
+              <a:t>38 个风险指标（~600 token）</a:t>
+            </a:r>
+            <a:br/>
+            <a:r>
+              <a:t>36 条核心识别点（~1000 token）</a:t>
             </a:r>
             <a:br/>
             <a:br/>
             <a:r>
-              <a:t>## 领域知识</a:t>
-            </a:r>
-            <a:br/>
-            <a:r>
-              <a:t>4 类洗钱模式（~800 token）</a:t>
-            </a:r>
-            <a:br/>
-            <a:r>
-              <a:t>38 个风险指标（~600 token）</a:t>
-            </a:r>
-            <a:br/>
-            <a:r>
-              <a:t>36 条核心识别点（~1000 token）</a:t>
+              <a:t>## 已有特征清单（40+, 不要重复）</a:t>
             </a:r>
             <a:br/>
             <a:br/>
             <a:r>
-              <a:t>## 已有特征清单（40+, 不要重复）</a:t>
+              <a:t>## 约束</a:t>
             </a:r>
             <a:br/>
+            <a:r>
+              <a:t>30s 执行 / 白名单模块 / 禁用标签列</a:t>
+            </a:r>
             <a:br/>
             <a:r>
-              <a:t>## 约束</a:t>
-            </a:r>
-            <a:br/>
-            <a:r>
-              <a:t>30s 执行 / 白名单模块 / 禁用标签列</a:t>
+              <a:t>不引用不存在的字段 / 有区分度</a:t>
             </a:r>
           </a:p>
         </p:txBody>
@@ -7102,6 +7697,7 @@
           <a:lstStyle/>
           <a:p>
             <a:pPr algn="ctr"/>
+            <a:endParaRPr/>
           </a:p>
         </p:txBody>
       </p:sp>
@@ -7139,23 +7735,19 @@
             </a:r>
             <a:br/>
             <a:r>
-              <a:t>• 维度引导词(岛屿专属方向)</a:t>
+              <a:t>• 上轮最佳特征 top-3（代码 + score）</a:t>
             </a:r>
             <a:br/>
             <a:r>
-              <a:t>• 上轮最佳特征 top-3</a:t>
+              <a:t>• SHAP 分析：top-10 特征 + 弱势维度</a:t>
             </a:r>
             <a:br/>
             <a:r>
-              <a:t>• SHAP：top-10 + 弱势维度</a:t>
+              <a:t>• 上轮失败特征 + 失败原因</a:t>
             </a:r>
             <a:br/>
             <a:r>
-              <a:t>• 上轮失败特征 + 原因</a:t>
-            </a:r>
-            <a:br/>
-            <a:r>
-              <a:t>• 生成 3 个本维度新特征</a:t>
+              <a:t>• 请求：生成 3 个新特征（不同维度）</a:t>
             </a:r>
           </a:p>
         </p:txBody>
@@ -7202,6 +7794,7 @@
           <a:lstStyle/>
           <a:p>
             <a:pPr algn="ctr"/>
+            <a:endParaRPr/>
           </a:p>
         </p:txBody>
       </p:sp>
@@ -7239,19 +7832,23 @@
             </a:r>
             <a:br/>
             <a:r>
-              <a:t>• 无 SHAP 反馈（首轮）</a:t>
+              <a:t>• 无 SHAP 反馈（还没有训练过模型）</a:t>
             </a:r>
             <a:br/>
             <a:r>
-              <a:t>• 维度引导词 + 种子规则示例</a:t>
+              <a:t>• 用 15 条种子规则转的 Python 示例</a:t>
             </a:r>
             <a:br/>
             <a:r>
-              <a:t>• 参考交易模式说明 + 洗钱模式</a:t>
+              <a:t>  作为 in-context 示例</a:t>
             </a:r>
             <a:br/>
             <a:r>
-              <a:t>• 围绕本岛屿维度出发</a:t>
+              <a:t>• 引导：参考 4 类洗钱模式，</a:t>
+            </a:r>
+            <a:br/>
+            <a:r>
+              <a:t>  从最有价值的角度出发</a:t>
             </a:r>
           </a:p>
         </p:txBody>
@@ -7286,7 +7883,7 @@
               </a:defRPr>
             </a:pPr>
             <a:r>
-              <a:t>总计 ~6600 token  →  16K+ context 宽裕  |  8K 可压缩识别点(36-&gt;18条)降至 ~5600  |  32K+ 可放入更多原文</a:t>
+              <a:t>总计 ~5400 token  →  8K context 模型可容纳  |  32K+ 模型可放入更多识别点原文和示例</a:t>
             </a:r>
           </a:p>
         </p:txBody>
@@ -7335,7 +7932,7 @@
 </file>
 
 <file path=ppt/slides/slide14.xml><?xml version="1.0" encoding="utf-8"?>
-<p:sld xmlns:a="http://schemas.openxmlformats.org/drawingml/2006/main" xmlns:p="http://schemas.openxmlformats.org/presentationml/2006/main" xmlns:r="http://schemas.openxmlformats.org/officeDocument/2006/relationships">
+<p:sld xmlns:a="http://schemas.openxmlformats.org/drawingml/2006/main" xmlns:r="http://schemas.openxmlformats.org/officeDocument/2006/relationships" xmlns:p="http://schemas.openxmlformats.org/presentationml/2006/main">
   <p:cSld>
     <p:bg>
       <p:bgPr>
@@ -7351,7 +7948,14 @@
         <p:cNvGrpSpPr/>
         <p:nvPr/>
       </p:nvGrpSpPr>
-      <p:grpSpPr/>
+      <p:grpSpPr>
+        <a:xfrm>
+          <a:off x="0" y="0"/>
+          <a:ext cx="0" cy="0"/>
+          <a:chOff x="0" y="0"/>
+          <a:chExt cx="0" cy="0"/>
+        </a:xfrm>
+      </p:grpSpPr>
       <p:sp>
         <p:nvSpPr>
           <p:cNvPr id="2" name="Rectangle 1"/>
@@ -7392,6 +7996,7 @@
           <a:lstStyle/>
           <a:p>
             <a:pPr algn="ctr"/>
+            <a:endParaRPr/>
           </a:p>
         </p:txBody>
       </p:sp>
@@ -7542,6 +8147,7 @@
           <a:lstStyle/>
           <a:p>
             <a:pPr algn="ctr"/>
+            <a:endParaRPr/>
           </a:p>
         </p:txBody>
       </p:sp>
@@ -7722,6 +8328,7 @@
           <a:lstStyle/>
           <a:p>
             <a:pPr algn="ctr"/>
+            <a:endParaRPr/>
           </a:p>
         </p:txBody>
       </p:sp>
@@ -7854,6 +8461,7 @@
           <a:lstStyle/>
           <a:p>
             <a:pPr algn="ctr"/>
+            <a:endParaRPr/>
           </a:p>
         </p:txBody>
       </p:sp>
@@ -7952,7 +8560,7 @@
 </file>
 
 <file path=ppt/slides/slide15.xml><?xml version="1.0" encoding="utf-8"?>
-<p:sld xmlns:a="http://schemas.openxmlformats.org/drawingml/2006/main" xmlns:p="http://schemas.openxmlformats.org/presentationml/2006/main" xmlns:r="http://schemas.openxmlformats.org/officeDocument/2006/relationships">
+<p:sld xmlns:a="http://schemas.openxmlformats.org/drawingml/2006/main" xmlns:r="http://schemas.openxmlformats.org/officeDocument/2006/relationships" xmlns:p="http://schemas.openxmlformats.org/presentationml/2006/main">
   <p:cSld>
     <p:bg>
       <p:bgPr>
@@ -7968,7 +8576,14 @@
         <p:cNvGrpSpPr/>
         <p:nvPr/>
       </p:nvGrpSpPr>
-      <p:grpSpPr/>
+      <p:grpSpPr>
+        <a:xfrm>
+          <a:off x="0" y="0"/>
+          <a:ext cx="0" cy="0"/>
+          <a:chOff x="0" y="0"/>
+          <a:chExt cx="0" cy="0"/>
+        </a:xfrm>
+      </p:grpSpPr>
       <p:sp>
         <p:nvSpPr>
           <p:cNvPr id="2" name="Rectangle 1"/>
@@ -8009,6 +8624,7 @@
           <a:lstStyle/>
           <a:p>
             <a:pPr algn="ctr"/>
+            <a:endParaRPr/>
           </a:p>
         </p:txBody>
       </p:sp>
@@ -8159,6 +8775,7 @@
           <a:lstStyle/>
           <a:p>
             <a:pPr algn="ctr"/>
+            <a:endParaRPr/>
           </a:p>
         </p:txBody>
       </p:sp>
@@ -8276,6 +8893,7 @@
           <a:lstStyle/>
           <a:p>
             <a:pPr algn="ctr"/>
+            <a:endParaRPr/>
           </a:p>
         </p:txBody>
       </p:sp>
@@ -8393,6 +9011,7 @@
           <a:lstStyle/>
           <a:p>
             <a:pPr algn="ctr"/>
+            <a:endParaRPr/>
           </a:p>
         </p:txBody>
       </p:sp>
@@ -8510,6 +9129,7 @@
           <a:lstStyle/>
           <a:p>
             <a:pPr algn="ctr"/>
+            <a:endParaRPr/>
           </a:p>
         </p:txBody>
       </p:sp>
@@ -8664,6 +9284,7 @@
           <a:lstStyle/>
           <a:p>
             <a:pPr algn="ctr"/>
+            <a:endParaRPr/>
           </a:p>
         </p:txBody>
       </p:sp>
@@ -8791,6 +9412,7 @@
           <a:lstStyle/>
           <a:p>
             <a:pPr algn="ctr"/>
+            <a:endParaRPr/>
           </a:p>
         </p:txBody>
       </p:sp>
@@ -8873,7 +9495,7 @@
 </file>
 
 <file path=ppt/slides/slide16.xml><?xml version="1.0" encoding="utf-8"?>
-<p:sld xmlns:a="http://schemas.openxmlformats.org/drawingml/2006/main" xmlns:p="http://schemas.openxmlformats.org/presentationml/2006/main" xmlns:r="http://schemas.openxmlformats.org/officeDocument/2006/relationships">
+<p:sld xmlns:a="http://schemas.openxmlformats.org/drawingml/2006/main" xmlns:r="http://schemas.openxmlformats.org/officeDocument/2006/relationships" xmlns:p="http://schemas.openxmlformats.org/presentationml/2006/main">
   <p:cSld>
     <p:bg>
       <p:bgPr>
@@ -8889,7 +9511,14 @@
         <p:cNvGrpSpPr/>
         <p:nvPr/>
       </p:nvGrpSpPr>
-      <p:grpSpPr/>
+      <p:grpSpPr>
+        <a:xfrm>
+          <a:off x="0" y="0"/>
+          <a:ext cx="0" cy="0"/>
+          <a:chOff x="0" y="0"/>
+          <a:chExt cx="0" cy="0"/>
+        </a:xfrm>
+      </p:grpSpPr>
       <p:sp>
         <p:nvSpPr>
           <p:cNvPr id="2" name="Rectangle 1"/>
@@ -8930,6 +9559,7 @@
           <a:lstStyle/>
           <a:p>
             <a:pPr algn="ctr"/>
+            <a:endParaRPr/>
           </a:p>
         </p:txBody>
       </p:sp>
@@ -9080,6 +9710,7 @@
           <a:lstStyle/>
           <a:p>
             <a:pPr algn="ctr"/>
+            <a:endParaRPr/>
           </a:p>
         </p:txBody>
       </p:sp>
@@ -9234,6 +9865,7 @@
           <a:lstStyle/>
           <a:p>
             <a:pPr algn="ctr"/>
+            <a:endParaRPr/>
           </a:p>
         </p:txBody>
       </p:sp>
@@ -9384,6 +10016,7 @@
           <a:lstStyle/>
           <a:p>
             <a:pPr algn="ctr"/>
+            <a:endParaRPr/>
           </a:p>
         </p:txBody>
       </p:sp>
@@ -9470,7 +10103,7 @@
 </file>
 
 <file path=ppt/slides/slide17.xml><?xml version="1.0" encoding="utf-8"?>
-<p:sld xmlns:a="http://schemas.openxmlformats.org/drawingml/2006/main" xmlns:p="http://schemas.openxmlformats.org/presentationml/2006/main" xmlns:r="http://schemas.openxmlformats.org/officeDocument/2006/relationships">
+<p:sld xmlns:a="http://schemas.openxmlformats.org/drawingml/2006/main" xmlns:r="http://schemas.openxmlformats.org/officeDocument/2006/relationships" xmlns:p="http://schemas.openxmlformats.org/presentationml/2006/main">
   <p:cSld>
     <p:bg>
       <p:bgPr>
@@ -9486,7 +10119,14 @@
         <p:cNvGrpSpPr/>
         <p:nvPr/>
       </p:nvGrpSpPr>
-      <p:grpSpPr/>
+      <p:grpSpPr>
+        <a:xfrm>
+          <a:off x="0" y="0"/>
+          <a:ext cx="0" cy="0"/>
+          <a:chOff x="0" y="0"/>
+          <a:chExt cx="0" cy="0"/>
+        </a:xfrm>
+      </p:grpSpPr>
       <p:sp>
         <p:nvSpPr>
           <p:cNvPr id="2" name="Rectangle 1"/>
@@ -9527,6 +10167,7 @@
           <a:lstStyle/>
           <a:p>
             <a:pPr algn="ctr"/>
+            <a:endParaRPr/>
           </a:p>
         </p:txBody>
       </p:sp>
@@ -9640,6 +10281,7 @@
           <a:lstStyle/>
           <a:p>
             <a:pPr algn="ctr"/>
+            <a:endParaRPr/>
           </a:p>
         </p:txBody>
       </p:sp>
@@ -9755,6 +10397,7 @@
           <a:lstStyle/>
           <a:p>
             <a:pPr algn="ctr"/>
+            <a:endParaRPr/>
           </a:p>
         </p:txBody>
       </p:sp>
@@ -9841,6 +10484,7 @@
           <a:lstStyle/>
           <a:p>
             <a:pPr algn="ctr"/>
+            <a:endParaRPr/>
           </a:p>
         </p:txBody>
       </p:sp>
@@ -9956,6 +10600,7 @@
           <a:lstStyle/>
           <a:p>
             <a:pPr algn="ctr"/>
+            <a:endParaRPr/>
           </a:p>
         </p:txBody>
       </p:sp>
@@ -10042,6 +10687,7 @@
           <a:lstStyle/>
           <a:p>
             <a:pPr algn="ctr"/>
+            <a:endParaRPr/>
           </a:p>
         </p:txBody>
       </p:sp>
@@ -10157,6 +10803,7 @@
           <a:lstStyle/>
           <a:p>
             <a:pPr algn="ctr"/>
+            <a:endParaRPr/>
           </a:p>
         </p:txBody>
       </p:sp>
@@ -10243,6 +10890,7 @@
           <a:lstStyle/>
           <a:p>
             <a:pPr algn="ctr"/>
+            <a:endParaRPr/>
           </a:p>
         </p:txBody>
       </p:sp>
@@ -10358,6 +11006,7 @@
           <a:lstStyle/>
           <a:p>
             <a:pPr algn="ctr"/>
+            <a:endParaRPr/>
           </a:p>
         </p:txBody>
       </p:sp>
@@ -10444,6 +11093,7 @@
           <a:lstStyle/>
           <a:p>
             <a:pPr algn="ctr"/>
+            <a:endParaRPr/>
           </a:p>
         </p:txBody>
       </p:sp>
@@ -10559,6 +11209,7 @@
           <a:lstStyle/>
           <a:p>
             <a:pPr algn="ctr"/>
+            <a:endParaRPr/>
           </a:p>
         </p:txBody>
       </p:sp>
@@ -10682,6 +11333,7 @@
           <a:lstStyle/>
           <a:p>
             <a:pPr algn="ctr"/>
+            <a:endParaRPr/>
           </a:p>
         </p:txBody>
       </p:sp>
@@ -10784,7 +11436,7 @@
 </file>
 
 <file path=ppt/slides/slide18.xml><?xml version="1.0" encoding="utf-8"?>
-<p:sld xmlns:a="http://schemas.openxmlformats.org/drawingml/2006/main" xmlns:p="http://schemas.openxmlformats.org/presentationml/2006/main" xmlns:r="http://schemas.openxmlformats.org/officeDocument/2006/relationships">
+<p:sld xmlns:a="http://schemas.openxmlformats.org/drawingml/2006/main" xmlns:r="http://schemas.openxmlformats.org/officeDocument/2006/relationships" xmlns:p="http://schemas.openxmlformats.org/presentationml/2006/main">
   <p:cSld>
     <p:bg>
       <p:bgPr>
@@ -10800,7 +11452,14 @@
         <p:cNvGrpSpPr/>
         <p:nvPr/>
       </p:nvGrpSpPr>
-      <p:grpSpPr/>
+      <p:grpSpPr>
+        <a:xfrm>
+          <a:off x="0" y="0"/>
+          <a:ext cx="0" cy="0"/>
+          <a:chOff x="0" y="0"/>
+          <a:chExt cx="0" cy="0"/>
+        </a:xfrm>
+      </p:grpSpPr>
       <p:sp>
         <p:nvSpPr>
           <p:cNvPr id="2" name="Rectangle 1"/>
@@ -10841,6 +11500,7 @@
           <a:lstStyle/>
           <a:p>
             <a:pPr algn="ctr"/>
+            <a:endParaRPr/>
           </a:p>
         </p:txBody>
       </p:sp>
@@ -10954,6 +11614,7 @@
           <a:lstStyle/>
           <a:p>
             <a:pPr algn="ctr"/>
+            <a:endParaRPr/>
           </a:p>
         </p:txBody>
       </p:sp>
@@ -11022,11 +11683,11 @@
               </a:defRPr>
             </a:pPr>
             <a:r>
-              <a:t>领域知识+交易模式</a:t>
+              <a:t>领域知识增强的</a:t>
             </a:r>
             <a:br/>
             <a:r>
-              <a:t>增强的LLM特征工程</a:t>
+              <a:t>LLM 特征工程</a:t>
             </a:r>
           </a:p>
         </p:txBody>
@@ -11061,7 +11722,7 @@
               </a:defRPr>
             </a:pPr>
             <a:r>
-              <a:t>首次将专家知识 + 数据集交易模式说明（8种模式详细参数）系统性注入 LLM 特征生成。</a:t>
+              <a:t>首次将结构化专家知识（邮储访谈 + 200+ 识别点 + 监管规则）系统性注入 LLM 特征生成流程。</a:t>
             </a:r>
             <a:br/>
             <a:r>
@@ -11110,6 +11771,7 @@
           <a:lstStyle/>
           <a:p>
             <a:pPr algn="ctr"/>
+            <a:endParaRPr/>
           </a:p>
         </p:txBody>
       </p:sp>
@@ -11153,6 +11815,7 @@
           <a:lstStyle/>
           <a:p>
             <a:pPr algn="ctr"/>
+            <a:endParaRPr/>
           </a:p>
         </p:txBody>
       </p:sp>
@@ -11309,6 +11972,7 @@
           <a:lstStyle/>
           <a:p>
             <a:pPr algn="ctr"/>
+            <a:endParaRPr/>
           </a:p>
         </p:txBody>
       </p:sp>
@@ -11352,6 +12016,7 @@
           <a:lstStyle/>
           <a:p>
             <a:pPr algn="ctr"/>
+            <a:endParaRPr/>
           </a:p>
         </p:txBody>
       </p:sp>
@@ -11420,11 +12085,11 @@
               </a:defRPr>
             </a:pPr>
             <a:r>
-              <a:t>维度岛屿</a:t>
+              <a:t>进化搜索 +</a:t>
             </a:r>
             <a:br/>
             <a:r>
-              <a:t>进化搜索</a:t>
+              <a:t>SHAP 引导融合</a:t>
             </a:r>
           </a:p>
         </p:txBody>
@@ -11459,11 +12124,11 @@
               </a:defRPr>
             </a:pPr>
             <a:r>
-              <a:t>改进 LLM-FE 的随机岛屿为按风险维度划分的 4 岛屿（金额/时间/行为/主体），</a:t>
+              <a:t>结合 LLM-FE 的多岛屿搜索效率和 MedFeat 的 SHAP 方向引导，</a:t>
             </a:r>
             <a:br/>
             <a:r>
-              <a:t>结合 SHAP 引导，实现高效 + 有方向 + 有分工的搜索。原论文岛屿无差异化。</a:t>
+              <a:t>在已有 40+ 人工特征基线上发现增量贡献。</a:t>
             </a:r>
           </a:p>
         </p:txBody>
@@ -11508,6 +12173,7 @@
           <a:lstStyle/>
           <a:p>
             <a:pPr algn="ctr"/>
+            <a:endParaRPr/>
           </a:p>
         </p:txBody>
       </p:sp>
@@ -11551,6 +12217,7 @@
           <a:lstStyle/>
           <a:p>
             <a:pPr algn="ctr"/>
+            <a:endParaRPr/>
           </a:p>
         </p:txBody>
       </p:sp>
@@ -11707,6 +12374,7 @@
           <a:lstStyle/>
           <a:p>
             <a:pPr algn="ctr"/>
+            <a:endParaRPr/>
           </a:p>
         </p:txBody>
       </p:sp>
@@ -11750,6 +12418,7 @@
           <a:lstStyle/>
           <a:p>
             <a:pPr algn="ctr"/>
+            <a:endParaRPr/>
           </a:p>
         </p:txBody>
       </p:sp>
@@ -11910,7 +12579,7 @@
 </file>
 
 <file path=ppt/slides/slide19.xml><?xml version="1.0" encoding="utf-8"?>
-<p:sld xmlns:a="http://schemas.openxmlformats.org/drawingml/2006/main" xmlns:p="http://schemas.openxmlformats.org/presentationml/2006/main" xmlns:r="http://schemas.openxmlformats.org/officeDocument/2006/relationships">
+<p:sld xmlns:a="http://schemas.openxmlformats.org/drawingml/2006/main" xmlns:r="http://schemas.openxmlformats.org/officeDocument/2006/relationships" xmlns:p="http://schemas.openxmlformats.org/presentationml/2006/main">
   <p:cSld>
     <p:bg>
       <p:bgPr>
@@ -11926,7 +12595,14 @@
         <p:cNvGrpSpPr/>
         <p:nvPr/>
       </p:nvGrpSpPr>
-      <p:grpSpPr/>
+      <p:grpSpPr>
+        <a:xfrm>
+          <a:off x="0" y="0"/>
+          <a:ext cx="0" cy="0"/>
+          <a:chOff x="0" y="0"/>
+          <a:chExt cx="0" cy="0"/>
+        </a:xfrm>
+      </p:grpSpPr>
       <p:sp>
         <p:nvSpPr>
           <p:cNvPr id="2" name="Rectangle 1"/>
@@ -11967,6 +12643,7 @@
           <a:lstStyle/>
           <a:p>
             <a:pPr algn="ctr"/>
+            <a:endParaRPr/>
           </a:p>
         </p:txBody>
       </p:sp>
@@ -12117,6 +12794,7 @@
           <a:lstStyle/>
           <a:p>
             <a:pPr algn="ctr"/>
+            <a:endParaRPr/>
           </a:p>
         </p:txBody>
       </p:sp>
@@ -12295,6 +12973,7 @@
           <a:lstStyle/>
           <a:p>
             <a:pPr algn="ctr"/>
+            <a:endParaRPr/>
           </a:p>
         </p:txBody>
       </p:sp>
@@ -12414,6 +13093,7 @@
           <a:lstStyle/>
           <a:p>
             <a:pPr algn="ctr"/>
+            <a:endParaRPr/>
           </a:p>
         </p:txBody>
       </p:sp>
@@ -12533,6 +13213,7 @@
           <a:lstStyle/>
           <a:p>
             <a:pPr algn="ctr"/>
+            <a:endParaRPr/>
           </a:p>
         </p:txBody>
       </p:sp>
@@ -12687,6 +13368,7 @@
           <a:lstStyle/>
           <a:p>
             <a:pPr algn="ctr"/>
+            <a:endParaRPr/>
           </a:p>
         </p:txBody>
       </p:sp>
@@ -12724,7 +13406,7 @@
             </a:r>
             <a:br/>
             <a:r>
-              <a:t>• LLM 调用成本：最多 120 次调用，API $7-20 / 本地 ~60min，整个流程 1-2 小时可完成</a:t>
+              <a:t>• LLM 调用成本：最多 90 次调用，API $5-15 / 本地 ~45min，整个流程 1-2 小时可完成</a:t>
             </a:r>
           </a:p>
         </p:txBody>
@@ -12806,6 +13488,7 @@
           <a:lstStyle/>
           <a:p>
             <a:pPr algn="ctr"/>
+            <a:endParaRPr/>
           </a:p>
         </p:txBody>
       </p:sp>
@@ -12888,7 +13571,7 @@
 </file>
 
 <file path=ppt/slides/slide2.xml><?xml version="1.0" encoding="utf-8"?>
-<p:sld xmlns:a="http://schemas.openxmlformats.org/drawingml/2006/main" xmlns:p="http://schemas.openxmlformats.org/presentationml/2006/main" xmlns:r="http://schemas.openxmlformats.org/officeDocument/2006/relationships">
+<p:sld xmlns:a="http://schemas.openxmlformats.org/drawingml/2006/main" xmlns:r="http://schemas.openxmlformats.org/officeDocument/2006/relationships" xmlns:p="http://schemas.openxmlformats.org/presentationml/2006/main">
   <p:cSld>
     <p:bg>
       <p:bgPr>
@@ -12904,7 +13587,14 @@
         <p:cNvGrpSpPr/>
         <p:nvPr/>
       </p:nvGrpSpPr>
-      <p:grpSpPr/>
+      <p:grpSpPr>
+        <a:xfrm>
+          <a:off x="0" y="0"/>
+          <a:ext cx="0" cy="0"/>
+          <a:chOff x="0" y="0"/>
+          <a:chExt cx="0" cy="0"/>
+        </a:xfrm>
+      </p:grpSpPr>
       <p:sp>
         <p:nvSpPr>
           <p:cNvPr id="2" name="Rectangle 1"/>
@@ -12945,6 +13635,7 @@
           <a:lstStyle/>
           <a:p>
             <a:pPr algn="ctr"/>
+            <a:endParaRPr/>
           </a:p>
         </p:txBody>
       </p:sp>
@@ -13025,6 +13716,7 @@
           <a:lstStyle/>
           <a:p>
             <a:pPr algn="ctr"/>
+            <a:endParaRPr/>
           </a:p>
         </p:txBody>
       </p:sp>
@@ -13068,6 +13760,7 @@
           <a:lstStyle/>
           <a:p>
             <a:pPr algn="ctr"/>
+            <a:endParaRPr/>
           </a:p>
         </p:txBody>
       </p:sp>
@@ -13218,6 +13911,7 @@
           <a:lstStyle/>
           <a:p>
             <a:pPr algn="ctr"/>
+            <a:endParaRPr/>
           </a:p>
         </p:txBody>
       </p:sp>
@@ -13261,6 +13955,7 @@
           <a:lstStyle/>
           <a:p>
             <a:pPr algn="ctr"/>
+            <a:endParaRPr/>
           </a:p>
         </p:txBody>
       </p:sp>
@@ -13411,6 +14106,7 @@
           <a:lstStyle/>
           <a:p>
             <a:pPr algn="ctr"/>
+            <a:endParaRPr/>
           </a:p>
         </p:txBody>
       </p:sp>
@@ -13454,6 +14150,7 @@
           <a:lstStyle/>
           <a:p>
             <a:pPr algn="ctr"/>
+            <a:endParaRPr/>
           </a:p>
         </p:txBody>
       </p:sp>
@@ -13604,6 +14301,7 @@
           <a:lstStyle/>
           <a:p>
             <a:pPr algn="ctr"/>
+            <a:endParaRPr/>
           </a:p>
         </p:txBody>
       </p:sp>
@@ -13647,6 +14345,7 @@
           <a:lstStyle/>
           <a:p>
             <a:pPr algn="ctr"/>
+            <a:endParaRPr/>
           </a:p>
         </p:txBody>
       </p:sp>
@@ -13797,6 +14496,7 @@
           <a:lstStyle/>
           <a:p>
             <a:pPr algn="ctr"/>
+            <a:endParaRPr/>
           </a:p>
         </p:txBody>
       </p:sp>
@@ -13840,6 +14540,7 @@
           <a:lstStyle/>
           <a:p>
             <a:pPr algn="ctr"/>
+            <a:endParaRPr/>
           </a:p>
         </p:txBody>
       </p:sp>
@@ -13990,6 +14691,7 @@
           <a:lstStyle/>
           <a:p>
             <a:pPr algn="ctr"/>
+            <a:endParaRPr/>
           </a:p>
         </p:txBody>
       </p:sp>
@@ -14033,6 +14735,7 @@
           <a:lstStyle/>
           <a:p>
             <a:pPr algn="ctr"/>
+            <a:endParaRPr/>
           </a:p>
         </p:txBody>
       </p:sp>
@@ -14183,6 +14886,7 @@
           <a:lstStyle/>
           <a:p>
             <a:pPr algn="ctr"/>
+            <a:endParaRPr/>
           </a:p>
         </p:txBody>
       </p:sp>
@@ -14226,6 +14930,7 @@
           <a:lstStyle/>
           <a:p>
             <a:pPr algn="ctr"/>
+            <a:endParaRPr/>
           </a:p>
         </p:txBody>
       </p:sp>
@@ -14376,6 +15081,7 @@
           <a:lstStyle/>
           <a:p>
             <a:pPr algn="ctr"/>
+            <a:endParaRPr/>
           </a:p>
         </p:txBody>
       </p:sp>
@@ -14419,6 +15125,7 @@
           <a:lstStyle/>
           <a:p>
             <a:pPr algn="ctr"/>
+            <a:endParaRPr/>
           </a:p>
         </p:txBody>
       </p:sp>
@@ -14569,6 +15276,7 @@
           <a:lstStyle/>
           <a:p>
             <a:pPr algn="ctr"/>
+            <a:endParaRPr/>
           </a:p>
         </p:txBody>
       </p:sp>
@@ -14612,6 +15320,7 @@
           <a:lstStyle/>
           <a:p>
             <a:pPr algn="ctr"/>
+            <a:endParaRPr/>
           </a:p>
         </p:txBody>
       </p:sp>
@@ -14762,6 +15471,7 @@
           <a:lstStyle/>
           <a:p>
             <a:pPr algn="ctr"/>
+            <a:endParaRPr/>
           </a:p>
         </p:txBody>
       </p:sp>
@@ -14805,6 +15515,7 @@
           <a:lstStyle/>
           <a:p>
             <a:pPr algn="ctr"/>
+            <a:endParaRPr/>
           </a:p>
         </p:txBody>
       </p:sp>
@@ -14957,7 +15668,7 @@
 </file>
 
 <file path=ppt/slides/slide20.xml><?xml version="1.0" encoding="utf-8"?>
-<p:sld xmlns:a="http://schemas.openxmlformats.org/drawingml/2006/main" xmlns:p="http://schemas.openxmlformats.org/presentationml/2006/main" xmlns:r="http://schemas.openxmlformats.org/officeDocument/2006/relationships">
+<p:sld xmlns:a="http://schemas.openxmlformats.org/drawingml/2006/main" xmlns:r="http://schemas.openxmlformats.org/officeDocument/2006/relationships" xmlns:p="http://schemas.openxmlformats.org/presentationml/2006/main">
   <p:cSld>
     <p:bg>
       <p:bgPr>
@@ -14973,7 +15684,14 @@
         <p:cNvGrpSpPr/>
         <p:nvPr/>
       </p:nvGrpSpPr>
-      <p:grpSpPr/>
+      <p:grpSpPr>
+        <a:xfrm>
+          <a:off x="0" y="0"/>
+          <a:ext cx="0" cy="0"/>
+          <a:chOff x="0" y="0"/>
+          <a:chExt cx="0" cy="0"/>
+        </a:xfrm>
+      </p:grpSpPr>
       <p:sp>
         <p:nvSpPr>
           <p:cNvPr id="2" name="Rectangle 1"/>
@@ -15014,6 +15732,7 @@
           <a:lstStyle/>
           <a:p>
             <a:pPr algn="ctr"/>
+            <a:endParaRPr/>
           </a:p>
         </p:txBody>
       </p:sp>
@@ -15127,6 +15846,7 @@
           <a:lstStyle/>
           <a:p>
             <a:pPr algn="ctr"/>
+            <a:endParaRPr/>
           </a:p>
         </p:txBody>
       </p:sp>
@@ -15242,6 +15962,7 @@
           <a:lstStyle/>
           <a:p>
             <a:pPr algn="ctr"/>
+            <a:endParaRPr/>
           </a:p>
         </p:txBody>
       </p:sp>
@@ -15353,6 +16074,7 @@
           <a:lstStyle/>
           <a:p>
             <a:pPr algn="ctr"/>
+            <a:endParaRPr/>
           </a:p>
         </p:txBody>
       </p:sp>
@@ -15468,6 +16190,7 @@
           <a:lstStyle/>
           <a:p>
             <a:pPr algn="ctr"/>
+            <a:endParaRPr/>
           </a:p>
         </p:txBody>
       </p:sp>
@@ -15609,6 +16332,7 @@
           <a:lstStyle/>
           <a:p>
             <a:pPr algn="ctr"/>
+            <a:endParaRPr/>
           </a:p>
         </p:txBody>
       </p:sp>
@@ -15724,6 +16448,7 @@
           <a:lstStyle/>
           <a:p>
             <a:pPr algn="ctr"/>
+            <a:endParaRPr/>
           </a:p>
         </p:txBody>
       </p:sp>
@@ -15760,7 +16485,7 @@
               </a:defRPr>
             </a:pPr>
             <a:r>
-              <a:t>4维度岛屿结构</a:t>
+              <a:t>岛屿数据结构</a:t>
             </a:r>
           </a:p>
           <a:p>
@@ -15775,7 +16500,7 @@
               </a:defRPr>
             </a:pPr>
             <a:r>
-              <a:t>Boltzmann + 维度引导</a:t>
+              <a:t>Boltzmann 采样</a:t>
             </a:r>
           </a:p>
           <a:p>
@@ -15805,7 +16530,7 @@
               </a:defRPr>
             </a:pPr>
             <a:r>
-              <a:t>冷启动 + 跨维度迁移</a:t>
+              <a:t>冷启动 + 迁移</a:t>
             </a:r>
           </a:p>
           <a:p>
@@ -15865,6 +16590,7 @@
           <a:lstStyle/>
           <a:p>
             <a:pPr algn="ctr"/>
+            <a:endParaRPr/>
           </a:p>
         </p:txBody>
       </p:sp>
@@ -15980,6 +16706,7 @@
           <a:lstStyle/>
           <a:p>
             <a:pPr algn="ctr"/>
+            <a:endParaRPr/>
           </a:p>
         </p:txBody>
       </p:sp>
@@ -16143,6 +16870,7 @@
           <a:lstStyle/>
           <a:p>
             <a:pPr algn="ctr"/>
+            <a:endParaRPr/>
           </a:p>
         </p:txBody>
       </p:sp>
@@ -16262,6 +16990,7 @@
           <a:lstStyle/>
           <a:p>
             <a:pPr algn="ctr"/>
+            <a:endParaRPr/>
           </a:p>
         </p:txBody>
       </p:sp>
@@ -16381,6 +17110,7 @@
           <a:lstStyle/>
           <a:p>
             <a:pPr algn="ctr"/>
+            <a:endParaRPr/>
           </a:p>
         </p:txBody>
       </p:sp>
@@ -16500,6 +17230,7 @@
           <a:lstStyle/>
           <a:p>
             <a:pPr algn="ctr"/>
+            <a:endParaRPr/>
           </a:p>
         </p:txBody>
       </p:sp>
@@ -16619,6 +17350,7 @@
           <a:lstStyle/>
           <a:p>
             <a:pPr algn="ctr"/>
+            <a:endParaRPr/>
           </a:p>
         </p:txBody>
       </p:sp>
@@ -16740,7 +17472,7 @@
 </file>
 
 <file path=ppt/slides/slide3.xml><?xml version="1.0" encoding="utf-8"?>
-<p:sld xmlns:a="http://schemas.openxmlformats.org/drawingml/2006/main" xmlns:p="http://schemas.openxmlformats.org/presentationml/2006/main" xmlns:r="http://schemas.openxmlformats.org/officeDocument/2006/relationships">
+<p:sld xmlns:a="http://schemas.openxmlformats.org/drawingml/2006/main" xmlns:r="http://schemas.openxmlformats.org/officeDocument/2006/relationships" xmlns:p="http://schemas.openxmlformats.org/presentationml/2006/main">
   <p:cSld>
     <p:bg>
       <p:bgPr>
@@ -16756,7 +17488,14 @@
         <p:cNvGrpSpPr/>
         <p:nvPr/>
       </p:nvGrpSpPr>
-      <p:grpSpPr/>
+      <p:grpSpPr>
+        <a:xfrm>
+          <a:off x="0" y="0"/>
+          <a:ext cx="0" cy="0"/>
+          <a:chOff x="0" y="0"/>
+          <a:chExt cx="0" cy="0"/>
+        </a:xfrm>
+      </p:grpSpPr>
       <p:sp>
         <p:nvSpPr>
           <p:cNvPr id="2" name="Rectangle 1"/>
@@ -16797,6 +17536,7 @@
           <a:lstStyle/>
           <a:p>
             <a:pPr algn="ctr"/>
+            <a:endParaRPr/>
           </a:p>
         </p:txBody>
       </p:sp>
@@ -16945,6 +17685,7 @@
           <a:lstStyle/>
           <a:p>
             <a:pPr algn="ctr"/>
+            <a:endParaRPr/>
           </a:p>
         </p:txBody>
       </p:sp>
@@ -16990,6 +17731,7 @@
           <a:lstStyle/>
           <a:p>
             <a:pPr algn="ctr"/>
+            <a:endParaRPr/>
           </a:p>
         </p:txBody>
       </p:sp>
@@ -17002,7 +17744,7 @@
         <p:spPr>
           <a:xfrm>
             <a:off x="1005840" y="1920240"/>
-            <a:ext cx="4572000" cy="2103120"/>
+            <a:ext cx="4572000" cy="1785104"/>
           </a:xfrm>
           <a:prstGeom prst="rect">
             <a:avLst/>
@@ -17026,8 +17768,18 @@
               </a:defRPr>
             </a:pPr>
             <a:r>
-              <a:t>已有人工设计的 40+ 个反洗钱检测特征</a:t>
-            </a:r>
+              <a:rPr dirty="0" err="1"/>
+              <a:t>已有人工设计的</a:t>
+            </a:r>
+            <a:r>
+              <a:rPr dirty="0"/>
+              <a:t> 40+ </a:t>
+            </a:r>
+            <a:r>
+              <a:rPr dirty="0" err="1"/>
+              <a:t>个反洗钱检测特征</a:t>
+            </a:r>
+            <a:endParaRPr dirty="0"/>
           </a:p>
           <a:p>
             <a:pPr>
@@ -17041,7 +17793,20 @@
               </a:defRPr>
             </a:pPr>
             <a:r>
-              <a:t>存在明确缺口：transaction_motif/mode 未用、设备/IP 未用、</a:t>
+              <a:rPr dirty="0" err="1"/>
+              <a:t>存在明确缺口：设备</a:t>
+            </a:r>
+            <a:r>
+              <a:rPr dirty="0"/>
+              <a:t>/IP </a:t>
+            </a:r>
+            <a:r>
+              <a:rPr dirty="0" err="1"/>
+              <a:t>未用</a:t>
+            </a:r>
+            <a:r>
+              <a:rPr dirty="0"/>
+              <a:t>、</a:t>
             </a:r>
           </a:p>
           <a:p>
@@ -17056,7 +17821,16 @@
               </a:defRPr>
             </a:pPr>
             <a:r>
-              <a:t>  销户模块完全未实现、时间窗口仅 1H、无图拓扑特征</a:t>
+              <a:rPr dirty="0"/>
+              <a:t>  </a:t>
+            </a:r>
+            <a:r>
+              <a:rPr dirty="0" err="1"/>
+              <a:t>销户模块完全未实现、时间窗口仅</a:t>
+            </a:r>
+            <a:r>
+              <a:rPr dirty="0"/>
+              <a:t> 1H、无图拓扑特征</a:t>
             </a:r>
           </a:p>
           <a:p>
@@ -17071,8 +17845,18 @@
               </a:defRPr>
             </a:pPr>
             <a:r>
-              <a:t>人工逐一设计新特征 → 效率低、容易遗漏</a:t>
-            </a:r>
+              <a:rPr dirty="0" err="1"/>
+              <a:t>人工逐一设计新特征</a:t>
+            </a:r>
+            <a:r>
+              <a:rPr dirty="0"/>
+              <a:t> → </a:t>
+            </a:r>
+            <a:r>
+              <a:rPr dirty="0" err="1"/>
+              <a:t>效率低、容易遗漏</a:t>
+            </a:r>
+            <a:endParaRPr dirty="0"/>
           </a:p>
           <a:p>
             <a:pPr>
@@ -17086,7 +17870,28 @@
               </a:defRPr>
             </a:pPr>
             <a:r>
-              <a:t>之前尝试的 458 条规则 → 全部失败（P/R/F1=0）</a:t>
+              <a:rPr dirty="0" err="1"/>
+              <a:t>之前尝试的</a:t>
+            </a:r>
+            <a:r>
+              <a:rPr dirty="0"/>
+              <a:t> 458 </a:t>
+            </a:r>
+            <a:r>
+              <a:rPr dirty="0" err="1"/>
+              <a:t>条规则</a:t>
+            </a:r>
+            <a:r>
+              <a:rPr dirty="0"/>
+              <a:t> → </a:t>
+            </a:r>
+            <a:r>
+              <a:rPr dirty="0" err="1"/>
+              <a:t>全部失败（P</a:t>
+            </a:r>
+            <a:r>
+              <a:rPr dirty="0"/>
+              <a:t>/R/F1=0）</a:t>
             </a:r>
           </a:p>
         </p:txBody>
@@ -17166,6 +17971,7 @@
           <a:lstStyle/>
           <a:p>
             <a:pPr algn="ctr"/>
+            <a:endParaRPr/>
           </a:p>
         </p:txBody>
       </p:sp>
@@ -17211,6 +18017,7 @@
           <a:lstStyle/>
           <a:p>
             <a:pPr algn="ctr"/>
+            <a:endParaRPr/>
           </a:p>
         </p:txBody>
       </p:sp>
@@ -17223,7 +18030,7 @@
         <p:spPr>
           <a:xfrm>
             <a:off x="6675120" y="1920240"/>
-            <a:ext cx="4572000" cy="2103120"/>
+            <a:ext cx="4572000" cy="1862048"/>
           </a:xfrm>
           <a:prstGeom prst="rect">
             <a:avLst/>
@@ -17247,8 +18054,18 @@
               </a:defRPr>
             </a:pPr>
             <a:r>
-              <a:t>用 LLM 自动发现人工未覆盖的新特征</a:t>
-            </a:r>
+              <a:rPr dirty="0" err="1"/>
+              <a:t>用</a:t>
+            </a:r>
+            <a:r>
+              <a:rPr dirty="0"/>
+              <a:t> LLM </a:t>
+            </a:r>
+            <a:r>
+              <a:rPr dirty="0" err="1"/>
+              <a:t>自动发现人工未覆盖的新特征</a:t>
+            </a:r>
+            <a:endParaRPr dirty="0"/>
           </a:p>
           <a:p>
             <a:pPr>
@@ -17262,7 +18079,12 @@
               </a:defRPr>
             </a:pPr>
             <a:r>
-              <a:t>每个新特征必须满足三个要求：</a:t>
+              <a:rPr dirty="0" err="1"/>
+              <a:t>每个新特征必须满足三个要求</a:t>
+            </a:r>
+            <a:r>
+              <a:rPr dirty="0"/>
+              <a:t>：</a:t>
             </a:r>
           </a:p>
           <a:p>
@@ -17277,8 +18099,22 @@
               </a:defRPr>
             </a:pPr>
             <a:r>
-              <a:t>  1. 生成可直接执行的 Python 代码</a:t>
-            </a:r>
+              <a:rPr dirty="0"/>
+              <a:t>  1. </a:t>
+            </a:r>
+            <a:r>
+              <a:rPr dirty="0" err="1"/>
+              <a:t>生成可直接执行的</a:t>
+            </a:r>
+            <a:r>
+              <a:rPr dirty="0"/>
+              <a:t> Python </a:t>
+            </a:r>
+            <a:r>
+              <a:rPr dirty="0" err="1"/>
+              <a:t>代码</a:t>
+            </a:r>
+            <a:endParaRPr dirty="0"/>
           </a:p>
           <a:p>
             <a:pPr>
@@ -17292,7 +18128,16 @@
               </a:defRPr>
             </a:pPr>
             <a:r>
-              <a:t>  2. 附带可解释性说明（领域依据）</a:t>
+              <a:rPr dirty="0"/>
+              <a:t>  2. </a:t>
+            </a:r>
+            <a:r>
+              <a:rPr dirty="0" err="1"/>
+              <a:t>附带可解释性说明（领域依据</a:t>
+            </a:r>
+            <a:r>
+              <a:rPr dirty="0"/>
+              <a:t>）</a:t>
             </a:r>
           </a:p>
           <a:p>
@@ -17307,7 +18152,16 @@
               </a:defRPr>
             </a:pPr>
             <a:r>
-              <a:t>  3. 经过验证确认有效（增量贡献）</a:t>
+              <a:rPr dirty="0"/>
+              <a:t>  3. </a:t>
+            </a:r>
+            <a:r>
+              <a:rPr dirty="0" err="1"/>
+              <a:t>经过验证确认有效（增量贡献</a:t>
+            </a:r>
+            <a:r>
+              <a:rPr dirty="0"/>
+              <a:t>）</a:t>
             </a:r>
           </a:p>
           <a:p>
@@ -17322,7 +18176,20 @@
               </a:defRPr>
             </a:pPr>
             <a:r>
-              <a:t>预测目标：交易级二分类（is_risk, ~5%正样本）</a:t>
+              <a:rPr dirty="0" err="1"/>
+              <a:t>预测目标：交易级二分类（is_risk</a:t>
+            </a:r>
+            <a:r>
+              <a:rPr dirty="0"/>
+              <a:t>, </a:t>
+            </a:r>
+            <a:r>
+              <a:rPr dirty="0" err="1"/>
+              <a:t>正样本</a:t>
+            </a:r>
+            <a:r>
+              <a:rPr dirty="0"/>
+              <a:t>）</a:t>
             </a:r>
           </a:p>
         </p:txBody>
@@ -17404,6 +18271,7 @@
           <a:lstStyle/>
           <a:p>
             <a:pPr algn="ctr"/>
+            <a:endParaRPr/>
           </a:p>
         </p:txBody>
       </p:sp>
@@ -17437,11 +18305,39 @@
               </a:defRPr>
             </a:pPr>
             <a:r>
-              <a:t>构建一个系统，让 LLM 自动发现新特征并生成可执行代码，同时为每个特征提供领域依据的可解释性说明。</a:t>
-            </a:r>
-            <a:br/>
-            <a:r>
-              <a:t>人不去设计特征，LLM 是特征工程师。</a:t>
+              <a:rPr dirty="0" err="1"/>
+              <a:t>构建一个系统，让</a:t>
+            </a:r>
+            <a:r>
+              <a:rPr dirty="0"/>
+              <a:t> LLM </a:t>
+            </a:r>
+            <a:r>
+              <a:rPr dirty="0" err="1"/>
+              <a:t>自动发现新特征并生成可执行代码，同时为每个特征提供领域依据的可解释性说明</a:t>
+            </a:r>
+            <a:r>
+              <a:rPr dirty="0"/>
+              <a:t>。</a:t>
+            </a:r>
+            <a:br>
+              <a:rPr dirty="0"/>
+            </a:br>
+            <a:r>
+              <a:rPr dirty="0" err="1"/>
+              <a:t>人不去设计特征，LLM</a:t>
+            </a:r>
+            <a:r>
+              <a:rPr dirty="0"/>
+              <a:t> </a:t>
+            </a:r>
+            <a:r>
+              <a:rPr dirty="0" err="1"/>
+              <a:t>是特征工程师</a:t>
+            </a:r>
+            <a:r>
+              <a:rPr dirty="0"/>
+              <a:t>。</a:t>
             </a:r>
           </a:p>
         </p:txBody>
@@ -17490,7 +18386,7 @@
 </file>
 
 <file path=ppt/slides/slide4.xml><?xml version="1.0" encoding="utf-8"?>
-<p:sld xmlns:a="http://schemas.openxmlformats.org/drawingml/2006/main" xmlns:p="http://schemas.openxmlformats.org/presentationml/2006/main" xmlns:r="http://schemas.openxmlformats.org/officeDocument/2006/relationships">
+<p:sld xmlns:a="http://schemas.openxmlformats.org/drawingml/2006/main" xmlns:r="http://schemas.openxmlformats.org/officeDocument/2006/relationships" xmlns:p="http://schemas.openxmlformats.org/presentationml/2006/main">
   <p:cSld>
     <p:bg>
       <p:bgPr>
@@ -17506,7 +18402,14 @@
         <p:cNvGrpSpPr/>
         <p:nvPr/>
       </p:nvGrpSpPr>
-      <p:grpSpPr/>
+      <p:grpSpPr>
+        <a:xfrm>
+          <a:off x="0" y="0"/>
+          <a:ext cx="0" cy="0"/>
+          <a:chOff x="0" y="0"/>
+          <a:chExt cx="0" cy="0"/>
+        </a:xfrm>
+      </p:grpSpPr>
       <p:sp>
         <p:nvSpPr>
           <p:cNvPr id="2" name="Rectangle 1"/>
@@ -17547,6 +18450,7 @@
           <a:lstStyle/>
           <a:p>
             <a:pPr algn="ctr"/>
+            <a:endParaRPr/>
           </a:p>
         </p:txBody>
       </p:sp>
@@ -17660,6 +18564,7 @@
           <a:lstStyle/>
           <a:p>
             <a:pPr algn="ctr"/>
+            <a:endParaRPr/>
           </a:p>
         </p:txBody>
       </p:sp>
@@ -17775,6 +18680,7 @@
           <a:lstStyle/>
           <a:p>
             <a:pPr algn="ctr"/>
+            <a:endParaRPr/>
           </a:p>
         </p:txBody>
       </p:sp>
@@ -17787,7 +18693,7 @@
         <p:spPr>
           <a:xfrm>
             <a:off x="640080" y="2148840"/>
-            <a:ext cx="3200400" cy="2468880"/>
+            <a:ext cx="3200400" cy="1705595"/>
           </a:xfrm>
           <a:prstGeom prst="rect">
             <a:avLst/>
@@ -17811,8 +18717,18 @@
               </a:defRPr>
             </a:pPr>
             <a:r>
-              <a:t>wallet_id — 钱包唯一标识</a:t>
-            </a:r>
+              <a:rPr dirty="0" err="1"/>
+              <a:t>wallet_id</a:t>
+            </a:r>
+            <a:r>
+              <a:rPr dirty="0"/>
+              <a:t> — </a:t>
+            </a:r>
+            <a:r>
+              <a:rPr dirty="0" err="1"/>
+              <a:t>钱包唯一标识</a:t>
+            </a:r>
+            <a:endParaRPr dirty="0"/>
           </a:p>
           <a:p>
             <a:pPr>
@@ -17826,7 +18742,12 @@
               </a:defRPr>
             </a:pPr>
             <a:r>
-              <a:t>wallet_type — 1企业/2个人/3商户</a:t>
+              <a:rPr dirty="0" err="1"/>
+              <a:t>wallet_type</a:t>
+            </a:r>
+            <a:r>
+              <a:rPr dirty="0"/>
+              <a:t> — 1企业/2个人/3商户</a:t>
             </a:r>
           </a:p>
           <a:p>
@@ -17841,7 +18762,12 @@
               </a:defRPr>
             </a:pPr>
             <a:r>
-              <a:t>wallet_level — 1-4类（限额不同）</a:t>
+              <a:rPr dirty="0" err="1"/>
+              <a:t>wallet_level</a:t>
+            </a:r>
+            <a:r>
+              <a:rPr dirty="0"/>
+              <a:t> — 1-4类（限额不同）</a:t>
             </a:r>
           </a:p>
           <a:p>
@@ -17856,8 +18782,18 @@
               </a:defRPr>
             </a:pPr>
             <a:r>
-              <a:t>wallet_open_cert — 身份证号</a:t>
-            </a:r>
+              <a:rPr dirty="0" err="1"/>
+              <a:t>wallet_open_cert</a:t>
+            </a:r>
+            <a:r>
+              <a:rPr dirty="0"/>
+              <a:t> — </a:t>
+            </a:r>
+            <a:r>
+              <a:rPr dirty="0" err="1"/>
+              <a:t>身份证号</a:t>
+            </a:r>
+            <a:endParaRPr dirty="0"/>
           </a:p>
           <a:p>
             <a:pPr>
@@ -17871,7 +18807,28 @@
               </a:defRPr>
             </a:pPr>
             <a:r>
-              <a:t>open_device / open_ip — 设备MAC/IP</a:t>
+              <a:rPr dirty="0" err="1"/>
+              <a:t>open_device</a:t>
+            </a:r>
+            <a:r>
+              <a:rPr dirty="0"/>
+              <a:t> / </a:t>
+            </a:r>
+            <a:r>
+              <a:rPr dirty="0" err="1"/>
+              <a:t>open_ip</a:t>
+            </a:r>
+            <a:r>
+              <a:rPr dirty="0"/>
+              <a:t> — </a:t>
+            </a:r>
+            <a:r>
+              <a:rPr dirty="0" err="1"/>
+              <a:t>设备MAC</a:t>
+            </a:r>
+            <a:r>
+              <a:rPr dirty="0"/>
+              <a:t>/IP</a:t>
             </a:r>
           </a:p>
           <a:p>
@@ -17886,8 +18843,18 @@
               </a:defRPr>
             </a:pPr>
             <a:r>
-              <a:t>is_abnormal — 是否异常（~5%）</a:t>
-            </a:r>
+              <a:rPr dirty="0" err="1"/>
+              <a:t>is_abnormal</a:t>
+            </a:r>
+            <a:r>
+              <a:rPr dirty="0"/>
+              <a:t> — </a:t>
+            </a:r>
+            <a:r>
+              <a:rPr dirty="0" err="1"/>
+              <a:t>是否异常</a:t>
+            </a:r>
+            <a:endParaRPr dirty="0"/>
           </a:p>
         </p:txBody>
       </p:sp>
@@ -17931,6 +18898,7 @@
           <a:lstStyle/>
           <a:p>
             <a:pPr algn="ctr"/>
+            <a:endParaRPr/>
           </a:p>
         </p:txBody>
       </p:sp>
@@ -18046,6 +19014,7 @@
           <a:lstStyle/>
           <a:p>
             <a:pPr algn="ctr"/>
+            <a:endParaRPr/>
           </a:p>
         </p:txBody>
       </p:sp>
@@ -18058,7 +19027,7 @@
         <p:spPr>
           <a:xfrm>
             <a:off x="4480560" y="2148840"/>
-            <a:ext cx="3200400" cy="2468880"/>
+            <a:ext cx="3200400" cy="1146468"/>
           </a:xfrm>
           <a:prstGeom prst="rect">
             <a:avLst/>
@@ -18082,7 +19051,12 @@
               </a:defRPr>
             </a:pPr>
             <a:r>
-              <a:t>tx_id / timestamp / amount</a:t>
+              <a:rPr dirty="0" err="1"/>
+              <a:t>tx_id</a:t>
+            </a:r>
+            <a:r>
+              <a:rPr dirty="0"/>
+              <a:t> / timestamp / amount</a:t>
             </a:r>
           </a:p>
           <a:p>
@@ -18097,8 +19071,42 @@
               </a:defRPr>
             </a:pPr>
             <a:r>
-              <a:t>src / dst — 发送/接收方 wallet_id</a:t>
-            </a:r>
+              <a:rPr dirty="0" err="1"/>
+              <a:t>src</a:t>
+            </a:r>
+            <a:r>
+              <a:rPr dirty="0"/>
+              <a:t> / </a:t>
+            </a:r>
+            <a:r>
+              <a:rPr dirty="0" err="1"/>
+              <a:t>dst</a:t>
+            </a:r>
+            <a:r>
+              <a:rPr dirty="0"/>
+              <a:t> — </a:t>
+            </a:r>
+            <a:r>
+              <a:rPr dirty="0" err="1"/>
+              <a:t>发送</a:t>
+            </a:r>
+            <a:r>
+              <a:rPr dirty="0"/>
+              <a:t>/</a:t>
+            </a:r>
+            <a:r>
+              <a:rPr dirty="0" err="1"/>
+              <a:t>接收方</a:t>
+            </a:r>
+            <a:r>
+              <a:rPr dirty="0"/>
+              <a:t> </a:t>
+            </a:r>
+            <a:r>
+              <a:rPr dirty="0" err="1"/>
+              <a:t>wallet_id</a:t>
+            </a:r>
+            <a:endParaRPr dirty="0"/>
           </a:p>
           <a:p>
             <a:pPr>
@@ -18112,8 +19120,18 @@
               </a:defRPr>
             </a:pPr>
             <a:r>
-              <a:t>transaction_motif — 7种交易动机</a:t>
-            </a:r>
+              <a:rPr dirty="0" err="1"/>
+              <a:t>is_risk</a:t>
+            </a:r>
+            <a:r>
+              <a:rPr dirty="0"/>
+              <a:t> — </a:t>
+            </a:r>
+            <a:r>
+              <a:rPr dirty="0" err="1"/>
+              <a:t>预测标签</a:t>
+            </a:r>
+            <a:endParaRPr dirty="0"/>
           </a:p>
           <a:p>
             <a:pPr>
@@ -18127,38 +19145,34 @@
               </a:defRPr>
             </a:pPr>
             <a:r>
-              <a:t>transaction_mode — 7种结构模式</a:t>
-            </a:r>
-          </a:p>
-          <a:p>
-            <a:pPr>
-              <a:spcAft>
-                <a:spcPts val="500"/>
-              </a:spcAft>
-              <a:defRPr sz="1400">
-                <a:solidFill>
-                  <a:srgbClr val="2C3E50"/>
-                </a:solidFill>
-              </a:defRPr>
-            </a:pPr>
-            <a:r>
-              <a:t>is_risk — 预测标签（~5%风险）</a:t>
-            </a:r>
-          </a:p>
-          <a:p>
-            <a:pPr>
-              <a:spcAft>
-                <a:spcPts val="500"/>
-              </a:spcAft>
-              <a:defRPr sz="1400">
-                <a:solidFill>
-                  <a:srgbClr val="2C3E50"/>
-                </a:solidFill>
-              </a:defRPr>
-            </a:pPr>
-            <a:r>
-              <a:t>src_device / src_ip / dst_device / dst_ip</a:t>
-            </a:r>
+              <a:rPr dirty="0" err="1"/>
+              <a:t>src_device</a:t>
+            </a:r>
+            <a:r>
+              <a:rPr dirty="0"/>
+              <a:t> / </a:t>
+            </a:r>
+            <a:r>
+              <a:rPr dirty="0" err="1"/>
+              <a:t>src_ip</a:t>
+            </a:r>
+            <a:r>
+              <a:rPr dirty="0"/>
+              <a:t> / </a:t>
+            </a:r>
+            <a:r>
+              <a:rPr dirty="0" err="1"/>
+              <a:t>dst_device</a:t>
+            </a:r>
+            <a:r>
+              <a:rPr dirty="0"/>
+              <a:t> / </a:t>
+            </a:r>
+            <a:r>
+              <a:rPr dirty="0" err="1"/>
+              <a:t>dst_ip</a:t>
+            </a:r>
+            <a:endParaRPr dirty="0"/>
           </a:p>
         </p:txBody>
       </p:sp>
@@ -18202,6 +19216,7 @@
           <a:lstStyle/>
           <a:p>
             <a:pPr algn="ctr"/>
+            <a:endParaRPr/>
           </a:p>
         </p:txBody>
       </p:sp>
@@ -18317,6 +19332,7 @@
           <a:lstStyle/>
           <a:p>
             <a:pPr algn="ctr"/>
+            <a:endParaRPr/>
           </a:p>
         </p:txBody>
       </p:sp>
@@ -18480,6 +19496,7 @@
           <a:lstStyle/>
           <a:p>
             <a:pPr algn="ctr"/>
+            <a:endParaRPr/>
           </a:p>
         </p:txBody>
       </p:sp>
@@ -18566,7 +19583,7 @@
 </file>
 
 <file path=ppt/slides/slide5.xml><?xml version="1.0" encoding="utf-8"?>
-<p:sld xmlns:a="http://schemas.openxmlformats.org/drawingml/2006/main" xmlns:p="http://schemas.openxmlformats.org/presentationml/2006/main" xmlns:r="http://schemas.openxmlformats.org/officeDocument/2006/relationships">
+<p:sld xmlns:a="http://schemas.openxmlformats.org/drawingml/2006/main" xmlns:r="http://schemas.openxmlformats.org/officeDocument/2006/relationships" xmlns:p="http://schemas.openxmlformats.org/presentationml/2006/main">
   <p:cSld>
     <p:bg>
       <p:bgPr>
@@ -18582,7 +19599,14 @@
         <p:cNvGrpSpPr/>
         <p:nvPr/>
       </p:nvGrpSpPr>
-      <p:grpSpPr/>
+      <p:grpSpPr>
+        <a:xfrm>
+          <a:off x="0" y="0"/>
+          <a:ext cx="0" cy="0"/>
+          <a:chOff x="0" y="0"/>
+          <a:chExt cx="0" cy="0"/>
+        </a:xfrm>
+      </p:grpSpPr>
       <p:sp>
         <p:nvSpPr>
           <p:cNvPr id="2" name="Rectangle 1"/>
@@ -18623,6 +19647,7 @@
           <a:lstStyle/>
           <a:p>
             <a:pPr algn="ctr"/>
+            <a:endParaRPr/>
           </a:p>
         </p:txBody>
       </p:sp>
@@ -18656,7 +19681,7 @@
               </a:defRPr>
             </a:pPr>
             <a:r>
-              <a:t>02 数据集 8 种交易模式（注入 LLM Prompt）</a:t>
+              <a:t>02 SimECNY 编程的异常模式（不告诉 LLM）</a:t>
             </a:r>
           </a:p>
         </p:txBody>
@@ -18691,460 +19716,21 @@
               </a:defRPr>
             </a:pPr>
             <a:r>
-              <a:t>浦发提供的数据集说明文档，作为领域知识注入</a:t>
-            </a:r>
-          </a:p>
-        </p:txBody>
-      </p:sp>
-      <p:sp>
-        <p:nvSpPr>
-          <p:cNvPr id="5" name="TextBox 4"/>
-          <p:cNvSpPr txBox="1"/>
-          <p:nvPr/>
-        </p:nvSpPr>
-        <p:spPr>
-          <a:xfrm>
-            <a:off x="457200" y="1280160"/>
-            <a:ext cx="5486400" cy="365760"/>
-          </a:xfrm>
-          <a:prstGeom prst="rect">
-            <a:avLst/>
-          </a:prstGeom>
-          <a:noFill/>
-        </p:spPr>
-        <p:txBody>
-          <a:bodyPr wrap="square">
-            <a:spAutoFit/>
-          </a:bodyPr>
-          <a:lstStyle/>
-          <a:p>
-            <a:pPr algn="l">
-              <a:defRPr sz="1800" b="1">
-                <a:solidFill>
-                  <a:srgbClr val="2ECC71"/>
-                </a:solidFill>
-              </a:defRPr>
-            </a:pPr>
-            <a:r>
-              <a:t>正常交易模式（3 种）</a:t>
-            </a:r>
-          </a:p>
-        </p:txBody>
-      </p:sp>
-      <p:sp>
-        <p:nvSpPr>
-          <p:cNvPr id="6" name="Rounded Rectangle 5"/>
+              <a:t>用于验证 LLM 是否能自行发现这些模式</a:t>
+            </a:r>
+          </a:p>
+        </p:txBody>
+      </p:sp>
+      <p:sp>
+        <p:nvSpPr>
+          <p:cNvPr id="5" name="Rounded Rectangle 4"/>
           <p:cNvSpPr/>
           <p:nvPr/>
         </p:nvSpPr>
         <p:spPr>
           <a:xfrm>
-            <a:off x="457200" y="1645920"/>
-            <a:ext cx="3566160" cy="1371600"/>
-          </a:xfrm>
-          <a:prstGeom prst="roundRect">
-            <a:avLst/>
-          </a:prstGeom>
-          <a:solidFill>
-            <a:srgbClr val="FFFFFF"/>
-          </a:solidFill>
-          <a:ln w="12700">
-            <a:solidFill>
-              <a:srgbClr val="2ECC71"/>
-            </a:solidFill>
-          </a:ln>
-        </p:spPr>
-        <p:style>
-          <a:lnRef idx="1">
-            <a:schemeClr val="accent1"/>
-          </a:lnRef>
-          <a:fillRef idx="3">
-            <a:schemeClr val="accent1"/>
-          </a:fillRef>
-          <a:effectRef idx="2">
-            <a:schemeClr val="accent1"/>
-          </a:effectRef>
-          <a:fontRef idx="minor">
-            <a:schemeClr val="lt1"/>
-          </a:fontRef>
-        </p:style>
-        <p:txBody>
-          <a:bodyPr rtlCol="0" anchor="ctr"/>
-          <a:lstStyle/>
-          <a:p>
-            <a:pPr algn="ctr"/>
-          </a:p>
-        </p:txBody>
-      </p:sp>
-      <p:sp>
-        <p:nvSpPr>
-          <p:cNvPr id="7" name="TextBox 6"/>
-          <p:cNvSpPr txBox="1"/>
-          <p:nvPr/>
-        </p:nvSpPr>
-        <p:spPr>
-          <a:xfrm>
-            <a:off x="594360" y="1691640"/>
-            <a:ext cx="3291840" cy="320040"/>
-          </a:xfrm>
-          <a:prstGeom prst="rect">
-            <a:avLst/>
-          </a:prstGeom>
-          <a:noFill/>
-        </p:spPr>
-        <p:txBody>
-          <a:bodyPr wrap="square">
-            <a:spAutoFit/>
-          </a:bodyPr>
-          <a:lstStyle/>
-          <a:p>
-            <a:pPr algn="l">
-              <a:defRPr sz="1400" b="1">
-                <a:solidFill>
-                  <a:srgbClr val="2ECC71"/>
-                </a:solidFill>
-              </a:defRPr>
-            </a:pPr>
-            <a:r>
-              <a:t>single_transaction</a:t>
-            </a:r>
-          </a:p>
-        </p:txBody>
-      </p:sp>
-      <p:sp>
-        <p:nvSpPr>
-          <p:cNvPr id="8" name="TextBox 7"/>
-          <p:cNvSpPr txBox="1"/>
-          <p:nvPr/>
-        </p:nvSpPr>
-        <p:spPr>
-          <a:xfrm>
-            <a:off x="594360" y="2057400"/>
-            <a:ext cx="3291840" cy="868680"/>
-          </a:xfrm>
-          <a:prstGeom prst="rect">
-            <a:avLst/>
-          </a:prstGeom>
-          <a:noFill/>
-        </p:spPr>
-        <p:txBody>
-          <a:bodyPr wrap="square">
-            <a:spAutoFit/>
-          </a:bodyPr>
-          <a:lstStyle/>
-          <a:p>
-            <a:pPr algn="l">
-              <a:defRPr sz="1300" b="0">
-                <a:solidFill>
-                  <a:srgbClr val="2C3E50"/>
-                </a:solidFill>
-              </a:defRPr>
-            </a:pPr>
-            <a:r>
-              <a:t>金额 1-5000 元</a:t>
-            </a:r>
-            <a:br/>
-            <a:r>
-              <a:t>高峰(9-11,14-16,19-21点)</a:t>
-            </a:r>
-            <a:br/>
-            <a:r>
-              <a:t>70%单笔 30%转发</a:t>
-            </a:r>
-          </a:p>
-        </p:txBody>
-      </p:sp>
-      <p:sp>
-        <p:nvSpPr>
-          <p:cNvPr id="9" name="Rounded Rectangle 8"/>
-          <p:cNvSpPr/>
-          <p:nvPr/>
-        </p:nvSpPr>
-        <p:spPr>
-          <a:xfrm>
-            <a:off x="4297680" y="1645920"/>
-            <a:ext cx="3566160" cy="1371600"/>
-          </a:xfrm>
-          <a:prstGeom prst="roundRect">
-            <a:avLst/>
-          </a:prstGeom>
-          <a:solidFill>
-            <a:srgbClr val="FFFFFF"/>
-          </a:solidFill>
-          <a:ln w="12700">
-            <a:solidFill>
-              <a:srgbClr val="2ECC71"/>
-            </a:solidFill>
-          </a:ln>
-        </p:spPr>
-        <p:style>
-          <a:lnRef idx="1">
-            <a:schemeClr val="accent1"/>
-          </a:lnRef>
-          <a:fillRef idx="3">
-            <a:schemeClr val="accent1"/>
-          </a:fillRef>
-          <a:effectRef idx="2">
-            <a:schemeClr val="accent1"/>
-          </a:effectRef>
-          <a:fontRef idx="minor">
-            <a:schemeClr val="lt1"/>
-          </a:fontRef>
-        </p:style>
-        <p:txBody>
-          <a:bodyPr rtlCol="0" anchor="ctr"/>
-          <a:lstStyle/>
-          <a:p>
-            <a:pPr algn="ctr"/>
-          </a:p>
-        </p:txBody>
-      </p:sp>
-      <p:sp>
-        <p:nvSpPr>
-          <p:cNvPr id="10" name="TextBox 9"/>
-          <p:cNvSpPr txBox="1"/>
-          <p:nvPr/>
-        </p:nvSpPr>
-        <p:spPr>
-          <a:xfrm>
-            <a:off x="4434840" y="1691640"/>
-            <a:ext cx="3291840" cy="320040"/>
-          </a:xfrm>
-          <a:prstGeom prst="rect">
-            <a:avLst/>
-          </a:prstGeom>
-          <a:noFill/>
-        </p:spPr>
-        <p:txBody>
-          <a:bodyPr wrap="square">
-            <a:spAutoFit/>
-          </a:bodyPr>
-          <a:lstStyle/>
-          <a:p>
-            <a:pPr algn="l">
-              <a:defRPr sz="1400" b="1">
-                <a:solidFill>
-                  <a:srgbClr val="2ECC71"/>
-                </a:solidFill>
-              </a:defRPr>
-            </a:pPr>
-            <a:r>
-              <a:t>normal_small_high_freq</a:t>
-            </a:r>
-          </a:p>
-        </p:txBody>
-      </p:sp>
-      <p:sp>
-        <p:nvSpPr>
-          <p:cNvPr id="11" name="TextBox 10"/>
-          <p:cNvSpPr txBox="1"/>
-          <p:nvPr/>
-        </p:nvSpPr>
-        <p:spPr>
-          <a:xfrm>
-            <a:off x="4434840" y="2057400"/>
-            <a:ext cx="3291840" cy="868680"/>
-          </a:xfrm>
-          <a:prstGeom prst="rect">
-            <a:avLst/>
-          </a:prstGeom>
-          <a:noFill/>
-        </p:spPr>
-        <p:txBody>
-          <a:bodyPr wrap="square">
-            <a:spAutoFit/>
-          </a:bodyPr>
-          <a:lstStyle/>
-          <a:p>
-            <a:pPr algn="l">
-              <a:defRPr sz="1300" b="0">
-                <a:solidFill>
-                  <a:srgbClr val="2C3E50"/>
-                </a:solidFill>
-              </a:defRPr>
-            </a:pPr>
-            <a:r>
-              <a:t>金额 1-100 元</a:t>
-            </a:r>
-            <a:br/>
-            <a:r>
-              <a:t>日常消费</a:t>
-            </a:r>
-            <a:br/>
-            <a:r>
-              <a:t>各模式各 20%</a:t>
-            </a:r>
-          </a:p>
-        </p:txBody>
-      </p:sp>
-      <p:sp>
-        <p:nvSpPr>
-          <p:cNvPr id="12" name="Rounded Rectangle 11"/>
-          <p:cNvSpPr/>
-          <p:nvPr/>
-        </p:nvSpPr>
-        <p:spPr>
-          <a:xfrm>
-            <a:off x="8138160" y="1645920"/>
-            <a:ext cx="3566160" cy="1371600"/>
-          </a:xfrm>
-          <a:prstGeom prst="roundRect">
-            <a:avLst/>
-          </a:prstGeom>
-          <a:solidFill>
-            <a:srgbClr val="FFFFFF"/>
-          </a:solidFill>
-          <a:ln w="12700">
-            <a:solidFill>
-              <a:srgbClr val="2ECC71"/>
-            </a:solidFill>
-          </a:ln>
-        </p:spPr>
-        <p:style>
-          <a:lnRef idx="1">
-            <a:schemeClr val="accent1"/>
-          </a:lnRef>
-          <a:fillRef idx="3">
-            <a:schemeClr val="accent1"/>
-          </a:fillRef>
-          <a:effectRef idx="2">
-            <a:schemeClr val="accent1"/>
-          </a:effectRef>
-          <a:fontRef idx="minor">
-            <a:schemeClr val="lt1"/>
-          </a:fontRef>
-        </p:style>
-        <p:txBody>
-          <a:bodyPr rtlCol="0" anchor="ctr"/>
-          <a:lstStyle/>
-          <a:p>
-            <a:pPr algn="ctr"/>
-          </a:p>
-        </p:txBody>
-      </p:sp>
-      <p:sp>
-        <p:nvSpPr>
-          <p:cNvPr id="13" name="TextBox 12"/>
-          <p:cNvSpPr txBox="1"/>
-          <p:nvPr/>
-        </p:nvSpPr>
-        <p:spPr>
-          <a:xfrm>
-            <a:off x="8275320" y="1691640"/>
-            <a:ext cx="3291840" cy="320040"/>
-          </a:xfrm>
-          <a:prstGeom prst="rect">
-            <a:avLst/>
-          </a:prstGeom>
-          <a:noFill/>
-        </p:spPr>
-        <p:txBody>
-          <a:bodyPr wrap="square">
-            <a:spAutoFit/>
-          </a:bodyPr>
-          <a:lstStyle/>
-          <a:p>
-            <a:pPr algn="l">
-              <a:defRPr sz="1400" b="1">
-                <a:solidFill>
-                  <a:srgbClr val="2ECC71"/>
-                </a:solidFill>
-              </a:defRPr>
-            </a:pPr>
-            <a:r>
-              <a:t>regular_large_low_freq</a:t>
-            </a:r>
-          </a:p>
-        </p:txBody>
-      </p:sp>
-      <p:sp>
-        <p:nvSpPr>
-          <p:cNvPr id="14" name="TextBox 13"/>
-          <p:cNvSpPr txBox="1"/>
-          <p:nvPr/>
-        </p:nvSpPr>
-        <p:spPr>
-          <a:xfrm>
-            <a:off x="8275320" y="2057400"/>
-            <a:ext cx="3291840" cy="868680"/>
-          </a:xfrm>
-          <a:prstGeom prst="rect">
-            <a:avLst/>
-          </a:prstGeom>
-          <a:noFill/>
-        </p:spPr>
-        <p:txBody>
-          <a:bodyPr wrap="square">
-            <a:spAutoFit/>
-          </a:bodyPr>
-          <a:lstStyle/>
-          <a:p>
-            <a:pPr algn="l">
-              <a:defRPr sz="1300" b="0">
-                <a:solidFill>
-                  <a:srgbClr val="2C3E50"/>
-                </a:solidFill>
-              </a:defRPr>
-            </a:pPr>
-            <a:r>
-              <a:t>金额 100-1000 元</a:t>
-            </a:r>
-            <a:br/>
-            <a:r>
-              <a:t>间隔 1H-3天</a:t>
-            </a:r>
-            <a:br/>
-            <a:r>
-              <a:t>偏向商户钱包</a:t>
-            </a:r>
-          </a:p>
-        </p:txBody>
-      </p:sp>
-      <p:sp>
-        <p:nvSpPr>
-          <p:cNvPr id="15" name="TextBox 14"/>
-          <p:cNvSpPr txBox="1"/>
-          <p:nvPr/>
-        </p:nvSpPr>
-        <p:spPr>
-          <a:xfrm>
-            <a:off x="457200" y="3200400"/>
-            <a:ext cx="5486400" cy="365760"/>
-          </a:xfrm>
-          <a:prstGeom prst="rect">
-            <a:avLst/>
-          </a:prstGeom>
-          <a:noFill/>
-        </p:spPr>
-        <p:txBody>
-          <a:bodyPr wrap="square">
-            <a:spAutoFit/>
-          </a:bodyPr>
-          <a:lstStyle/>
-          <a:p>
-            <a:pPr algn="l">
-              <a:defRPr sz="1800" b="1">
-                <a:solidFill>
-                  <a:srgbClr val="E74C3C"/>
-                </a:solidFill>
-              </a:defRPr>
-            </a:pPr>
-            <a:r>
-              <a:t>风险交易模式（5 种）</a:t>
-            </a:r>
-          </a:p>
-        </p:txBody>
-      </p:sp>
-      <p:sp>
-        <p:nvSpPr>
-          <p:cNvPr id="16" name="Rounded Rectangle 15"/>
-          <p:cNvSpPr/>
-          <p:nvPr/>
-        </p:nvSpPr>
-        <p:spPr>
-          <a:xfrm>
-            <a:off x="457200" y="3566160"/>
-            <a:ext cx="3566160" cy="1371600"/>
+            <a:off x="457200" y="1371600"/>
+            <a:ext cx="3566160" cy="1508760"/>
           </a:xfrm>
           <a:prstGeom prst="roundRect">
             <a:avLst/>
@@ -19177,19 +19763,20 @@
           <a:lstStyle/>
           <a:p>
             <a:pPr algn="ctr"/>
-          </a:p>
-        </p:txBody>
-      </p:sp>
-      <p:sp>
-        <p:nvSpPr>
-          <p:cNvPr id="17" name="TextBox 16"/>
-          <p:cNvSpPr txBox="1"/>
-          <p:nvPr/>
-        </p:nvSpPr>
-        <p:spPr>
-          <a:xfrm>
-            <a:off x="594360" y="3611880"/>
-            <a:ext cx="3291840" cy="320040"/>
+            <a:endParaRPr/>
+          </a:p>
+        </p:txBody>
+      </p:sp>
+      <p:sp>
+        <p:nvSpPr>
+          <p:cNvPr id="6" name="TextBox 5"/>
+          <p:cNvSpPr txBox="1"/>
+          <p:nvPr/>
+        </p:nvSpPr>
+        <p:spPr>
+          <a:xfrm>
+            <a:off x="640080" y="1481328"/>
+            <a:ext cx="3200400" cy="365760"/>
           </a:xfrm>
           <a:prstGeom prst="rect">
             <a:avLst/>
@@ -19203,28 +19790,28 @@
           <a:lstStyle/>
           <a:p>
             <a:pPr algn="l">
-              <a:defRPr sz="1400" b="1">
+              <a:defRPr sz="1600" b="1">
                 <a:solidFill>
                   <a:srgbClr val="E74C3C"/>
                 </a:solidFill>
               </a:defRPr>
             </a:pPr>
             <a:r>
-              <a:t>small_amount_testing</a:t>
-            </a:r>
-          </a:p>
-        </p:txBody>
-      </p:sp>
-      <p:sp>
-        <p:nvSpPr>
-          <p:cNvPr id="18" name="TextBox 17"/>
-          <p:cNvSpPr txBox="1"/>
-          <p:nvPr/>
-        </p:nvSpPr>
-        <p:spPr>
-          <a:xfrm>
-            <a:off x="594360" y="3950208"/>
-            <a:ext cx="3291840" cy="914400"/>
+              <a:t>身份证/手机号复用</a:t>
+            </a:r>
+          </a:p>
+        </p:txBody>
+      </p:sp>
+      <p:sp>
+        <p:nvSpPr>
+          <p:cNvPr id="7" name="TextBox 6"/>
+          <p:cNvSpPr txBox="1"/>
+          <p:nvPr/>
+        </p:nvSpPr>
+        <p:spPr>
+          <a:xfrm>
+            <a:off x="640080" y="1874520"/>
+            <a:ext cx="3200400" cy="914400"/>
           </a:xfrm>
           <a:prstGeom prst="rect">
             <a:avLst/>
@@ -19238,36 +19825,52 @@
           <a:lstStyle/>
           <a:p>
             <a:pPr algn="l">
-              <a:defRPr sz="1300" b="0">
+              <a:defRPr sz="1400" b="0">
                 <a:solidFill>
                   <a:srgbClr val="2C3E50"/>
                 </a:solidFill>
               </a:defRPr>
             </a:pPr>
             <a:r>
-              <a:t>金额 0.01-0.1 元，深夜</a:t>
-            </a:r>
-            <a:br/>
-            <a:r>
-              <a:t>休眠账户(&gt;=90天)突然激活</a:t>
-            </a:r>
-            <a:br/>
-            <a:r>
-              <a:t>40%扇入 60%扇出</a:t>
-            </a:r>
-          </a:p>
-        </p:txBody>
-      </p:sp>
-      <p:sp>
-        <p:nvSpPr>
-          <p:cNvPr id="19" name="Rounded Rectangle 18"/>
+              <a:rPr dirty="0" err="1"/>
+              <a:t>异常钱包</a:t>
+            </a:r>
+            <a:r>
+              <a:rPr dirty="0"/>
+              <a:t> 90% </a:t>
+            </a:r>
+            <a:r>
+              <a:rPr dirty="0" err="1"/>
+              <a:t>共享身份证</a:t>
+            </a:r>
+            <a:br>
+              <a:rPr dirty="0"/>
+            </a:br>
+            <a:r>
+              <a:rPr dirty="0"/>
+              <a:t>（</a:t>
+            </a:r>
+            <a:r>
+              <a:rPr dirty="0" err="1"/>
+              <a:t>正常仅</a:t>
+            </a:r>
+            <a:r>
+              <a:rPr dirty="0"/>
+              <a:t> 5%）</a:t>
+            </a:r>
+          </a:p>
+        </p:txBody>
+      </p:sp>
+      <p:sp>
+        <p:nvSpPr>
+          <p:cNvPr id="8" name="Rounded Rectangle 7"/>
           <p:cNvSpPr/>
           <p:nvPr/>
         </p:nvSpPr>
         <p:spPr>
           <a:xfrm>
-            <a:off x="4297680" y="3566160"/>
-            <a:ext cx="3566160" cy="1371600"/>
+            <a:off x="4297680" y="1371600"/>
+            <a:ext cx="3566160" cy="1508760"/>
           </a:xfrm>
           <a:prstGeom prst="roundRect">
             <a:avLst/>
@@ -19300,19 +19903,20 @@
           <a:lstStyle/>
           <a:p>
             <a:pPr algn="ctr"/>
-          </a:p>
-        </p:txBody>
-      </p:sp>
-      <p:sp>
-        <p:nvSpPr>
-          <p:cNvPr id="20" name="TextBox 19"/>
-          <p:cNvSpPr txBox="1"/>
-          <p:nvPr/>
-        </p:nvSpPr>
-        <p:spPr>
-          <a:xfrm>
-            <a:off x="4434840" y="3611880"/>
-            <a:ext cx="3291840" cy="320040"/>
+            <a:endParaRPr/>
+          </a:p>
+        </p:txBody>
+      </p:sp>
+      <p:sp>
+        <p:nvSpPr>
+          <p:cNvPr id="9" name="TextBox 8"/>
+          <p:cNvSpPr txBox="1"/>
+          <p:nvPr/>
+        </p:nvSpPr>
+        <p:spPr>
+          <a:xfrm>
+            <a:off x="4480560" y="1481328"/>
+            <a:ext cx="3200400" cy="365760"/>
           </a:xfrm>
           <a:prstGeom prst="rect">
             <a:avLst/>
@@ -19326,28 +19930,28 @@
           <a:lstStyle/>
           <a:p>
             <a:pPr algn="l">
-              <a:defRPr sz="1400" b="1">
+              <a:defRPr sz="1600" b="1">
                 <a:solidFill>
                   <a:srgbClr val="E74C3C"/>
                 </a:solidFill>
               </a:defRPr>
             </a:pPr>
             <a:r>
-              <a:t>merchant_laundering</a:t>
-            </a:r>
-          </a:p>
-        </p:txBody>
-      </p:sp>
-      <p:sp>
-        <p:nvSpPr>
-          <p:cNvPr id="21" name="TextBox 20"/>
-          <p:cNvSpPr txBox="1"/>
-          <p:nvPr/>
-        </p:nvSpPr>
-        <p:spPr>
-          <a:xfrm>
-            <a:off x="4434840" y="3950208"/>
-            <a:ext cx="3291840" cy="914400"/>
+              <a:t>高风险地区集中</a:t>
+            </a:r>
+          </a:p>
+        </p:txBody>
+      </p:sp>
+      <p:sp>
+        <p:nvSpPr>
+          <p:cNvPr id="10" name="TextBox 9"/>
+          <p:cNvSpPr txBox="1"/>
+          <p:nvPr/>
+        </p:nvSpPr>
+        <p:spPr>
+          <a:xfrm>
+            <a:off x="4480560" y="1874520"/>
+            <a:ext cx="3200400" cy="914400"/>
           </a:xfrm>
           <a:prstGeom prst="rect">
             <a:avLst/>
@@ -19361,36 +19965,53 @@
           <a:lstStyle/>
           <a:p>
             <a:pPr algn="l">
-              <a:defRPr sz="1300" b="0">
+              <a:defRPr sz="1400" b="0">
                 <a:solidFill>
                   <a:srgbClr val="2C3E50"/>
                 </a:solidFill>
               </a:defRPr>
             </a:pPr>
             <a:r>
-              <a:t>金额 10-1000 元，仅商户钱包</a:t>
-            </a:r>
-            <a:br/>
-            <a:r>
-              <a:t>跨行90%，同地区80%</a:t>
-            </a:r>
-            <a:br/>
-            <a:r>
-              <a:t>佣金 7-9%</a:t>
-            </a:r>
-          </a:p>
-        </p:txBody>
-      </p:sp>
-      <p:sp>
-        <p:nvSpPr>
-          <p:cNvPr id="22" name="Rounded Rectangle 21"/>
+              <a:rPr dirty="0" err="1"/>
+              <a:t>异常钱包</a:t>
+            </a:r>
+            <a:r>
+              <a:rPr dirty="0"/>
+              <a:t> 70% </a:t>
+            </a:r>
+            <a:r>
+              <a:rPr dirty="0" err="1"/>
+              <a:t>在</a:t>
+            </a:r>
+            <a:br>
+              <a:rPr dirty="0"/>
+            </a:br>
+            <a:r>
+              <a:rPr dirty="0" err="1"/>
+              <a:t>西藏</a:t>
+            </a:r>
+            <a:r>
+              <a:rPr dirty="0"/>
+              <a:t>/</a:t>
+            </a:r>
+            <a:r>
+              <a:rPr dirty="0" err="1"/>
+              <a:t>新疆地区</a:t>
+            </a:r>
+            <a:endParaRPr dirty="0"/>
+          </a:p>
+        </p:txBody>
+      </p:sp>
+      <p:sp>
+        <p:nvSpPr>
+          <p:cNvPr id="11" name="Rounded Rectangle 10"/>
           <p:cNvSpPr/>
           <p:nvPr/>
         </p:nvSpPr>
         <p:spPr>
           <a:xfrm>
-            <a:off x="8138160" y="3566160"/>
-            <a:ext cx="3566160" cy="1371600"/>
+            <a:off x="8138160" y="1371600"/>
+            <a:ext cx="3566160" cy="1508760"/>
           </a:xfrm>
           <a:prstGeom prst="roundRect">
             <a:avLst/>
@@ -19423,19 +20044,20 @@
           <a:lstStyle/>
           <a:p>
             <a:pPr algn="ctr"/>
-          </a:p>
-        </p:txBody>
-      </p:sp>
-      <p:sp>
-        <p:nvSpPr>
-          <p:cNvPr id="23" name="TextBox 22"/>
-          <p:cNvSpPr txBox="1"/>
-          <p:nvPr/>
-        </p:nvSpPr>
-        <p:spPr>
-          <a:xfrm>
-            <a:off x="8275320" y="3611880"/>
-            <a:ext cx="3291840" cy="320040"/>
+            <a:endParaRPr/>
+          </a:p>
+        </p:txBody>
+      </p:sp>
+      <p:sp>
+        <p:nvSpPr>
+          <p:cNvPr id="12" name="TextBox 11"/>
+          <p:cNvSpPr txBox="1"/>
+          <p:nvPr/>
+        </p:nvSpPr>
+        <p:spPr>
+          <a:xfrm>
+            <a:off x="8321040" y="1481328"/>
+            <a:ext cx="3200400" cy="365760"/>
           </a:xfrm>
           <a:prstGeom prst="rect">
             <a:avLst/>
@@ -19449,28 +20071,28 @@
           <a:lstStyle/>
           <a:p>
             <a:pPr algn="l">
-              <a:defRPr sz="1400" b="1">
+              <a:defRPr sz="1600" b="1">
                 <a:solidFill>
                   <a:srgbClr val="F39C12"/>
                 </a:solidFill>
               </a:defRPr>
             </a:pPr>
             <a:r>
-              <a:t>class4_laundering</a:t>
-            </a:r>
-          </a:p>
-        </p:txBody>
-      </p:sp>
-      <p:sp>
-        <p:nvSpPr>
-          <p:cNvPr id="24" name="TextBox 23"/>
-          <p:cNvSpPr txBox="1"/>
-          <p:nvPr/>
-        </p:nvSpPr>
-        <p:spPr>
-          <a:xfrm>
-            <a:off x="8275320" y="3950208"/>
-            <a:ext cx="3291840" cy="914400"/>
+              <a:t>实名认证延迟</a:t>
+            </a:r>
+          </a:p>
+        </p:txBody>
+      </p:sp>
+      <p:sp>
+        <p:nvSpPr>
+          <p:cNvPr id="13" name="TextBox 12"/>
+          <p:cNvSpPr txBox="1"/>
+          <p:nvPr/>
+        </p:nvSpPr>
+        <p:spPr>
+          <a:xfrm>
+            <a:off x="8321040" y="1874520"/>
+            <a:ext cx="3200400" cy="914400"/>
           </a:xfrm>
           <a:prstGeom prst="rect">
             <a:avLst/>
@@ -19484,36 +20106,32 @@
           <a:lstStyle/>
           <a:p>
             <a:pPr algn="l">
-              <a:defRPr sz="1300" b="0">
+              <a:defRPr sz="1400" b="0">
                 <a:solidFill>
                   <a:srgbClr val="2C3E50"/>
                 </a:solidFill>
               </a:defRPr>
             </a:pPr>
             <a:r>
-              <a:t>金额 100-2000 元，深夜</a:t>
+              <a:t>异常钱包延迟 20-30 天</a:t>
             </a:r>
             <a:br/>
             <a:r>
-              <a:t>仅4类钱包</a:t>
-            </a:r>
-            <a:br/>
-            <a:r>
-              <a:t>日限额 5000 元</a:t>
-            </a:r>
-          </a:p>
-        </p:txBody>
-      </p:sp>
-      <p:sp>
-        <p:nvSpPr>
-          <p:cNvPr id="25" name="Rounded Rectangle 24"/>
+              <a:t>（正常当天完成）</a:t>
+            </a:r>
+          </a:p>
+        </p:txBody>
+      </p:sp>
+      <p:sp>
+        <p:nvSpPr>
+          <p:cNvPr id="14" name="Rounded Rectangle 13"/>
           <p:cNvSpPr/>
           <p:nvPr/>
         </p:nvSpPr>
         <p:spPr>
           <a:xfrm>
-            <a:off x="457200" y="5120640"/>
-            <a:ext cx="3566160" cy="1371600"/>
+            <a:off x="457200" y="3063240"/>
+            <a:ext cx="3566160" cy="1508760"/>
           </a:xfrm>
           <a:prstGeom prst="roundRect">
             <a:avLst/>
@@ -19546,19 +20164,20 @@
           <a:lstStyle/>
           <a:p>
             <a:pPr algn="ctr"/>
-          </a:p>
-        </p:txBody>
-      </p:sp>
-      <p:sp>
-        <p:nvSpPr>
-          <p:cNvPr id="26" name="TextBox 25"/>
-          <p:cNvSpPr txBox="1"/>
-          <p:nvPr/>
-        </p:nvSpPr>
-        <p:spPr>
-          <a:xfrm>
-            <a:off x="594360" y="5166360"/>
-            <a:ext cx="3291840" cy="320040"/>
+            <a:endParaRPr/>
+          </a:p>
+        </p:txBody>
+      </p:sp>
+      <p:sp>
+        <p:nvSpPr>
+          <p:cNvPr id="15" name="TextBox 14"/>
+          <p:cNvSpPr txBox="1"/>
+          <p:nvPr/>
+        </p:nvSpPr>
+        <p:spPr>
+          <a:xfrm>
+            <a:off x="640080" y="3172968"/>
+            <a:ext cx="3200400" cy="365760"/>
           </a:xfrm>
           <a:prstGeom prst="rect">
             <a:avLst/>
@@ -19572,28 +20191,28 @@
           <a:lstStyle/>
           <a:p>
             <a:pPr algn="l">
-              <a:defRPr sz="1400" b="1">
+              <a:defRPr sz="1600" b="1">
                 <a:solidFill>
                   <a:srgbClr val="F39C12"/>
                 </a:solidFill>
               </a:defRPr>
             </a:pPr>
             <a:r>
-              <a:t>online_laundering</a:t>
-            </a:r>
-          </a:p>
-        </p:txBody>
-      </p:sp>
-      <p:sp>
-        <p:nvSpPr>
-          <p:cNvPr id="27" name="TextBox 26"/>
-          <p:cNvSpPr txBox="1"/>
-          <p:nvPr/>
-        </p:nvSpPr>
-        <p:spPr>
-          <a:xfrm>
-            <a:off x="594360" y="5504688"/>
-            <a:ext cx="3291840" cy="914400"/>
+              <a:t>夜间开户</a:t>
+            </a:r>
+          </a:p>
+        </p:txBody>
+      </p:sp>
+      <p:sp>
+        <p:nvSpPr>
+          <p:cNvPr id="16" name="TextBox 15"/>
+          <p:cNvSpPr txBox="1"/>
+          <p:nvPr/>
+        </p:nvSpPr>
+        <p:spPr>
+          <a:xfrm>
+            <a:off x="640080" y="3566160"/>
+            <a:ext cx="3200400" cy="914400"/>
           </a:xfrm>
           <a:prstGeom prst="rect">
             <a:avLst/>
@@ -19607,36 +20226,32 @@
           <a:lstStyle/>
           <a:p>
             <a:pPr algn="l">
-              <a:defRPr sz="1300" b="0">
+              <a:defRPr sz="1400" b="0">
                 <a:solidFill>
                   <a:srgbClr val="2C3E50"/>
                 </a:solidFill>
               </a:defRPr>
             </a:pPr>
             <a:r>
-              <a:t>金额 10-1000 元</a:t>
+              <a:t>异常钱包 50% 夜间开户</a:t>
             </a:r>
             <a:br/>
             <a:r>
-              <a:t>深夜(20-1点)</a:t>
-            </a:r>
-            <a:br/>
-            <a:r>
-              <a:t>交易次数多</a:t>
-            </a:r>
-          </a:p>
-        </p:txBody>
-      </p:sp>
-      <p:sp>
-        <p:nvSpPr>
-          <p:cNvPr id="28" name="Rounded Rectangle 27"/>
+              <a:t>（正常仅 1%）</a:t>
+            </a:r>
+          </a:p>
+        </p:txBody>
+      </p:sp>
+      <p:sp>
+        <p:nvSpPr>
+          <p:cNvPr id="17" name="Rounded Rectangle 16"/>
           <p:cNvSpPr/>
           <p:nvPr/>
         </p:nvSpPr>
         <p:spPr>
           <a:xfrm>
-            <a:off x="4297680" y="5120640"/>
-            <a:ext cx="3566160" cy="1371600"/>
+            <a:off x="4297680" y="3063240"/>
+            <a:ext cx="3566160" cy="1508760"/>
           </a:xfrm>
           <a:prstGeom prst="roundRect">
             <a:avLst/>
@@ -19669,19 +20284,20 @@
           <a:lstStyle/>
           <a:p>
             <a:pPr algn="ctr"/>
-          </a:p>
-        </p:txBody>
-      </p:sp>
-      <p:sp>
-        <p:nvSpPr>
-          <p:cNvPr id="29" name="TextBox 28"/>
-          <p:cNvSpPr txBox="1"/>
-          <p:nvPr/>
-        </p:nvSpPr>
-        <p:spPr>
-          <a:xfrm>
-            <a:off x="4434840" y="5166360"/>
-            <a:ext cx="3291840" cy="320040"/>
+            <a:endParaRPr/>
+          </a:p>
+        </p:txBody>
+      </p:sp>
+      <p:sp>
+        <p:nvSpPr>
+          <p:cNvPr id="18" name="TextBox 17"/>
+          <p:cNvSpPr txBox="1"/>
+          <p:nvPr/>
+        </p:nvSpPr>
+        <p:spPr>
+          <a:xfrm>
+            <a:off x="4480560" y="3172968"/>
+            <a:ext cx="3200400" cy="365760"/>
           </a:xfrm>
           <a:prstGeom prst="rect">
             <a:avLst/>
@@ -19695,15 +20311,460 @@
           <a:lstStyle/>
           <a:p>
             <a:pPr algn="l">
-              <a:defRPr sz="1400" b="1">
+              <a:defRPr sz="1600" b="1">
                 <a:solidFill>
                   <a:srgbClr val="9B59B6"/>
                 </a:solidFill>
               </a:defRPr>
             </a:pPr>
             <a:r>
-              <a:t>victim_laundering</a:t>
-            </a:r>
+              <a:t>小额试探交易</a:t>
+            </a:r>
+          </a:p>
+        </p:txBody>
+      </p:sp>
+      <p:sp>
+        <p:nvSpPr>
+          <p:cNvPr id="19" name="TextBox 18"/>
+          <p:cNvSpPr txBox="1"/>
+          <p:nvPr/>
+        </p:nvSpPr>
+        <p:spPr>
+          <a:xfrm>
+            <a:off x="4480560" y="3566160"/>
+            <a:ext cx="3200400" cy="914400"/>
+          </a:xfrm>
+          <a:prstGeom prst="rect">
+            <a:avLst/>
+          </a:prstGeom>
+          <a:noFill/>
+        </p:spPr>
+        <p:txBody>
+          <a:bodyPr wrap="square">
+            <a:spAutoFit/>
+          </a:bodyPr>
+          <a:lstStyle/>
+          <a:p>
+            <a:pPr algn="l">
+              <a:defRPr sz="1400" b="0">
+                <a:solidFill>
+                  <a:srgbClr val="2C3E50"/>
+                </a:solidFill>
+              </a:defRPr>
+            </a:pPr>
+            <a:r>
+              <a:t>金额 0.1-1.0 元</a:t>
+            </a:r>
+            <a:br/>
+            <a:r>
+              <a:t>高频短间隔</a:t>
+            </a:r>
+          </a:p>
+        </p:txBody>
+      </p:sp>
+      <p:sp>
+        <p:nvSpPr>
+          <p:cNvPr id="20" name="Rounded Rectangle 19"/>
+          <p:cNvSpPr/>
+          <p:nvPr/>
+        </p:nvSpPr>
+        <p:spPr>
+          <a:xfrm>
+            <a:off x="8138160" y="3063240"/>
+            <a:ext cx="3566160" cy="1508760"/>
+          </a:xfrm>
+          <a:prstGeom prst="roundRect">
+            <a:avLst/>
+          </a:prstGeom>
+          <a:solidFill>
+            <a:srgbClr val="FFFFFF"/>
+          </a:solidFill>
+          <a:ln w="12700">
+            <a:solidFill>
+              <a:srgbClr val="E74C3C"/>
+            </a:solidFill>
+          </a:ln>
+        </p:spPr>
+        <p:style>
+          <a:lnRef idx="1">
+            <a:schemeClr val="accent1"/>
+          </a:lnRef>
+          <a:fillRef idx="3">
+            <a:schemeClr val="accent1"/>
+          </a:fillRef>
+          <a:effectRef idx="2">
+            <a:schemeClr val="accent1"/>
+          </a:effectRef>
+          <a:fontRef idx="minor">
+            <a:schemeClr val="lt1"/>
+          </a:fontRef>
+        </p:style>
+        <p:txBody>
+          <a:bodyPr rtlCol="0" anchor="ctr"/>
+          <a:lstStyle/>
+          <a:p>
+            <a:pPr algn="ctr"/>
+            <a:endParaRPr/>
+          </a:p>
+        </p:txBody>
+      </p:sp>
+      <p:sp>
+        <p:nvSpPr>
+          <p:cNvPr id="21" name="TextBox 20"/>
+          <p:cNvSpPr txBox="1"/>
+          <p:nvPr/>
+        </p:nvSpPr>
+        <p:spPr>
+          <a:xfrm>
+            <a:off x="8321040" y="3172968"/>
+            <a:ext cx="3200400" cy="365760"/>
+          </a:xfrm>
+          <a:prstGeom prst="rect">
+            <a:avLst/>
+          </a:prstGeom>
+          <a:noFill/>
+        </p:spPr>
+        <p:txBody>
+          <a:bodyPr wrap="square">
+            <a:spAutoFit/>
+          </a:bodyPr>
+          <a:lstStyle/>
+          <a:p>
+            <a:pPr algn="l">
+              <a:defRPr sz="1600" b="1">
+                <a:solidFill>
+                  <a:srgbClr val="E74C3C"/>
+                </a:solidFill>
+              </a:defRPr>
+            </a:pPr>
+            <a:r>
+              <a:t>商户洗钱</a:t>
+            </a:r>
+          </a:p>
+        </p:txBody>
+      </p:sp>
+      <p:sp>
+        <p:nvSpPr>
+          <p:cNvPr id="22" name="TextBox 21"/>
+          <p:cNvSpPr txBox="1"/>
+          <p:nvPr/>
+        </p:nvSpPr>
+        <p:spPr>
+          <a:xfrm>
+            <a:off x="8321040" y="3566160"/>
+            <a:ext cx="3200400" cy="914400"/>
+          </a:xfrm>
+          <a:prstGeom prst="rect">
+            <a:avLst/>
+          </a:prstGeom>
+          <a:noFill/>
+        </p:spPr>
+        <p:txBody>
+          <a:bodyPr wrap="square">
+            <a:spAutoFit/>
+          </a:bodyPr>
+          <a:lstStyle/>
+          <a:p>
+            <a:pPr algn="l">
+              <a:defRPr sz="1400" b="0">
+                <a:solidFill>
+                  <a:srgbClr val="2C3E50"/>
+                </a:solidFill>
+              </a:defRPr>
+            </a:pPr>
+            <a:r>
+              <a:t>金额 1K-100K</a:t>
+            </a:r>
+            <a:br/>
+            <a:r>
+              <a:t>many_to_many 模式 80%</a:t>
+            </a:r>
+          </a:p>
+        </p:txBody>
+      </p:sp>
+      <p:sp>
+        <p:nvSpPr>
+          <p:cNvPr id="23" name="Rounded Rectangle 22"/>
+          <p:cNvSpPr/>
+          <p:nvPr/>
+        </p:nvSpPr>
+        <p:spPr>
+          <a:xfrm>
+            <a:off x="457200" y="4754880"/>
+            <a:ext cx="3566160" cy="1508760"/>
+          </a:xfrm>
+          <a:prstGeom prst="roundRect">
+            <a:avLst/>
+          </a:prstGeom>
+          <a:solidFill>
+            <a:srgbClr val="FFFFFF"/>
+          </a:solidFill>
+          <a:ln w="12700">
+            <a:solidFill>
+              <a:srgbClr val="F39C12"/>
+            </a:solidFill>
+          </a:ln>
+        </p:spPr>
+        <p:style>
+          <a:lnRef idx="1">
+            <a:schemeClr val="accent1"/>
+          </a:lnRef>
+          <a:fillRef idx="3">
+            <a:schemeClr val="accent1"/>
+          </a:fillRef>
+          <a:effectRef idx="2">
+            <a:schemeClr val="accent1"/>
+          </a:effectRef>
+          <a:fontRef idx="minor">
+            <a:schemeClr val="lt1"/>
+          </a:fontRef>
+        </p:style>
+        <p:txBody>
+          <a:bodyPr rtlCol="0" anchor="ctr"/>
+          <a:lstStyle/>
+          <a:p>
+            <a:pPr algn="ctr"/>
+            <a:endParaRPr/>
+          </a:p>
+        </p:txBody>
+      </p:sp>
+      <p:sp>
+        <p:nvSpPr>
+          <p:cNvPr id="24" name="TextBox 23"/>
+          <p:cNvSpPr txBox="1"/>
+          <p:nvPr/>
+        </p:nvSpPr>
+        <p:spPr>
+          <a:xfrm>
+            <a:off x="640080" y="4864608"/>
+            <a:ext cx="3200400" cy="365760"/>
+          </a:xfrm>
+          <a:prstGeom prst="rect">
+            <a:avLst/>
+          </a:prstGeom>
+          <a:noFill/>
+        </p:spPr>
+        <p:txBody>
+          <a:bodyPr wrap="square">
+            <a:spAutoFit/>
+          </a:bodyPr>
+          <a:lstStyle/>
+          <a:p>
+            <a:pPr algn="l">
+              <a:defRPr sz="1600" b="1">
+                <a:solidFill>
+                  <a:srgbClr val="F39C12"/>
+                </a:solidFill>
+              </a:defRPr>
+            </a:pPr>
+            <a:r>
+              <a:t>4类钱包洗钱</a:t>
+            </a:r>
+          </a:p>
+        </p:txBody>
+      </p:sp>
+      <p:sp>
+        <p:nvSpPr>
+          <p:cNvPr id="25" name="TextBox 24"/>
+          <p:cNvSpPr txBox="1"/>
+          <p:nvPr/>
+        </p:nvSpPr>
+        <p:spPr>
+          <a:xfrm>
+            <a:off x="640080" y="5257800"/>
+            <a:ext cx="3200400" cy="914400"/>
+          </a:xfrm>
+          <a:prstGeom prst="rect">
+            <a:avLst/>
+          </a:prstGeom>
+          <a:noFill/>
+        </p:spPr>
+        <p:txBody>
+          <a:bodyPr wrap="square">
+            <a:spAutoFit/>
+          </a:bodyPr>
+          <a:lstStyle/>
+          <a:p>
+            <a:pPr algn="l">
+              <a:defRPr sz="1400" b="0">
+                <a:solidFill>
+                  <a:srgbClr val="2C3E50"/>
+                </a:solidFill>
+              </a:defRPr>
+            </a:pPr>
+            <a:r>
+              <a:t>金额 100-2K</a:t>
+            </a:r>
+            <a:br/>
+            <a:r>
+              <a:t>90% 夜间交易</a:t>
+            </a:r>
+          </a:p>
+        </p:txBody>
+      </p:sp>
+      <p:sp>
+        <p:nvSpPr>
+          <p:cNvPr id="26" name="Rounded Rectangle 25"/>
+          <p:cNvSpPr/>
+          <p:nvPr/>
+        </p:nvSpPr>
+        <p:spPr>
+          <a:xfrm>
+            <a:off x="4297680" y="4754880"/>
+            <a:ext cx="3566160" cy="1508760"/>
+          </a:xfrm>
+          <a:prstGeom prst="roundRect">
+            <a:avLst/>
+          </a:prstGeom>
+          <a:solidFill>
+            <a:srgbClr val="FFFFFF"/>
+          </a:solidFill>
+          <a:ln w="12700">
+            <a:solidFill>
+              <a:srgbClr val="9B59B6"/>
+            </a:solidFill>
+          </a:ln>
+        </p:spPr>
+        <p:style>
+          <a:lnRef idx="1">
+            <a:schemeClr val="accent1"/>
+          </a:lnRef>
+          <a:fillRef idx="3">
+            <a:schemeClr val="accent1"/>
+          </a:fillRef>
+          <a:effectRef idx="2">
+            <a:schemeClr val="accent1"/>
+          </a:effectRef>
+          <a:fontRef idx="minor">
+            <a:schemeClr val="lt1"/>
+          </a:fontRef>
+        </p:style>
+        <p:txBody>
+          <a:bodyPr rtlCol="0" anchor="ctr"/>
+          <a:lstStyle/>
+          <a:p>
+            <a:pPr algn="ctr"/>
+            <a:endParaRPr/>
+          </a:p>
+        </p:txBody>
+      </p:sp>
+      <p:sp>
+        <p:nvSpPr>
+          <p:cNvPr id="27" name="TextBox 26"/>
+          <p:cNvSpPr txBox="1"/>
+          <p:nvPr/>
+        </p:nvSpPr>
+        <p:spPr>
+          <a:xfrm>
+            <a:off x="4480560" y="4864608"/>
+            <a:ext cx="3200400" cy="365760"/>
+          </a:xfrm>
+          <a:prstGeom prst="rect">
+            <a:avLst/>
+          </a:prstGeom>
+          <a:noFill/>
+        </p:spPr>
+        <p:txBody>
+          <a:bodyPr wrap="square">
+            <a:spAutoFit/>
+          </a:bodyPr>
+          <a:lstStyle/>
+          <a:p>
+            <a:pPr algn="l">
+              <a:defRPr sz="1600" b="1">
+                <a:solidFill>
+                  <a:srgbClr val="9B59B6"/>
+                </a:solidFill>
+              </a:defRPr>
+            </a:pPr>
+            <a:r>
+              <a:t>线上跑分</a:t>
+            </a:r>
+          </a:p>
+        </p:txBody>
+      </p:sp>
+      <p:sp>
+        <p:nvSpPr>
+          <p:cNvPr id="28" name="TextBox 27"/>
+          <p:cNvSpPr txBox="1"/>
+          <p:nvPr/>
+        </p:nvSpPr>
+        <p:spPr>
+          <a:xfrm>
+            <a:off x="4480560" y="5257800"/>
+            <a:ext cx="3200400" cy="914400"/>
+          </a:xfrm>
+          <a:prstGeom prst="rect">
+            <a:avLst/>
+          </a:prstGeom>
+          <a:noFill/>
+        </p:spPr>
+        <p:txBody>
+          <a:bodyPr wrap="square">
+            <a:spAutoFit/>
+          </a:bodyPr>
+          <a:lstStyle/>
+          <a:p>
+            <a:pPr algn="l">
+              <a:defRPr sz="1400" b="0">
+                <a:solidFill>
+                  <a:srgbClr val="2C3E50"/>
+                </a:solidFill>
+              </a:defRPr>
+            </a:pPr>
+            <a:r>
+              <a:t>金额 10-1K</a:t>
+            </a:r>
+            <a:br/>
+            <a:r>
+              <a:t>80% 夜间(20-1时)</a:t>
+            </a:r>
+          </a:p>
+        </p:txBody>
+      </p:sp>
+      <p:sp>
+        <p:nvSpPr>
+          <p:cNvPr id="29" name="Rounded Rectangle 28"/>
+          <p:cNvSpPr/>
+          <p:nvPr/>
+        </p:nvSpPr>
+        <p:spPr>
+          <a:xfrm>
+            <a:off x="8138160" y="4754880"/>
+            <a:ext cx="3566160" cy="1508760"/>
+          </a:xfrm>
+          <a:prstGeom prst="roundRect">
+            <a:avLst/>
+          </a:prstGeom>
+          <a:solidFill>
+            <a:srgbClr val="FFFFFF"/>
+          </a:solidFill>
+          <a:ln w="12700">
+            <a:solidFill>
+              <a:srgbClr val="E74C3C"/>
+            </a:solidFill>
+          </a:ln>
+        </p:spPr>
+        <p:style>
+          <a:lnRef idx="1">
+            <a:schemeClr val="accent1"/>
+          </a:lnRef>
+          <a:fillRef idx="3">
+            <a:schemeClr val="accent1"/>
+          </a:fillRef>
+          <a:effectRef idx="2">
+            <a:schemeClr val="accent1"/>
+          </a:effectRef>
+          <a:fontRef idx="minor">
+            <a:schemeClr val="lt1"/>
+          </a:fontRef>
+        </p:style>
+        <p:txBody>
+          <a:bodyPr rtlCol="0" anchor="ctr"/>
+          <a:lstStyle/>
+          <a:p>
+            <a:pPr algn="ctr"/>
+            <a:endParaRPr/>
           </a:p>
         </p:txBody>
       </p:sp>
@@ -19715,8 +20776,8 @@
         </p:nvSpPr>
         <p:spPr>
           <a:xfrm>
-            <a:off x="4434840" y="5504688"/>
-            <a:ext cx="3291840" cy="914400"/>
+            <a:off x="8321040" y="4864608"/>
+            <a:ext cx="3200400" cy="365760"/>
           </a:xfrm>
           <a:prstGeom prst="rect">
             <a:avLst/>
@@ -19730,29 +20791,60 @@
           <a:lstStyle/>
           <a:p>
             <a:pPr algn="l">
-              <a:defRPr sz="1300" b="0">
+              <a:defRPr sz="1600" b="1">
+                <a:solidFill>
+                  <a:srgbClr val="E74C3C"/>
+                </a:solidFill>
+              </a:defRPr>
+            </a:pPr>
+            <a:r>
+              <a:t>快速销户</a:t>
+            </a:r>
+          </a:p>
+        </p:txBody>
+      </p:sp>
+      <p:sp>
+        <p:nvSpPr>
+          <p:cNvPr id="31" name="TextBox 30"/>
+          <p:cNvSpPr txBox="1"/>
+          <p:nvPr/>
+        </p:nvSpPr>
+        <p:spPr>
+          <a:xfrm>
+            <a:off x="8321040" y="5257800"/>
+            <a:ext cx="3200400" cy="914400"/>
+          </a:xfrm>
+          <a:prstGeom prst="rect">
+            <a:avLst/>
+          </a:prstGeom>
+          <a:noFill/>
+        </p:spPr>
+        <p:txBody>
+          <a:bodyPr wrap="square">
+            <a:spAutoFit/>
+          </a:bodyPr>
+          <a:lstStyle/>
+          <a:p>
+            <a:pPr algn="l">
+              <a:defRPr sz="1400" b="0">
                 <a:solidFill>
                   <a:srgbClr val="2C3E50"/>
                 </a:solidFill>
               </a:defRPr>
             </a:pPr>
             <a:r>
-              <a:t>诱导: 设备IP与开户一致</a:t>
+              <a:t>60% 风险钱包在</a:t>
             </a:r>
             <a:br/>
             <a:r>
-              <a:t>盗用: 设备IP与开户不一致</a:t>
-            </a:r>
-            <a:br/>
-            <a:r>
-              <a:t>两种子模式</a:t>
-            </a:r>
-          </a:p>
-        </p:txBody>
-      </p:sp>
-      <p:sp>
-        <p:nvSpPr>
-          <p:cNvPr id="31" name="Rounded Rectangle 30"/>
+              <a:t>最后交易 1-2 天内注销</a:t>
+            </a:r>
+          </a:p>
+        </p:txBody>
+      </p:sp>
+      <p:sp>
+        <p:nvSpPr>
+          <p:cNvPr id="32" name="Rounded Rectangle 31"/>
           <p:cNvSpPr/>
           <p:nvPr/>
         </p:nvSpPr>
@@ -19792,12 +20884,13 @@
           <a:lstStyle/>
           <a:p>
             <a:pPr algn="ctr"/>
-          </a:p>
-        </p:txBody>
-      </p:sp>
-      <p:sp>
-        <p:nvSpPr>
-          <p:cNvPr id="32" name="TextBox 31"/>
+            <a:endParaRPr/>
+          </a:p>
+        </p:txBody>
+      </p:sp>
+      <p:sp>
+        <p:nvSpPr>
+          <p:cNvPr id="33" name="TextBox 32"/>
           <p:cNvSpPr txBox="1"/>
           <p:nvPr/>
         </p:nvSpPr>
@@ -19825,14 +20918,14 @@
               </a:defRPr>
             </a:pPr>
             <a:r>
-              <a:t>这些模式说明作为浦发数据集文档注入 System Prompt（~1200 token），帮助 LLM 理解数据生成逻辑，精准构造特征。</a:t>
-            </a:r>
-          </a:p>
-        </p:txBody>
-      </p:sp>
-      <p:sp>
-        <p:nvSpPr>
-          <p:cNvPr id="33" name="TextBox 32"/>
+              <a:t>关键：这些模式不告诉 LLM，通过领域知识注入和 SHAP 引导让 LLM 自己发现。如果 LLM 发现了我们没预料到的方向，那才是真正的价值。</a:t>
+            </a:r>
+          </a:p>
+        </p:txBody>
+      </p:sp>
+      <p:sp>
+        <p:nvSpPr>
+          <p:cNvPr id="34" name="TextBox 33"/>
           <p:cNvSpPr txBox="1"/>
           <p:nvPr/>
         </p:nvSpPr>
@@ -19874,7 +20967,7 @@
 </file>
 
 <file path=ppt/slides/slide6.xml><?xml version="1.0" encoding="utf-8"?>
-<p:sld xmlns:a="http://schemas.openxmlformats.org/drawingml/2006/main" xmlns:p="http://schemas.openxmlformats.org/presentationml/2006/main" xmlns:r="http://schemas.openxmlformats.org/officeDocument/2006/relationships">
+<p:sld xmlns:a="http://schemas.openxmlformats.org/drawingml/2006/main" xmlns:r="http://schemas.openxmlformats.org/officeDocument/2006/relationships" xmlns:p="http://schemas.openxmlformats.org/presentationml/2006/main">
   <p:cSld>
     <p:bg>
       <p:bgPr>
@@ -19890,7 +20983,14 @@
         <p:cNvGrpSpPr/>
         <p:nvPr/>
       </p:nvGrpSpPr>
-      <p:grpSpPr/>
+      <p:grpSpPr>
+        <a:xfrm>
+          <a:off x="0" y="0"/>
+          <a:ext cx="0" cy="0"/>
+          <a:chOff x="0" y="0"/>
+          <a:chExt cx="0" cy="0"/>
+        </a:xfrm>
+      </p:grpSpPr>
       <p:sp>
         <p:nvSpPr>
           <p:cNvPr id="2" name="Rectangle 1"/>
@@ -19931,6 +21031,7 @@
           <a:lstStyle/>
           <a:p>
             <a:pPr algn="ctr"/>
+            <a:endParaRPr/>
           </a:p>
         </p:txBody>
       </p:sp>
@@ -20013,7 +21114,7 @@
         <p:spPr>
           <a:xfrm>
             <a:off x="731520" y="1371600"/>
-            <a:ext cx="4572000" cy="457200"/>
+            <a:ext cx="4572000" cy="400110"/>
           </a:xfrm>
           <a:prstGeom prst="rect">
             <a:avLst/>
@@ -20034,7 +21135,24 @@
               </a:defRPr>
             </a:pPr>
             <a:r>
-              <a:t>领域知识资产（注入 System Prompt）</a:t>
+              <a:rPr dirty="0" err="1"/>
+              <a:t>领域知识</a:t>
+            </a:r>
+            <a:r>
+              <a:rPr lang="zh-CN" altLang="en-US" dirty="0"/>
+              <a:t>数据</a:t>
+            </a:r>
+            <a:r>
+              <a:rPr dirty="0"/>
+              <a:t>（</a:t>
+            </a:r>
+            <a:r>
+              <a:rPr dirty="0" err="1"/>
+              <a:t>注入</a:t>
+            </a:r>
+            <a:r>
+              <a:rPr dirty="0"/>
+              <a:t> System Prompt）</a:t>
             </a:r>
           </a:p>
         </p:txBody>
@@ -20049,6 +21167,864 @@
           <a:xfrm>
             <a:off x="731520" y="1920240"/>
             <a:ext cx="5029200" cy="914400"/>
+          </a:xfrm>
+          <a:prstGeom prst="roundRect">
+            <a:avLst/>
+          </a:prstGeom>
+          <a:solidFill>
+            <a:srgbClr val="FFFFFF"/>
+          </a:solidFill>
+          <a:ln w="12700">
+            <a:solidFill>
+              <a:srgbClr val="4F8EF7"/>
+            </a:solidFill>
+          </a:ln>
+        </p:spPr>
+        <p:style>
+          <a:lnRef idx="1">
+            <a:schemeClr val="accent1"/>
+          </a:lnRef>
+          <a:fillRef idx="3">
+            <a:schemeClr val="accent1"/>
+          </a:fillRef>
+          <a:effectRef idx="2">
+            <a:schemeClr val="accent1"/>
+          </a:effectRef>
+          <a:fontRef idx="minor">
+            <a:schemeClr val="lt1"/>
+          </a:fontRef>
+        </p:style>
+        <p:txBody>
+          <a:bodyPr rtlCol="0" anchor="ctr"/>
+          <a:lstStyle/>
+          <a:p>
+            <a:pPr algn="ctr"/>
+            <a:endParaRPr/>
+          </a:p>
+        </p:txBody>
+      </p:sp>
+      <p:sp>
+        <p:nvSpPr>
+          <p:cNvPr id="7" name="Rectangle 6"/>
+          <p:cNvSpPr/>
+          <p:nvPr/>
+        </p:nvSpPr>
+        <p:spPr>
+          <a:xfrm>
+            <a:off x="4663440" y="1965960"/>
+            <a:ext cx="1005840" cy="320040"/>
+          </a:xfrm>
+          <a:prstGeom prst="rect">
+            <a:avLst/>
+          </a:prstGeom>
+          <a:solidFill>
+            <a:srgbClr val="4F8EF7"/>
+          </a:solidFill>
+          <a:ln>
+            <a:noFill/>
+          </a:ln>
+        </p:spPr>
+        <p:style>
+          <a:lnRef idx="1">
+            <a:schemeClr val="accent1"/>
+          </a:lnRef>
+          <a:fillRef idx="3">
+            <a:schemeClr val="accent1"/>
+          </a:fillRef>
+          <a:effectRef idx="2">
+            <a:schemeClr val="accent1"/>
+          </a:effectRef>
+          <a:fontRef idx="minor">
+            <a:schemeClr val="lt1"/>
+          </a:fontRef>
+        </p:style>
+        <p:txBody>
+          <a:bodyPr rtlCol="0" anchor="ctr"/>
+          <a:lstStyle/>
+          <a:p>
+            <a:pPr algn="ctr"/>
+            <a:endParaRPr/>
+          </a:p>
+        </p:txBody>
+      </p:sp>
+      <p:sp>
+        <p:nvSpPr>
+          <p:cNvPr id="8" name="TextBox 7"/>
+          <p:cNvSpPr txBox="1"/>
+          <p:nvPr/>
+        </p:nvSpPr>
+        <p:spPr>
+          <a:xfrm>
+            <a:off x="4663440" y="1965960"/>
+            <a:ext cx="1005840" cy="320040"/>
+          </a:xfrm>
+          <a:prstGeom prst="rect">
+            <a:avLst/>
+          </a:prstGeom>
+          <a:noFill/>
+        </p:spPr>
+        <p:txBody>
+          <a:bodyPr wrap="square">
+            <a:spAutoFit/>
+          </a:bodyPr>
+          <a:lstStyle/>
+          <a:p>
+            <a:pPr algn="ctr">
+              <a:defRPr sz="1100" b="0">
+                <a:solidFill>
+                  <a:srgbClr val="FFFFFF"/>
+                </a:solidFill>
+              </a:defRPr>
+            </a:pPr>
+            <a:r>
+              <a:t>~800 token</a:t>
+            </a:r>
+          </a:p>
+        </p:txBody>
+      </p:sp>
+      <p:sp>
+        <p:nvSpPr>
+          <p:cNvPr id="9" name="TextBox 8"/>
+          <p:cNvSpPr txBox="1"/>
+          <p:nvPr/>
+        </p:nvSpPr>
+        <p:spPr>
+          <a:xfrm>
+            <a:off x="1005840" y="2011680"/>
+            <a:ext cx="3474720" cy="320040"/>
+          </a:xfrm>
+          <a:prstGeom prst="rect">
+            <a:avLst/>
+          </a:prstGeom>
+          <a:noFill/>
+        </p:spPr>
+        <p:txBody>
+          <a:bodyPr wrap="square">
+            <a:spAutoFit/>
+          </a:bodyPr>
+          <a:lstStyle/>
+          <a:p>
+            <a:pPr algn="l">
+              <a:defRPr sz="1600" b="1">
+                <a:solidFill>
+                  <a:srgbClr val="4F8EF7"/>
+                </a:solidFill>
+              </a:defRPr>
+            </a:pPr>
+            <a:r>
+              <a:t>邮储专家访谈</a:t>
+            </a:r>
+          </a:p>
+        </p:txBody>
+      </p:sp>
+      <p:sp>
+        <p:nvSpPr>
+          <p:cNvPr id="10" name="TextBox 9"/>
+          <p:cNvSpPr txBox="1"/>
+          <p:nvPr/>
+        </p:nvSpPr>
+        <p:spPr>
+          <a:xfrm>
+            <a:off x="1005840" y="2377440"/>
+            <a:ext cx="4572000" cy="457200"/>
+          </a:xfrm>
+          <a:prstGeom prst="rect">
+            <a:avLst/>
+          </a:prstGeom>
+          <a:noFill/>
+        </p:spPr>
+        <p:txBody>
+          <a:bodyPr wrap="square">
+            <a:spAutoFit/>
+          </a:bodyPr>
+          <a:lstStyle/>
+          <a:p>
+            <a:pPr algn="l">
+              <a:defRPr sz="1300" b="0">
+                <a:solidFill>
+                  <a:srgbClr val="2C3E50"/>
+                </a:solidFill>
+              </a:defRPr>
+            </a:pPr>
+            <a:r>
+              <a:t>4 类洗钱模式详细描述</a:t>
+            </a:r>
+            <a:br/>
+            <a:r>
+              <a:t>薅羊毛/线下跑分/线上跑分/商户收款码</a:t>
+            </a:r>
+          </a:p>
+        </p:txBody>
+      </p:sp>
+      <p:sp>
+        <p:nvSpPr>
+          <p:cNvPr id="11" name="Rounded Rectangle 10"/>
+          <p:cNvSpPr/>
+          <p:nvPr/>
+        </p:nvSpPr>
+        <p:spPr>
+          <a:xfrm>
+            <a:off x="731520" y="2971800"/>
+            <a:ext cx="5029200" cy="914400"/>
+          </a:xfrm>
+          <a:prstGeom prst="roundRect">
+            <a:avLst/>
+          </a:prstGeom>
+          <a:solidFill>
+            <a:srgbClr val="FFFFFF"/>
+          </a:solidFill>
+          <a:ln w="12700">
+            <a:solidFill>
+              <a:srgbClr val="2ECC71"/>
+            </a:solidFill>
+          </a:ln>
+        </p:spPr>
+        <p:style>
+          <a:lnRef idx="1">
+            <a:schemeClr val="accent1"/>
+          </a:lnRef>
+          <a:fillRef idx="3">
+            <a:schemeClr val="accent1"/>
+          </a:fillRef>
+          <a:effectRef idx="2">
+            <a:schemeClr val="accent1"/>
+          </a:effectRef>
+          <a:fontRef idx="minor">
+            <a:schemeClr val="lt1"/>
+          </a:fontRef>
+        </p:style>
+        <p:txBody>
+          <a:bodyPr rtlCol="0" anchor="ctr"/>
+          <a:lstStyle/>
+          <a:p>
+            <a:pPr algn="ctr"/>
+            <a:endParaRPr/>
+          </a:p>
+        </p:txBody>
+      </p:sp>
+      <p:sp>
+        <p:nvSpPr>
+          <p:cNvPr id="12" name="Rectangle 11"/>
+          <p:cNvSpPr/>
+          <p:nvPr/>
+        </p:nvSpPr>
+        <p:spPr>
+          <a:xfrm>
+            <a:off x="4663440" y="3017520"/>
+            <a:ext cx="1005840" cy="320040"/>
+          </a:xfrm>
+          <a:prstGeom prst="rect">
+            <a:avLst/>
+          </a:prstGeom>
+          <a:solidFill>
+            <a:srgbClr val="2ECC71"/>
+          </a:solidFill>
+          <a:ln>
+            <a:noFill/>
+          </a:ln>
+        </p:spPr>
+        <p:style>
+          <a:lnRef idx="1">
+            <a:schemeClr val="accent1"/>
+          </a:lnRef>
+          <a:fillRef idx="3">
+            <a:schemeClr val="accent1"/>
+          </a:fillRef>
+          <a:effectRef idx="2">
+            <a:schemeClr val="accent1"/>
+          </a:effectRef>
+          <a:fontRef idx="minor">
+            <a:schemeClr val="lt1"/>
+          </a:fontRef>
+        </p:style>
+        <p:txBody>
+          <a:bodyPr rtlCol="0" anchor="ctr"/>
+          <a:lstStyle/>
+          <a:p>
+            <a:pPr algn="ctr"/>
+            <a:endParaRPr/>
+          </a:p>
+        </p:txBody>
+      </p:sp>
+      <p:sp>
+        <p:nvSpPr>
+          <p:cNvPr id="13" name="TextBox 12"/>
+          <p:cNvSpPr txBox="1"/>
+          <p:nvPr/>
+        </p:nvSpPr>
+        <p:spPr>
+          <a:xfrm>
+            <a:off x="4663440" y="3017520"/>
+            <a:ext cx="1005840" cy="320040"/>
+          </a:xfrm>
+          <a:prstGeom prst="rect">
+            <a:avLst/>
+          </a:prstGeom>
+          <a:noFill/>
+        </p:spPr>
+        <p:txBody>
+          <a:bodyPr wrap="square">
+            <a:spAutoFit/>
+          </a:bodyPr>
+          <a:lstStyle/>
+          <a:p>
+            <a:pPr algn="ctr">
+              <a:defRPr sz="1100" b="0">
+                <a:solidFill>
+                  <a:srgbClr val="FFFFFF"/>
+                </a:solidFill>
+              </a:defRPr>
+            </a:pPr>
+            <a:r>
+              <a:t>~1000 token</a:t>
+            </a:r>
+          </a:p>
+        </p:txBody>
+      </p:sp>
+      <p:sp>
+        <p:nvSpPr>
+          <p:cNvPr id="14" name="TextBox 13"/>
+          <p:cNvSpPr txBox="1"/>
+          <p:nvPr/>
+        </p:nvSpPr>
+        <p:spPr>
+          <a:xfrm>
+            <a:off x="1005840" y="3063240"/>
+            <a:ext cx="3474720" cy="320040"/>
+          </a:xfrm>
+          <a:prstGeom prst="rect">
+            <a:avLst/>
+          </a:prstGeom>
+          <a:noFill/>
+        </p:spPr>
+        <p:txBody>
+          <a:bodyPr wrap="square">
+            <a:spAutoFit/>
+          </a:bodyPr>
+          <a:lstStyle/>
+          <a:p>
+            <a:pPr algn="l">
+              <a:defRPr sz="1600" b="1">
+                <a:solidFill>
+                  <a:srgbClr val="2ECC71"/>
+                </a:solidFill>
+              </a:defRPr>
+            </a:pPr>
+            <a:r>
+              <a:t>可疑交易识别点</a:t>
+            </a:r>
+          </a:p>
+        </p:txBody>
+      </p:sp>
+      <p:sp>
+        <p:nvSpPr>
+          <p:cNvPr id="15" name="TextBox 14"/>
+          <p:cNvSpPr txBox="1"/>
+          <p:nvPr/>
+        </p:nvSpPr>
+        <p:spPr>
+          <a:xfrm>
+            <a:off x="1005840" y="3429000"/>
+            <a:ext cx="4572000" cy="457200"/>
+          </a:xfrm>
+          <a:prstGeom prst="rect">
+            <a:avLst/>
+          </a:prstGeom>
+          <a:noFill/>
+        </p:spPr>
+        <p:txBody>
+          <a:bodyPr wrap="square">
+            <a:spAutoFit/>
+          </a:bodyPr>
+          <a:lstStyle/>
+          <a:p>
+            <a:pPr algn="l">
+              <a:defRPr sz="1300" b="0">
+                <a:solidFill>
+                  <a:srgbClr val="2C3E50"/>
+                </a:solidFill>
+              </a:defRPr>
+            </a:pPr>
+            <a:r>
+              <a:t>12 类 200+ 个识别点</a:t>
+            </a:r>
+            <a:br/>
+            <a:r>
+              <a:t>压缩为每类 top-3（36 条）</a:t>
+            </a:r>
+          </a:p>
+        </p:txBody>
+      </p:sp>
+      <p:sp>
+        <p:nvSpPr>
+          <p:cNvPr id="16" name="Rounded Rectangle 15"/>
+          <p:cNvSpPr/>
+          <p:nvPr/>
+        </p:nvSpPr>
+        <p:spPr>
+          <a:xfrm>
+            <a:off x="731520" y="4023360"/>
+            <a:ext cx="5029200" cy="914400"/>
+          </a:xfrm>
+          <a:prstGeom prst="roundRect">
+            <a:avLst/>
+          </a:prstGeom>
+          <a:solidFill>
+            <a:srgbClr val="FFFFFF"/>
+          </a:solidFill>
+          <a:ln w="12700">
+            <a:solidFill>
+              <a:srgbClr val="F39C12"/>
+            </a:solidFill>
+          </a:ln>
+        </p:spPr>
+        <p:style>
+          <a:lnRef idx="1">
+            <a:schemeClr val="accent1"/>
+          </a:lnRef>
+          <a:fillRef idx="3">
+            <a:schemeClr val="accent1"/>
+          </a:fillRef>
+          <a:effectRef idx="2">
+            <a:schemeClr val="accent1"/>
+          </a:effectRef>
+          <a:fontRef idx="minor">
+            <a:schemeClr val="lt1"/>
+          </a:fontRef>
+        </p:style>
+        <p:txBody>
+          <a:bodyPr rtlCol="0" anchor="ctr"/>
+          <a:lstStyle/>
+          <a:p>
+            <a:pPr algn="ctr"/>
+            <a:endParaRPr/>
+          </a:p>
+        </p:txBody>
+      </p:sp>
+      <p:sp>
+        <p:nvSpPr>
+          <p:cNvPr id="17" name="Rectangle 16"/>
+          <p:cNvSpPr/>
+          <p:nvPr/>
+        </p:nvSpPr>
+        <p:spPr>
+          <a:xfrm>
+            <a:off x="4663440" y="4069080"/>
+            <a:ext cx="1005840" cy="320040"/>
+          </a:xfrm>
+          <a:prstGeom prst="rect">
+            <a:avLst/>
+          </a:prstGeom>
+          <a:solidFill>
+            <a:srgbClr val="F39C12"/>
+          </a:solidFill>
+          <a:ln>
+            <a:noFill/>
+          </a:ln>
+        </p:spPr>
+        <p:style>
+          <a:lnRef idx="1">
+            <a:schemeClr val="accent1"/>
+          </a:lnRef>
+          <a:fillRef idx="3">
+            <a:schemeClr val="accent1"/>
+          </a:fillRef>
+          <a:effectRef idx="2">
+            <a:schemeClr val="accent1"/>
+          </a:effectRef>
+          <a:fontRef idx="minor">
+            <a:schemeClr val="lt1"/>
+          </a:fontRef>
+        </p:style>
+        <p:txBody>
+          <a:bodyPr rtlCol="0" anchor="ctr"/>
+          <a:lstStyle/>
+          <a:p>
+            <a:pPr algn="ctr"/>
+            <a:endParaRPr/>
+          </a:p>
+        </p:txBody>
+      </p:sp>
+      <p:sp>
+        <p:nvSpPr>
+          <p:cNvPr id="18" name="TextBox 17"/>
+          <p:cNvSpPr txBox="1"/>
+          <p:nvPr/>
+        </p:nvSpPr>
+        <p:spPr>
+          <a:xfrm>
+            <a:off x="4663440" y="4069080"/>
+            <a:ext cx="1005840" cy="320040"/>
+          </a:xfrm>
+          <a:prstGeom prst="rect">
+            <a:avLst/>
+          </a:prstGeom>
+          <a:noFill/>
+        </p:spPr>
+        <p:txBody>
+          <a:bodyPr wrap="square">
+            <a:spAutoFit/>
+          </a:bodyPr>
+          <a:lstStyle/>
+          <a:p>
+            <a:pPr algn="ctr">
+              <a:defRPr sz="1100" b="0">
+                <a:solidFill>
+                  <a:srgbClr val="FFFFFF"/>
+                </a:solidFill>
+              </a:defRPr>
+            </a:pPr>
+            <a:r>
+              <a:t>~600 token</a:t>
+            </a:r>
+          </a:p>
+        </p:txBody>
+      </p:sp>
+      <p:sp>
+        <p:nvSpPr>
+          <p:cNvPr id="19" name="TextBox 18"/>
+          <p:cNvSpPr txBox="1"/>
+          <p:nvPr/>
+        </p:nvSpPr>
+        <p:spPr>
+          <a:xfrm>
+            <a:off x="1005840" y="4114800"/>
+            <a:ext cx="3474720" cy="320040"/>
+          </a:xfrm>
+          <a:prstGeom prst="rect">
+            <a:avLst/>
+          </a:prstGeom>
+          <a:noFill/>
+        </p:spPr>
+        <p:txBody>
+          <a:bodyPr wrap="square">
+            <a:spAutoFit/>
+          </a:bodyPr>
+          <a:lstStyle/>
+          <a:p>
+            <a:pPr algn="l">
+              <a:defRPr sz="1600" b="1">
+                <a:solidFill>
+                  <a:srgbClr val="F39C12"/>
+                </a:solidFill>
+              </a:defRPr>
+            </a:pPr>
+            <a:r>
+              <a:t>风险分类表</a:t>
+            </a:r>
+          </a:p>
+        </p:txBody>
+      </p:sp>
+      <p:sp>
+        <p:nvSpPr>
+          <p:cNvPr id="20" name="TextBox 19"/>
+          <p:cNvSpPr txBox="1"/>
+          <p:nvPr/>
+        </p:nvSpPr>
+        <p:spPr>
+          <a:xfrm>
+            <a:off x="1005840" y="4480560"/>
+            <a:ext cx="4572000" cy="457200"/>
+          </a:xfrm>
+          <a:prstGeom prst="rect">
+            <a:avLst/>
+          </a:prstGeom>
+          <a:noFill/>
+        </p:spPr>
+        <p:txBody>
+          <a:bodyPr wrap="square">
+            <a:spAutoFit/>
+          </a:bodyPr>
+          <a:lstStyle/>
+          <a:p>
+            <a:pPr algn="l">
+              <a:defRPr sz="1300" b="0">
+                <a:solidFill>
+                  <a:srgbClr val="2C3E50"/>
+                </a:solidFill>
+              </a:defRPr>
+            </a:pPr>
+            <a:r>
+              <a:t>38 个风险指标</a:t>
+            </a:r>
+            <a:br/>
+            <a:r>
+              <a:t>4 个维度分类</a:t>
+            </a:r>
+          </a:p>
+        </p:txBody>
+      </p:sp>
+      <p:sp>
+        <p:nvSpPr>
+          <p:cNvPr id="21" name="Rounded Rectangle 20"/>
+          <p:cNvSpPr/>
+          <p:nvPr/>
+        </p:nvSpPr>
+        <p:spPr>
+          <a:xfrm>
+            <a:off x="731520" y="5074920"/>
+            <a:ext cx="5029200" cy="914400"/>
+          </a:xfrm>
+          <a:prstGeom prst="roundRect">
+            <a:avLst/>
+          </a:prstGeom>
+          <a:solidFill>
+            <a:srgbClr val="FFFFFF"/>
+          </a:solidFill>
+          <a:ln w="12700">
+            <a:solidFill>
+              <a:srgbClr val="9B59B6"/>
+            </a:solidFill>
+          </a:ln>
+        </p:spPr>
+        <p:style>
+          <a:lnRef idx="1">
+            <a:schemeClr val="accent1"/>
+          </a:lnRef>
+          <a:fillRef idx="3">
+            <a:schemeClr val="accent1"/>
+          </a:fillRef>
+          <a:effectRef idx="2">
+            <a:schemeClr val="accent1"/>
+          </a:effectRef>
+          <a:fontRef idx="minor">
+            <a:schemeClr val="lt1"/>
+          </a:fontRef>
+        </p:style>
+        <p:txBody>
+          <a:bodyPr rtlCol="0" anchor="ctr"/>
+          <a:lstStyle/>
+          <a:p>
+            <a:pPr algn="ctr"/>
+            <a:endParaRPr/>
+          </a:p>
+        </p:txBody>
+      </p:sp>
+      <p:sp>
+        <p:nvSpPr>
+          <p:cNvPr id="22" name="Rectangle 21"/>
+          <p:cNvSpPr/>
+          <p:nvPr/>
+        </p:nvSpPr>
+        <p:spPr>
+          <a:xfrm>
+            <a:off x="4663440" y="5120640"/>
+            <a:ext cx="1005840" cy="320040"/>
+          </a:xfrm>
+          <a:prstGeom prst="rect">
+            <a:avLst/>
+          </a:prstGeom>
+          <a:solidFill>
+            <a:srgbClr val="9B59B6"/>
+          </a:solidFill>
+          <a:ln>
+            <a:noFill/>
+          </a:ln>
+        </p:spPr>
+        <p:style>
+          <a:lnRef idx="1">
+            <a:schemeClr val="accent1"/>
+          </a:lnRef>
+          <a:fillRef idx="3">
+            <a:schemeClr val="accent1"/>
+          </a:fillRef>
+          <a:effectRef idx="2">
+            <a:schemeClr val="accent1"/>
+          </a:effectRef>
+          <a:fontRef idx="minor">
+            <a:schemeClr val="lt1"/>
+          </a:fontRef>
+        </p:style>
+        <p:txBody>
+          <a:bodyPr rtlCol="0" anchor="ctr"/>
+          <a:lstStyle/>
+          <a:p>
+            <a:pPr algn="ctr"/>
+            <a:endParaRPr/>
+          </a:p>
+        </p:txBody>
+      </p:sp>
+      <p:sp>
+        <p:nvSpPr>
+          <p:cNvPr id="23" name="TextBox 22"/>
+          <p:cNvSpPr txBox="1"/>
+          <p:nvPr/>
+        </p:nvSpPr>
+        <p:spPr>
+          <a:xfrm>
+            <a:off x="4663440" y="5120640"/>
+            <a:ext cx="1005840" cy="320040"/>
+          </a:xfrm>
+          <a:prstGeom prst="rect">
+            <a:avLst/>
+          </a:prstGeom>
+          <a:noFill/>
+        </p:spPr>
+        <p:txBody>
+          <a:bodyPr wrap="square">
+            <a:spAutoFit/>
+          </a:bodyPr>
+          <a:lstStyle/>
+          <a:p>
+            <a:pPr algn="ctr">
+              <a:defRPr sz="1100" b="0">
+                <a:solidFill>
+                  <a:srgbClr val="FFFFFF"/>
+                </a:solidFill>
+              </a:defRPr>
+            </a:pPr>
+            <a:r>
+              <a:t>~400 token</a:t>
+            </a:r>
+          </a:p>
+        </p:txBody>
+      </p:sp>
+      <p:sp>
+        <p:nvSpPr>
+          <p:cNvPr id="24" name="TextBox 23"/>
+          <p:cNvSpPr txBox="1"/>
+          <p:nvPr/>
+        </p:nvSpPr>
+        <p:spPr>
+          <a:xfrm>
+            <a:off x="1005840" y="5166360"/>
+            <a:ext cx="3474720" cy="320040"/>
+          </a:xfrm>
+          <a:prstGeom prst="rect">
+            <a:avLst/>
+          </a:prstGeom>
+          <a:noFill/>
+        </p:spPr>
+        <p:txBody>
+          <a:bodyPr wrap="square">
+            <a:spAutoFit/>
+          </a:bodyPr>
+          <a:lstStyle/>
+          <a:p>
+            <a:pPr algn="l">
+              <a:defRPr sz="1600" b="1">
+                <a:solidFill>
+                  <a:srgbClr val="9B59B6"/>
+                </a:solidFill>
+              </a:defRPr>
+            </a:pPr>
+            <a:r>
+              <a:t>检测规则</a:t>
+            </a:r>
+          </a:p>
+        </p:txBody>
+      </p:sp>
+      <p:sp>
+        <p:nvSpPr>
+          <p:cNvPr id="25" name="TextBox 24"/>
+          <p:cNvSpPr txBox="1"/>
+          <p:nvPr/>
+        </p:nvSpPr>
+        <p:spPr>
+          <a:xfrm>
+            <a:off x="1005840" y="5532120"/>
+            <a:ext cx="4572000" cy="457200"/>
+          </a:xfrm>
+          <a:prstGeom prst="rect">
+            <a:avLst/>
+          </a:prstGeom>
+          <a:noFill/>
+        </p:spPr>
+        <p:txBody>
+          <a:bodyPr wrap="square">
+            <a:spAutoFit/>
+          </a:bodyPr>
+          <a:lstStyle/>
+          <a:p>
+            <a:pPr algn="l">
+              <a:defRPr sz="1300" b="0">
+                <a:solidFill>
+                  <a:srgbClr val="2C3E50"/>
+                </a:solidFill>
+              </a:defRPr>
+            </a:pPr>
+            <a:r>
+              <a:rPr dirty="0"/>
+              <a:t>15 </a:t>
+            </a:r>
+            <a:r>
+              <a:rPr dirty="0" err="1"/>
+              <a:t>条种子规则</a:t>
+            </a:r>
+            <a:br>
+              <a:rPr dirty="0"/>
+            </a:br>
+            <a:r>
+              <a:rPr dirty="0" err="1"/>
+              <a:t>转为</a:t>
+            </a:r>
+            <a:r>
+              <a:rPr dirty="0"/>
+              <a:t> Python </a:t>
+            </a:r>
+            <a:r>
+              <a:rPr dirty="0" err="1"/>
+              <a:t>函数示例</a:t>
+            </a:r>
+            <a:endParaRPr dirty="0"/>
+          </a:p>
+        </p:txBody>
+      </p:sp>
+      <p:sp>
+        <p:nvSpPr>
+          <p:cNvPr id="26" name="TextBox 25"/>
+          <p:cNvSpPr txBox="1"/>
+          <p:nvPr/>
+        </p:nvSpPr>
+        <p:spPr>
+          <a:xfrm>
+            <a:off x="6400800" y="1371600"/>
+            <a:ext cx="5029200" cy="400110"/>
+          </a:xfrm>
+          <a:prstGeom prst="rect">
+            <a:avLst/>
+          </a:prstGeom>
+          <a:noFill/>
+        </p:spPr>
+        <p:txBody>
+          <a:bodyPr wrap="square">
+            <a:spAutoFit/>
+          </a:bodyPr>
+          <a:lstStyle/>
+          <a:p>
+            <a:pPr algn="l">
+              <a:defRPr sz="2000" b="1">
+                <a:solidFill>
+                  <a:srgbClr val="2C3E50"/>
+                </a:solidFill>
+              </a:defRPr>
+            </a:pPr>
+            <a:r>
+              <a:rPr dirty="0" err="1"/>
+              <a:t>人工基线</a:t>
+            </a:r>
+            <a:r>
+              <a:rPr dirty="0"/>
+              <a:t> 40+ </a:t>
+            </a:r>
+            <a:r>
+              <a:rPr dirty="0" err="1"/>
+              <a:t>特征的缺口</a:t>
+            </a:r>
+            <a:endParaRPr dirty="0"/>
+          </a:p>
+        </p:txBody>
+      </p:sp>
+      <p:sp>
+        <p:nvSpPr>
+          <p:cNvPr id="27" name="Rounded Rectangle 26"/>
+          <p:cNvSpPr/>
+          <p:nvPr/>
+        </p:nvSpPr>
+        <p:spPr>
+          <a:xfrm>
+            <a:off x="6400800" y="1920240"/>
+            <a:ext cx="5029200" cy="4206240"/>
           </a:xfrm>
           <a:prstGeom prst="roundRect">
             <a:avLst/>
@@ -20081,829 +22057,7 @@
           <a:lstStyle/>
           <a:p>
             <a:pPr algn="ctr"/>
-          </a:p>
-        </p:txBody>
-      </p:sp>
-      <p:sp>
-        <p:nvSpPr>
-          <p:cNvPr id="7" name="Rectangle 6"/>
-          <p:cNvSpPr/>
-          <p:nvPr/>
-        </p:nvSpPr>
-        <p:spPr>
-          <a:xfrm>
-            <a:off x="4663440" y="1965960"/>
-            <a:ext cx="1005840" cy="320040"/>
-          </a:xfrm>
-          <a:prstGeom prst="rect">
-            <a:avLst/>
-          </a:prstGeom>
-          <a:solidFill>
-            <a:srgbClr val="E74C3C"/>
-          </a:solidFill>
-          <a:ln>
-            <a:noFill/>
-          </a:ln>
-        </p:spPr>
-        <p:style>
-          <a:lnRef idx="1">
-            <a:schemeClr val="accent1"/>
-          </a:lnRef>
-          <a:fillRef idx="3">
-            <a:schemeClr val="accent1"/>
-          </a:fillRef>
-          <a:effectRef idx="2">
-            <a:schemeClr val="accent1"/>
-          </a:effectRef>
-          <a:fontRef idx="minor">
-            <a:schemeClr val="lt1"/>
-          </a:fontRef>
-        </p:style>
-        <p:txBody>
-          <a:bodyPr rtlCol="0" anchor="ctr"/>
-          <a:lstStyle/>
-          <a:p>
-            <a:pPr algn="ctr"/>
-          </a:p>
-        </p:txBody>
-      </p:sp>
-      <p:sp>
-        <p:nvSpPr>
-          <p:cNvPr id="8" name="TextBox 7"/>
-          <p:cNvSpPr txBox="1"/>
-          <p:nvPr/>
-        </p:nvSpPr>
-        <p:spPr>
-          <a:xfrm>
-            <a:off x="4663440" y="1965960"/>
-            <a:ext cx="1005840" cy="320040"/>
-          </a:xfrm>
-          <a:prstGeom prst="rect">
-            <a:avLst/>
-          </a:prstGeom>
-          <a:noFill/>
-        </p:spPr>
-        <p:txBody>
-          <a:bodyPr wrap="square">
-            <a:spAutoFit/>
-          </a:bodyPr>
-          <a:lstStyle/>
-          <a:p>
-            <a:pPr algn="ctr">
-              <a:defRPr sz="1100" b="0">
-                <a:solidFill>
-                  <a:srgbClr val="FFFFFF"/>
-                </a:solidFill>
-              </a:defRPr>
-            </a:pPr>
-            <a:r>
-              <a:t>~1200 token</a:t>
-            </a:r>
-          </a:p>
-        </p:txBody>
-      </p:sp>
-      <p:sp>
-        <p:nvSpPr>
-          <p:cNvPr id="9" name="TextBox 8"/>
-          <p:cNvSpPr txBox="1"/>
-          <p:nvPr/>
-        </p:nvSpPr>
-        <p:spPr>
-          <a:xfrm>
-            <a:off x="1005840" y="2011680"/>
-            <a:ext cx="3474720" cy="320040"/>
-          </a:xfrm>
-          <a:prstGeom prst="rect">
-            <a:avLst/>
-          </a:prstGeom>
-          <a:noFill/>
-        </p:spPr>
-        <p:txBody>
-          <a:bodyPr wrap="square">
-            <a:spAutoFit/>
-          </a:bodyPr>
-          <a:lstStyle/>
-          <a:p>
-            <a:pPr algn="l">
-              <a:defRPr sz="1600" b="1">
-                <a:solidFill>
-                  <a:srgbClr val="E74C3C"/>
-                </a:solidFill>
-              </a:defRPr>
-            </a:pPr>
-            <a:r>
-              <a:t>8种交易模式说明</a:t>
-            </a:r>
-          </a:p>
-        </p:txBody>
-      </p:sp>
-      <p:sp>
-        <p:nvSpPr>
-          <p:cNvPr id="10" name="TextBox 9"/>
-          <p:cNvSpPr txBox="1"/>
-          <p:nvPr/>
-        </p:nvSpPr>
-        <p:spPr>
-          <a:xfrm>
-            <a:off x="1005840" y="2377440"/>
-            <a:ext cx="4572000" cy="457200"/>
-          </a:xfrm>
-          <a:prstGeom prst="rect">
-            <a:avLst/>
-          </a:prstGeom>
-          <a:noFill/>
-        </p:spPr>
-        <p:txBody>
-          <a:bodyPr wrap="square">
-            <a:spAutoFit/>
-          </a:bodyPr>
-          <a:lstStyle/>
-          <a:p>
-            <a:pPr algn="l">
-              <a:defRPr sz="1300" b="0">
-                <a:solidFill>
-                  <a:srgbClr val="2C3E50"/>
-                </a:solidFill>
-              </a:defRPr>
-            </a:pPr>
-            <a:r>
-              <a:t>浦发数据集文档：3正常+5风险模式</a:t>
-            </a:r>
-            <a:br/>
-            <a:r>
-              <a:t>金额/时间/交易模式/特殊条件</a:t>
-            </a:r>
-          </a:p>
-        </p:txBody>
-      </p:sp>
-      <p:sp>
-        <p:nvSpPr>
-          <p:cNvPr id="11" name="Rounded Rectangle 10"/>
-          <p:cNvSpPr/>
-          <p:nvPr/>
-        </p:nvSpPr>
-        <p:spPr>
-          <a:xfrm>
-            <a:off x="731520" y="2971800"/>
-            <a:ext cx="5029200" cy="914400"/>
-          </a:xfrm>
-          <a:prstGeom prst="roundRect">
-            <a:avLst/>
-          </a:prstGeom>
-          <a:solidFill>
-            <a:srgbClr val="FFFFFF"/>
-          </a:solidFill>
-          <a:ln w="12700">
-            <a:solidFill>
-              <a:srgbClr val="4F8EF7"/>
-            </a:solidFill>
-          </a:ln>
-        </p:spPr>
-        <p:style>
-          <a:lnRef idx="1">
-            <a:schemeClr val="accent1"/>
-          </a:lnRef>
-          <a:fillRef idx="3">
-            <a:schemeClr val="accent1"/>
-          </a:fillRef>
-          <a:effectRef idx="2">
-            <a:schemeClr val="accent1"/>
-          </a:effectRef>
-          <a:fontRef idx="minor">
-            <a:schemeClr val="lt1"/>
-          </a:fontRef>
-        </p:style>
-        <p:txBody>
-          <a:bodyPr rtlCol="0" anchor="ctr"/>
-          <a:lstStyle/>
-          <a:p>
-            <a:pPr algn="ctr"/>
-          </a:p>
-        </p:txBody>
-      </p:sp>
-      <p:sp>
-        <p:nvSpPr>
-          <p:cNvPr id="12" name="Rectangle 11"/>
-          <p:cNvSpPr/>
-          <p:nvPr/>
-        </p:nvSpPr>
-        <p:spPr>
-          <a:xfrm>
-            <a:off x="4663440" y="3017520"/>
-            <a:ext cx="1005840" cy="320040"/>
-          </a:xfrm>
-          <a:prstGeom prst="rect">
-            <a:avLst/>
-          </a:prstGeom>
-          <a:solidFill>
-            <a:srgbClr val="4F8EF7"/>
-          </a:solidFill>
-          <a:ln>
-            <a:noFill/>
-          </a:ln>
-        </p:spPr>
-        <p:style>
-          <a:lnRef idx="1">
-            <a:schemeClr val="accent1"/>
-          </a:lnRef>
-          <a:fillRef idx="3">
-            <a:schemeClr val="accent1"/>
-          </a:fillRef>
-          <a:effectRef idx="2">
-            <a:schemeClr val="accent1"/>
-          </a:effectRef>
-          <a:fontRef idx="minor">
-            <a:schemeClr val="lt1"/>
-          </a:fontRef>
-        </p:style>
-        <p:txBody>
-          <a:bodyPr rtlCol="0" anchor="ctr"/>
-          <a:lstStyle/>
-          <a:p>
-            <a:pPr algn="ctr"/>
-          </a:p>
-        </p:txBody>
-      </p:sp>
-      <p:sp>
-        <p:nvSpPr>
-          <p:cNvPr id="13" name="TextBox 12"/>
-          <p:cNvSpPr txBox="1"/>
-          <p:nvPr/>
-        </p:nvSpPr>
-        <p:spPr>
-          <a:xfrm>
-            <a:off x="4663440" y="3017520"/>
-            <a:ext cx="1005840" cy="320040"/>
-          </a:xfrm>
-          <a:prstGeom prst="rect">
-            <a:avLst/>
-          </a:prstGeom>
-          <a:noFill/>
-        </p:spPr>
-        <p:txBody>
-          <a:bodyPr wrap="square">
-            <a:spAutoFit/>
-          </a:bodyPr>
-          <a:lstStyle/>
-          <a:p>
-            <a:pPr algn="ctr">
-              <a:defRPr sz="1100" b="0">
-                <a:solidFill>
-                  <a:srgbClr val="FFFFFF"/>
-                </a:solidFill>
-              </a:defRPr>
-            </a:pPr>
-            <a:r>
-              <a:t>~800 token</a:t>
-            </a:r>
-          </a:p>
-        </p:txBody>
-      </p:sp>
-      <p:sp>
-        <p:nvSpPr>
-          <p:cNvPr id="14" name="TextBox 13"/>
-          <p:cNvSpPr txBox="1"/>
-          <p:nvPr/>
-        </p:nvSpPr>
-        <p:spPr>
-          <a:xfrm>
-            <a:off x="1005840" y="3063240"/>
-            <a:ext cx="3474720" cy="320040"/>
-          </a:xfrm>
-          <a:prstGeom prst="rect">
-            <a:avLst/>
-          </a:prstGeom>
-          <a:noFill/>
-        </p:spPr>
-        <p:txBody>
-          <a:bodyPr wrap="square">
-            <a:spAutoFit/>
-          </a:bodyPr>
-          <a:lstStyle/>
-          <a:p>
-            <a:pPr algn="l">
-              <a:defRPr sz="1600" b="1">
-                <a:solidFill>
-                  <a:srgbClr val="4F8EF7"/>
-                </a:solidFill>
-              </a:defRPr>
-            </a:pPr>
-            <a:r>
-              <a:t>专家访谈</a:t>
-            </a:r>
-          </a:p>
-        </p:txBody>
-      </p:sp>
-      <p:sp>
-        <p:nvSpPr>
-          <p:cNvPr id="15" name="TextBox 14"/>
-          <p:cNvSpPr txBox="1"/>
-          <p:nvPr/>
-        </p:nvSpPr>
-        <p:spPr>
-          <a:xfrm>
-            <a:off x="1005840" y="3429000"/>
-            <a:ext cx="4572000" cy="457200"/>
-          </a:xfrm>
-          <a:prstGeom prst="rect">
-            <a:avLst/>
-          </a:prstGeom>
-          <a:noFill/>
-        </p:spPr>
-        <p:txBody>
-          <a:bodyPr wrap="square">
-            <a:spAutoFit/>
-          </a:bodyPr>
-          <a:lstStyle/>
-          <a:p>
-            <a:pPr algn="l">
-              <a:defRPr sz="1300" b="0">
-                <a:solidFill>
-                  <a:srgbClr val="2C3E50"/>
-                </a:solidFill>
-              </a:defRPr>
-            </a:pPr>
-            <a:r>
-              <a:t>4 类洗钱模式详细描述</a:t>
-            </a:r>
-            <a:br/>
-            <a:r>
-              <a:t>薅羊毛/线下跑分/线上跑分/商户收款码</a:t>
-            </a:r>
-          </a:p>
-        </p:txBody>
-      </p:sp>
-      <p:sp>
-        <p:nvSpPr>
-          <p:cNvPr id="16" name="Rounded Rectangle 15"/>
-          <p:cNvSpPr/>
-          <p:nvPr/>
-        </p:nvSpPr>
-        <p:spPr>
-          <a:xfrm>
-            <a:off x="731520" y="4023360"/>
-            <a:ext cx="5029200" cy="914400"/>
-          </a:xfrm>
-          <a:prstGeom prst="roundRect">
-            <a:avLst/>
-          </a:prstGeom>
-          <a:solidFill>
-            <a:srgbClr val="FFFFFF"/>
-          </a:solidFill>
-          <a:ln w="12700">
-            <a:solidFill>
-              <a:srgbClr val="2ECC71"/>
-            </a:solidFill>
-          </a:ln>
-        </p:spPr>
-        <p:style>
-          <a:lnRef idx="1">
-            <a:schemeClr val="accent1"/>
-          </a:lnRef>
-          <a:fillRef idx="3">
-            <a:schemeClr val="accent1"/>
-          </a:fillRef>
-          <a:effectRef idx="2">
-            <a:schemeClr val="accent1"/>
-          </a:effectRef>
-          <a:fontRef idx="minor">
-            <a:schemeClr val="lt1"/>
-          </a:fontRef>
-        </p:style>
-        <p:txBody>
-          <a:bodyPr rtlCol="0" anchor="ctr"/>
-          <a:lstStyle/>
-          <a:p>
-            <a:pPr algn="ctr"/>
-          </a:p>
-        </p:txBody>
-      </p:sp>
-      <p:sp>
-        <p:nvSpPr>
-          <p:cNvPr id="17" name="Rectangle 16"/>
-          <p:cNvSpPr/>
-          <p:nvPr/>
-        </p:nvSpPr>
-        <p:spPr>
-          <a:xfrm>
-            <a:off x="4663440" y="4069080"/>
-            <a:ext cx="1005840" cy="320040"/>
-          </a:xfrm>
-          <a:prstGeom prst="rect">
-            <a:avLst/>
-          </a:prstGeom>
-          <a:solidFill>
-            <a:srgbClr val="2ECC71"/>
-          </a:solidFill>
-          <a:ln>
-            <a:noFill/>
-          </a:ln>
-        </p:spPr>
-        <p:style>
-          <a:lnRef idx="1">
-            <a:schemeClr val="accent1"/>
-          </a:lnRef>
-          <a:fillRef idx="3">
-            <a:schemeClr val="accent1"/>
-          </a:fillRef>
-          <a:effectRef idx="2">
-            <a:schemeClr val="accent1"/>
-          </a:effectRef>
-          <a:fontRef idx="minor">
-            <a:schemeClr val="lt1"/>
-          </a:fontRef>
-        </p:style>
-        <p:txBody>
-          <a:bodyPr rtlCol="0" anchor="ctr"/>
-          <a:lstStyle/>
-          <a:p>
-            <a:pPr algn="ctr"/>
-          </a:p>
-        </p:txBody>
-      </p:sp>
-      <p:sp>
-        <p:nvSpPr>
-          <p:cNvPr id="18" name="TextBox 17"/>
-          <p:cNvSpPr txBox="1"/>
-          <p:nvPr/>
-        </p:nvSpPr>
-        <p:spPr>
-          <a:xfrm>
-            <a:off x="4663440" y="4069080"/>
-            <a:ext cx="1005840" cy="320040"/>
-          </a:xfrm>
-          <a:prstGeom prst="rect">
-            <a:avLst/>
-          </a:prstGeom>
-          <a:noFill/>
-        </p:spPr>
-        <p:txBody>
-          <a:bodyPr wrap="square">
-            <a:spAutoFit/>
-          </a:bodyPr>
-          <a:lstStyle/>
-          <a:p>
-            <a:pPr algn="ctr">
-              <a:defRPr sz="1100" b="0">
-                <a:solidFill>
-                  <a:srgbClr val="FFFFFF"/>
-                </a:solidFill>
-              </a:defRPr>
-            </a:pPr>
-            <a:r>
-              <a:t>~1000 token</a:t>
-            </a:r>
-          </a:p>
-        </p:txBody>
-      </p:sp>
-      <p:sp>
-        <p:nvSpPr>
-          <p:cNvPr id="19" name="TextBox 18"/>
-          <p:cNvSpPr txBox="1"/>
-          <p:nvPr/>
-        </p:nvSpPr>
-        <p:spPr>
-          <a:xfrm>
-            <a:off x="1005840" y="4114800"/>
-            <a:ext cx="3474720" cy="320040"/>
-          </a:xfrm>
-          <a:prstGeom prst="rect">
-            <a:avLst/>
-          </a:prstGeom>
-          <a:noFill/>
-        </p:spPr>
-        <p:txBody>
-          <a:bodyPr wrap="square">
-            <a:spAutoFit/>
-          </a:bodyPr>
-          <a:lstStyle/>
-          <a:p>
-            <a:pPr algn="l">
-              <a:defRPr sz="1600" b="1">
-                <a:solidFill>
-                  <a:srgbClr val="2ECC71"/>
-                </a:solidFill>
-              </a:defRPr>
-            </a:pPr>
-            <a:r>
-              <a:t>可疑交易识别点</a:t>
-            </a:r>
-          </a:p>
-        </p:txBody>
-      </p:sp>
-      <p:sp>
-        <p:nvSpPr>
-          <p:cNvPr id="20" name="TextBox 19"/>
-          <p:cNvSpPr txBox="1"/>
-          <p:nvPr/>
-        </p:nvSpPr>
-        <p:spPr>
-          <a:xfrm>
-            <a:off x="1005840" y="4480560"/>
-            <a:ext cx="4572000" cy="457200"/>
-          </a:xfrm>
-          <a:prstGeom prst="rect">
-            <a:avLst/>
-          </a:prstGeom>
-          <a:noFill/>
-        </p:spPr>
-        <p:txBody>
-          <a:bodyPr wrap="square">
-            <a:spAutoFit/>
-          </a:bodyPr>
-          <a:lstStyle/>
-          <a:p>
-            <a:pPr algn="l">
-              <a:defRPr sz="1300" b="0">
-                <a:solidFill>
-                  <a:srgbClr val="2C3E50"/>
-                </a:solidFill>
-              </a:defRPr>
-            </a:pPr>
-            <a:r>
-              <a:t>12 类 200+ 个识别点</a:t>
-            </a:r>
-            <a:br/>
-            <a:r>
-              <a:t>压缩为每类 top-3（36 条）</a:t>
-            </a:r>
-          </a:p>
-        </p:txBody>
-      </p:sp>
-      <p:sp>
-        <p:nvSpPr>
-          <p:cNvPr id="21" name="Rounded Rectangle 20"/>
-          <p:cNvSpPr/>
-          <p:nvPr/>
-        </p:nvSpPr>
-        <p:spPr>
-          <a:xfrm>
-            <a:off x="731520" y="5074920"/>
-            <a:ext cx="5029200" cy="914400"/>
-          </a:xfrm>
-          <a:prstGeom prst="roundRect">
-            <a:avLst/>
-          </a:prstGeom>
-          <a:solidFill>
-            <a:srgbClr val="FFFFFF"/>
-          </a:solidFill>
-          <a:ln w="12700">
-            <a:solidFill>
-              <a:srgbClr val="F39C12"/>
-            </a:solidFill>
-          </a:ln>
-        </p:spPr>
-        <p:style>
-          <a:lnRef idx="1">
-            <a:schemeClr val="accent1"/>
-          </a:lnRef>
-          <a:fillRef idx="3">
-            <a:schemeClr val="accent1"/>
-          </a:fillRef>
-          <a:effectRef idx="2">
-            <a:schemeClr val="accent1"/>
-          </a:effectRef>
-          <a:fontRef idx="minor">
-            <a:schemeClr val="lt1"/>
-          </a:fontRef>
-        </p:style>
-        <p:txBody>
-          <a:bodyPr rtlCol="0" anchor="ctr"/>
-          <a:lstStyle/>
-          <a:p>
-            <a:pPr algn="ctr"/>
-          </a:p>
-        </p:txBody>
-      </p:sp>
-      <p:sp>
-        <p:nvSpPr>
-          <p:cNvPr id="22" name="Rectangle 21"/>
-          <p:cNvSpPr/>
-          <p:nvPr/>
-        </p:nvSpPr>
-        <p:spPr>
-          <a:xfrm>
-            <a:off x="4663440" y="5120640"/>
-            <a:ext cx="1005840" cy="320040"/>
-          </a:xfrm>
-          <a:prstGeom prst="rect">
-            <a:avLst/>
-          </a:prstGeom>
-          <a:solidFill>
-            <a:srgbClr val="F39C12"/>
-          </a:solidFill>
-          <a:ln>
-            <a:noFill/>
-          </a:ln>
-        </p:spPr>
-        <p:style>
-          <a:lnRef idx="1">
-            <a:schemeClr val="accent1"/>
-          </a:lnRef>
-          <a:fillRef idx="3">
-            <a:schemeClr val="accent1"/>
-          </a:fillRef>
-          <a:effectRef idx="2">
-            <a:schemeClr val="accent1"/>
-          </a:effectRef>
-          <a:fontRef idx="minor">
-            <a:schemeClr val="lt1"/>
-          </a:fontRef>
-        </p:style>
-        <p:txBody>
-          <a:bodyPr rtlCol="0" anchor="ctr"/>
-          <a:lstStyle/>
-          <a:p>
-            <a:pPr algn="ctr"/>
-          </a:p>
-        </p:txBody>
-      </p:sp>
-      <p:sp>
-        <p:nvSpPr>
-          <p:cNvPr id="23" name="TextBox 22"/>
-          <p:cNvSpPr txBox="1"/>
-          <p:nvPr/>
-        </p:nvSpPr>
-        <p:spPr>
-          <a:xfrm>
-            <a:off x="4663440" y="5120640"/>
-            <a:ext cx="1005840" cy="320040"/>
-          </a:xfrm>
-          <a:prstGeom prst="rect">
-            <a:avLst/>
-          </a:prstGeom>
-          <a:noFill/>
-        </p:spPr>
-        <p:txBody>
-          <a:bodyPr wrap="square">
-            <a:spAutoFit/>
-          </a:bodyPr>
-          <a:lstStyle/>
-          <a:p>
-            <a:pPr algn="ctr">
-              <a:defRPr sz="1100" b="0">
-                <a:solidFill>
-                  <a:srgbClr val="FFFFFF"/>
-                </a:solidFill>
-              </a:defRPr>
-            </a:pPr>
-            <a:r>
-              <a:t>~1000 token</a:t>
-            </a:r>
-          </a:p>
-        </p:txBody>
-      </p:sp>
-      <p:sp>
-        <p:nvSpPr>
-          <p:cNvPr id="24" name="TextBox 23"/>
-          <p:cNvSpPr txBox="1"/>
-          <p:nvPr/>
-        </p:nvSpPr>
-        <p:spPr>
-          <a:xfrm>
-            <a:off x="1005840" y="5166360"/>
-            <a:ext cx="3474720" cy="320040"/>
-          </a:xfrm>
-          <a:prstGeom prst="rect">
-            <a:avLst/>
-          </a:prstGeom>
-          <a:noFill/>
-        </p:spPr>
-        <p:txBody>
-          <a:bodyPr wrap="square">
-            <a:spAutoFit/>
-          </a:bodyPr>
-          <a:lstStyle/>
-          <a:p>
-            <a:pPr algn="l">
-              <a:defRPr sz="1600" b="1">
-                <a:solidFill>
-                  <a:srgbClr val="F39C12"/>
-                </a:solidFill>
-              </a:defRPr>
-            </a:pPr>
-            <a:r>
-              <a:t>风险分类表+检测规则</a:t>
-            </a:r>
-          </a:p>
-        </p:txBody>
-      </p:sp>
-      <p:sp>
-        <p:nvSpPr>
-          <p:cNvPr id="25" name="TextBox 24"/>
-          <p:cNvSpPr txBox="1"/>
-          <p:nvPr/>
-        </p:nvSpPr>
-        <p:spPr>
-          <a:xfrm>
-            <a:off x="1005840" y="5532120"/>
-            <a:ext cx="4572000" cy="457200"/>
-          </a:xfrm>
-          <a:prstGeom prst="rect">
-            <a:avLst/>
-          </a:prstGeom>
-          <a:noFill/>
-        </p:spPr>
-        <p:txBody>
-          <a:bodyPr wrap="square">
-            <a:spAutoFit/>
-          </a:bodyPr>
-          <a:lstStyle/>
-          <a:p>
-            <a:pPr algn="l">
-              <a:defRPr sz="1300" b="0">
-                <a:solidFill>
-                  <a:srgbClr val="2C3E50"/>
-                </a:solidFill>
-              </a:defRPr>
-            </a:pPr>
-            <a:r>
-              <a:t>38 个风险指标(4维度) + 15 条种子规则</a:t>
-            </a:r>
-            <a:br/>
-            <a:r>
-              <a:t>→ Python 函数示例</a:t>
-            </a:r>
-          </a:p>
-        </p:txBody>
-      </p:sp>
-      <p:sp>
-        <p:nvSpPr>
-          <p:cNvPr id="26" name="TextBox 25"/>
-          <p:cNvSpPr txBox="1"/>
-          <p:nvPr/>
-        </p:nvSpPr>
-        <p:spPr>
-          <a:xfrm>
-            <a:off x="6400800" y="1371600"/>
-            <a:ext cx="5029200" cy="457200"/>
-          </a:xfrm>
-          <a:prstGeom prst="rect">
-            <a:avLst/>
-          </a:prstGeom>
-          <a:noFill/>
-        </p:spPr>
-        <p:txBody>
-          <a:bodyPr wrap="square">
-            <a:spAutoFit/>
-          </a:bodyPr>
-          <a:lstStyle/>
-          <a:p>
-            <a:pPr algn="l">
-              <a:defRPr sz="2000" b="1">
-                <a:solidFill>
-                  <a:srgbClr val="2C3E50"/>
-                </a:solidFill>
-              </a:defRPr>
-            </a:pPr>
-            <a:r>
-              <a:t>人工基线 40+ 特征的关键缺口</a:t>
-            </a:r>
-          </a:p>
-        </p:txBody>
-      </p:sp>
-      <p:sp>
-        <p:nvSpPr>
-          <p:cNvPr id="27" name="Rounded Rectangle 26"/>
-          <p:cNvSpPr/>
-          <p:nvPr/>
-        </p:nvSpPr>
-        <p:spPr>
-          <a:xfrm>
-            <a:off x="6400800" y="1920240"/>
-            <a:ext cx="5029200" cy="4206240"/>
-          </a:xfrm>
-          <a:prstGeom prst="roundRect">
-            <a:avLst/>
-          </a:prstGeom>
-          <a:solidFill>
-            <a:srgbClr val="FFFFFF"/>
-          </a:solidFill>
-          <a:ln w="12700">
-            <a:solidFill>
-              <a:srgbClr val="E74C3C"/>
-            </a:solidFill>
-          </a:ln>
-        </p:spPr>
-        <p:style>
-          <a:lnRef idx="1">
-            <a:schemeClr val="accent1"/>
-          </a:lnRef>
-          <a:fillRef idx="3">
-            <a:schemeClr val="accent1"/>
-          </a:fillRef>
-          <a:effectRef idx="2">
-            <a:schemeClr val="accent1"/>
-          </a:effectRef>
-          <a:fontRef idx="minor">
-            <a:schemeClr val="lt1"/>
-          </a:fontRef>
-        </p:style>
-        <p:txBody>
-          <a:bodyPr rtlCol="0" anchor="ctr"/>
-          <a:lstStyle/>
-          <a:p>
-            <a:pPr algn="ctr"/>
+            <a:endParaRPr/>
           </a:p>
         </p:txBody>
       </p:sp>
@@ -20916,7 +22070,7 @@
         <p:spPr>
           <a:xfrm>
             <a:off x="6675120" y="2011680"/>
-            <a:ext cx="4572000" cy="4023360"/>
+            <a:ext cx="4572000" cy="2062103"/>
           </a:xfrm>
           <a:prstGeom prst="rect">
             <a:avLst/>
@@ -20940,7 +22094,24 @@
               </a:defRPr>
             </a:pPr>
             <a:r>
-              <a:t>  transaction_motif / transaction_mode 完全未使用</a:t>
+              <a:rPr dirty="0"/>
+              <a:t>  </a:t>
+            </a:r>
+            <a:r>
+              <a:rPr dirty="0" err="1"/>
+              <a:t>设备</a:t>
+            </a:r>
+            <a:r>
+              <a:rPr dirty="0"/>
+              <a:t>/IP </a:t>
+            </a:r>
+            <a:r>
+              <a:rPr dirty="0" err="1"/>
+              <a:t>交易级特征未使用（洗钱强信号</a:t>
+            </a:r>
+            <a:r>
+              <a:rPr dirty="0"/>
+              <a:t>）</a:t>
             </a:r>
           </a:p>
           <a:p>
@@ -20955,7 +22126,24 @@
               </a:defRPr>
             </a:pPr>
             <a:r>
-              <a:t>  设备/IP 交易级特征未使用（洗钱强信号）</a:t>
+              <a:rPr dirty="0"/>
+              <a:t>  </a:t>
+            </a:r>
+            <a:r>
+              <a:rPr dirty="0" err="1"/>
+              <a:t>图拓扑高阶特征缺失（无</a:t>
+            </a:r>
+            <a:r>
+              <a:rPr dirty="0"/>
+              <a:t> PageRank </a:t>
+            </a:r>
+            <a:r>
+              <a:rPr dirty="0" err="1"/>
+              <a:t>等</a:t>
+            </a:r>
+            <a:r>
+              <a:rPr dirty="0"/>
+              <a:t>）</a:t>
             </a:r>
           </a:p>
           <a:p>
@@ -20970,7 +22158,16 @@
               </a:defRPr>
             </a:pPr>
             <a:r>
-              <a:t>  图拓扑高阶特征缺失（无 PageRank 等）</a:t>
+              <a:rPr dirty="0"/>
+              <a:t>  </a:t>
+            </a:r>
+            <a:r>
+              <a:rPr dirty="0" err="1"/>
+              <a:t>销户模块完全未实现（快速销户是关键信号</a:t>
+            </a:r>
+            <a:r>
+              <a:rPr dirty="0"/>
+              <a:t>）</a:t>
             </a:r>
           </a:p>
           <a:p>
@@ -20985,7 +22182,32 @@
               </a:defRPr>
             </a:pPr>
             <a:r>
-              <a:t>  销户模块完全未实现（快速销户是关键信号）</a:t>
+              <a:rPr dirty="0"/>
+              <a:t>  </a:t>
+            </a:r>
+            <a:r>
+              <a:rPr dirty="0" err="1"/>
+              <a:t>时间窗口仅</a:t>
+            </a:r>
+            <a:r>
+              <a:rPr dirty="0"/>
+              <a:t> 1H（无日/</a:t>
+            </a:r>
+            <a:r>
+              <a:rPr dirty="0" err="1"/>
+              <a:t>周</a:t>
+            </a:r>
+            <a:r>
+              <a:rPr dirty="0"/>
+              <a:t>/</a:t>
+            </a:r>
+            <a:r>
+              <a:rPr dirty="0" err="1"/>
+              <a:t>月维度</a:t>
+            </a:r>
+            <a:r>
+              <a:rPr dirty="0"/>
+              <a:t>）</a:t>
             </a:r>
           </a:p>
           <a:p>
@@ -21000,7 +22222,32 @@
               </a:defRPr>
             </a:pPr>
             <a:r>
-              <a:t>  时间窗口仅 1H（无日/周/月维度）</a:t>
+              <a:rPr dirty="0"/>
+              <a:t>  </a:t>
+            </a:r>
+            <a:r>
+              <a:rPr lang="zh-CN" altLang="en-US" dirty="0"/>
+              <a:t>数字货币</a:t>
+            </a:r>
+            <a:r>
+              <a:rPr dirty="0" err="1"/>
+              <a:t>知识特征缺失</a:t>
+            </a:r>
+            <a:r>
+              <a:rPr dirty="0"/>
+              <a:t>（</a:t>
+            </a:r>
+            <a:r>
+              <a:rPr lang="zh-CN" altLang="en-US" dirty="0"/>
+              <a:t>钱包等级、</a:t>
+            </a:r>
+            <a:r>
+              <a:rPr dirty="0" err="1"/>
+              <a:t>限额利用率</a:t>
+            </a:r>
+            <a:r>
+              <a:rPr dirty="0"/>
+              <a:t>）</a:t>
             </a:r>
           </a:p>
           <a:p>
@@ -21015,7 +22262,16 @@
               </a:defRPr>
             </a:pPr>
             <a:r>
-              <a:t>  领域知识特征缺失（整数金额、限额利用率）</a:t>
+              <a:rPr dirty="0"/>
+              <a:t>  </a:t>
+            </a:r>
+            <a:r>
+              <a:rPr dirty="0" err="1"/>
+              <a:t>行为序列模式缺失（沉睡-爆发等</a:t>
+            </a:r>
+            <a:r>
+              <a:rPr dirty="0"/>
+              <a:t>）</a:t>
             </a:r>
           </a:p>
           <a:p>
@@ -21030,23 +22286,14 @@
               </a:defRPr>
             </a:pPr>
             <a:r>
-              <a:t>  行为序列模式缺失（沉睡-爆发等）</a:t>
-            </a:r>
-          </a:p>
-          <a:p>
-            <a:pPr>
-              <a:spcAft>
-                <a:spcPts val="600"/>
-              </a:spcAft>
-              <a:defRPr sz="1400">
-                <a:solidFill>
-                  <a:srgbClr val="2C3E50"/>
-                </a:solidFill>
-              </a:defRPr>
-            </a:pPr>
-            <a:r>
-              <a:t>  对手风险传播缺失</a:t>
-            </a:r>
+              <a:rPr dirty="0"/>
+              <a:t>  </a:t>
+            </a:r>
+            <a:r>
+              <a:rPr dirty="0" err="1"/>
+              <a:t>对手风险传播缺失</a:t>
+            </a:r>
+            <a:endParaRPr dirty="0"/>
           </a:p>
         </p:txBody>
       </p:sp>
@@ -21117,6 +22364,53 @@
             <a:r>
               <a:t>6/20</a:t>
             </a:r>
+          </a:p>
+        </p:txBody>
+      </p:sp>
+      <p:sp>
+        <p:nvSpPr>
+          <p:cNvPr id="31" name="TextBox 23">
+            <a:extLst>
+              <a:ext uri="{FF2B5EF4-FFF2-40B4-BE49-F238E27FC236}">
+                <a16:creationId xmlns:a16="http://schemas.microsoft.com/office/drawing/2014/main" id="{DD6FD9B4-3A93-00BE-09D0-5B11B1A6F702}"/>
+              </a:ext>
+            </a:extLst>
+          </p:cNvPr>
+          <p:cNvSpPr txBox="1"/>
+          <p:nvPr/>
+        </p:nvSpPr>
+        <p:spPr>
+          <a:xfrm>
+            <a:off x="1075649" y="6172200"/>
+            <a:ext cx="3885708" cy="338554"/>
+          </a:xfrm>
+          <a:prstGeom prst="rect">
+            <a:avLst/>
+          </a:prstGeom>
+          <a:noFill/>
+        </p:spPr>
+        <p:txBody>
+          <a:bodyPr wrap="square">
+            <a:spAutoFit/>
+          </a:bodyPr>
+          <a:lstStyle/>
+          <a:p>
+            <a:pPr algn="l">
+              <a:defRPr sz="1600" b="1">
+                <a:solidFill>
+                  <a:srgbClr val="9B59B6"/>
+                </a:solidFill>
+              </a:defRPr>
+            </a:pPr>
+            <a:r>
+              <a:rPr lang="en-US" altLang="zh-CN" dirty="0"/>
+              <a:t>Paper</a:t>
+            </a:r>
+            <a:r>
+              <a:rPr lang="zh-CN" altLang="en-US" dirty="0"/>
+              <a:t>里面的知识，考虑数据是否支持 </a:t>
+            </a:r>
+            <a:endParaRPr dirty="0"/>
           </a:p>
         </p:txBody>
       </p:sp>
@@ -21129,7 +22423,7 @@
 </file>
 
 <file path=ppt/slides/slide7.xml><?xml version="1.0" encoding="utf-8"?>
-<p:sld xmlns:a="http://schemas.openxmlformats.org/drawingml/2006/main" xmlns:p="http://schemas.openxmlformats.org/presentationml/2006/main" xmlns:r="http://schemas.openxmlformats.org/officeDocument/2006/relationships">
+<p:sld xmlns:a="http://schemas.openxmlformats.org/drawingml/2006/main" xmlns:r="http://schemas.openxmlformats.org/officeDocument/2006/relationships" xmlns:p="http://schemas.openxmlformats.org/presentationml/2006/main">
   <p:cSld>
     <p:bg>
       <p:bgPr>
@@ -21145,7 +22439,14 @@
         <p:cNvGrpSpPr/>
         <p:nvPr/>
       </p:nvGrpSpPr>
-      <p:grpSpPr/>
+      <p:grpSpPr>
+        <a:xfrm>
+          <a:off x="0" y="0"/>
+          <a:ext cx="0" cy="0"/>
+          <a:chOff x="0" y="0"/>
+          <a:chExt cx="0" cy="0"/>
+        </a:xfrm>
+      </p:grpSpPr>
       <p:sp>
         <p:nvSpPr>
           <p:cNvPr id="2" name="Rectangle 1"/>
@@ -21186,6 +22487,7 @@
           <a:lstStyle/>
           <a:p>
             <a:pPr algn="ctr"/>
+            <a:endParaRPr/>
           </a:p>
         </p:txBody>
       </p:sp>
@@ -21299,6 +22601,7 @@
           <a:lstStyle/>
           <a:p>
             <a:pPr algn="ctr"/>
+            <a:endParaRPr/>
           </a:p>
         </p:txBody>
       </p:sp>
@@ -21414,6 +22717,7 @@
           <a:lstStyle/>
           <a:p>
             <a:pPr algn="ctr"/>
+            <a:endParaRPr/>
           </a:p>
         </p:txBody>
       </p:sp>
@@ -21500,6 +22804,7 @@
           <a:lstStyle/>
           <a:p>
             <a:pPr algn="ctr"/>
+            <a:endParaRPr/>
           </a:p>
         </p:txBody>
       </p:sp>
@@ -21615,6 +22920,7 @@
           <a:lstStyle/>
           <a:p>
             <a:pPr algn="ctr"/>
+            <a:endParaRPr/>
           </a:p>
         </p:txBody>
       </p:sp>
@@ -21701,6 +23007,7 @@
           <a:lstStyle/>
           <a:p>
             <a:pPr algn="ctr"/>
+            <a:endParaRPr/>
           </a:p>
         </p:txBody>
       </p:sp>
@@ -21816,6 +23123,7 @@
           <a:lstStyle/>
           <a:p>
             <a:pPr algn="ctr"/>
+            <a:endParaRPr/>
           </a:p>
         </p:txBody>
       </p:sp>
@@ -21902,6 +23210,7 @@
           <a:lstStyle/>
           <a:p>
             <a:pPr algn="ctr"/>
+            <a:endParaRPr/>
           </a:p>
         </p:txBody>
       </p:sp>
@@ -22017,6 +23326,7 @@
           <a:lstStyle/>
           <a:p>
             <a:pPr algn="ctr"/>
+            <a:endParaRPr/>
           </a:p>
         </p:txBody>
       </p:sp>
@@ -22103,6 +23413,7 @@
           <a:lstStyle/>
           <a:p>
             <a:pPr algn="ctr"/>
+            <a:endParaRPr/>
           </a:p>
         </p:txBody>
       </p:sp>
@@ -22218,6 +23529,7 @@
           <a:lstStyle/>
           <a:p>
             <a:pPr algn="ctr"/>
+            <a:endParaRPr/>
           </a:p>
         </p:txBody>
       </p:sp>
@@ -22304,6 +23616,7 @@
           <a:lstStyle/>
           <a:p>
             <a:pPr algn="ctr"/>
+            <a:endParaRPr/>
           </a:p>
         </p:txBody>
       </p:sp>
@@ -22419,6 +23732,7 @@
           <a:lstStyle/>
           <a:p>
             <a:pPr algn="ctr"/>
+            <a:endParaRPr/>
           </a:p>
         </p:txBody>
       </p:sp>
@@ -22509,7 +23823,7 @@
 </file>
 
 <file path=ppt/slides/slide8.xml><?xml version="1.0" encoding="utf-8"?>
-<p:sld xmlns:a="http://schemas.openxmlformats.org/drawingml/2006/main" xmlns:p="http://schemas.openxmlformats.org/presentationml/2006/main" xmlns:r="http://schemas.openxmlformats.org/officeDocument/2006/relationships">
+<p:sld xmlns:a="http://schemas.openxmlformats.org/drawingml/2006/main" xmlns:r="http://schemas.openxmlformats.org/officeDocument/2006/relationships" xmlns:p="http://schemas.openxmlformats.org/presentationml/2006/main">
   <p:cSld>
     <p:bg>
       <p:bgPr>
@@ -22525,7 +23839,14 @@
         <p:cNvGrpSpPr/>
         <p:nvPr/>
       </p:nvGrpSpPr>
-      <p:grpSpPr/>
+      <p:grpSpPr>
+        <a:xfrm>
+          <a:off x="0" y="0"/>
+          <a:ext cx="0" cy="0"/>
+          <a:chOff x="0" y="0"/>
+          <a:chExt cx="0" cy="0"/>
+        </a:xfrm>
+      </p:grpSpPr>
       <p:sp>
         <p:nvSpPr>
           <p:cNvPr id="2" name="Rectangle 1"/>
@@ -22566,6 +23887,7 @@
           <a:lstStyle/>
           <a:p>
             <a:pPr algn="ctr"/>
+            <a:endParaRPr/>
           </a:p>
         </p:txBody>
       </p:sp>
@@ -22716,6 +24038,7 @@
           <a:lstStyle/>
           <a:p>
             <a:pPr algn="ctr"/>
+            <a:endParaRPr/>
           </a:p>
         </p:txBody>
       </p:sp>
@@ -22880,6 +24203,7 @@
           <a:lstStyle/>
           <a:p>
             <a:pPr algn="ctr"/>
+            <a:endParaRPr/>
           </a:p>
         </p:txBody>
       </p:sp>
@@ -23005,6 +24329,7 @@
           <a:lstStyle/>
           <a:p>
             <a:pPr algn="ctr"/>
+            <a:endParaRPr/>
           </a:p>
         </p:txBody>
       </p:sp>
@@ -23038,7 +24363,7 @@
               </a:defRPr>
             </a:pPr>
             <a:r>
-              <a:t>我们的融合：LLM-FE 的维度岛屿并行 + MedFeat 的 SHAP 引导 + 交易模式说明 = 高效 + 有方向 + 有分工的搜索</a:t>
+              <a:t>我们的融合：LLM-FE 的多岛屿并行搜索效率 + MedFeat 的 SHAP 方向引导 = 高效且有方向的搜索</a:t>
             </a:r>
           </a:p>
         </p:txBody>
@@ -23087,7 +24412,7 @@
 </file>
 
 <file path=ppt/slides/slide9.xml><?xml version="1.0" encoding="utf-8"?>
-<p:sld xmlns:a="http://schemas.openxmlformats.org/drawingml/2006/main" xmlns:p="http://schemas.openxmlformats.org/presentationml/2006/main" xmlns:r="http://schemas.openxmlformats.org/officeDocument/2006/relationships">
+<p:sld xmlns:a="http://schemas.openxmlformats.org/drawingml/2006/main" xmlns:r="http://schemas.openxmlformats.org/officeDocument/2006/relationships" xmlns:p="http://schemas.openxmlformats.org/presentationml/2006/main">
   <p:cSld>
     <p:bg>
       <p:bgPr>
@@ -23103,7 +24428,14 @@
         <p:cNvGrpSpPr/>
         <p:nvPr/>
       </p:nvGrpSpPr>
-      <p:grpSpPr/>
+      <p:grpSpPr>
+        <a:xfrm>
+          <a:off x="0" y="0"/>
+          <a:ext cx="0" cy="0"/>
+          <a:chOff x="0" y="0"/>
+          <a:chExt cx="0" cy="0"/>
+        </a:xfrm>
+      </p:grpSpPr>
       <p:sp>
         <p:nvSpPr>
           <p:cNvPr id="2" name="Rectangle 1"/>
@@ -23144,6 +24476,7 @@
           <a:lstStyle/>
           <a:p>
             <a:pPr algn="ctr"/>
+            <a:endParaRPr/>
           </a:p>
         </p:txBody>
       </p:sp>
@@ -23257,6 +24590,7 @@
           <a:lstStyle/>
           <a:p>
             <a:pPr algn="ctr"/>
+            <a:endParaRPr/>
           </a:p>
         </p:txBody>
       </p:sp>
@@ -23337,6 +24671,7 @@
           <a:lstStyle/>
           <a:p>
             <a:pPr algn="ctr"/>
+            <a:endParaRPr/>
           </a:p>
         </p:txBody>
       </p:sp>
@@ -23370,11 +24705,11 @@
               </a:defRPr>
             </a:pPr>
             <a:r>
-              <a:t>领域知识+</a:t>
+              <a:t>领域知识</a:t>
             </a:r>
             <a:br/>
             <a:r>
-              <a:t>交易模式说明</a:t>
+              <a:t>（我们独有）</a:t>
             </a:r>
           </a:p>
         </p:txBody>
@@ -23413,7 +24748,7 @@
             </a:r>
             <a:br/>
             <a:r>
-              <a:t>+ 8种交易模式(浦发)</a:t>
+              <a:t>+ 38风险指标 + 监管规则</a:t>
             </a:r>
             <a:br/>
             <a:r>
@@ -23497,6 +24832,7 @@
           <a:lstStyle/>
           <a:p>
             <a:pPr algn="ctr"/>
+            <a:endParaRPr/>
           </a:p>
         </p:txBody>
       </p:sp>
@@ -23577,6 +24913,7 @@
           <a:lstStyle/>
           <a:p>
             <a:pPr algn="ctr"/>
+            <a:endParaRPr/>
           </a:p>
         </p:txBody>
       </p:sp>
@@ -23610,11 +24947,11 @@
               </a:defRPr>
             </a:pPr>
             <a:r>
-              <a:t>维度岛屿搜索</a:t>
+              <a:t>进化搜索引擎</a:t>
             </a:r>
             <a:br/>
             <a:r>
-              <a:t>（改进LLM-FE）</a:t>
+              <a:t>（LLM-FE）</a:t>
             </a:r>
           </a:p>
         </p:txBody>
@@ -23649,15 +24986,15 @@
               </a:defRPr>
             </a:pPr>
             <a:r>
-              <a:t>4维度岛屿并行搜索</a:t>
+              <a:t>3 岛屿并行搜索</a:t>
             </a:r>
             <a:br/>
             <a:r>
-              <a:t>金额/时间/行为/主体</a:t>
+              <a:t>Boltzmann 采样 in-context</a:t>
             </a:r>
             <a:br/>
             <a:r>
-              <a:t>Boltzmann + 失败记忆</a:t>
+              <a:t>失败记忆（MedFeat）</a:t>
             </a:r>
           </a:p>
         </p:txBody>
@@ -23737,6 +25074,7 @@
           <a:lstStyle/>
           <a:p>
             <a:pPr algn="ctr"/>
+            <a:endParaRPr/>
           </a:p>
         </p:txBody>
       </p:sp>
@@ -23817,6 +25155,7 @@
           <a:lstStyle/>
           <a:p>
             <a:pPr algn="ctr"/>
+            <a:endParaRPr/>
           </a:p>
         </p:txBody>
       </p:sp>
@@ -23977,6 +25316,7 @@
           <a:lstStyle/>
           <a:p>
             <a:pPr algn="ctr"/>
+            <a:endParaRPr/>
           </a:p>
         </p:txBody>
       </p:sp>
@@ -24057,6 +25397,7 @@
           <a:lstStyle/>
           <a:p>
             <a:pPr algn="ctr"/>
+            <a:endParaRPr/>
           </a:p>
         </p:txBody>
       </p:sp>
@@ -24137,7 +25478,7 @@
             </a:r>
             <a:br/>
             <a:r>
-              <a:t>反馈有价值/冗余维度</a:t>
+              <a:t>反馈有价值/冗余方向</a:t>
             </a:r>
           </a:p>
         </p:txBody>
@@ -24217,6 +25558,7 @@
           <a:lstStyle/>
           <a:p>
             <a:pPr algn="ctr"/>
+            <a:endParaRPr/>
           </a:p>
         </p:txBody>
       </p:sp>
@@ -24297,6 +25639,7 @@
           <a:lstStyle/>
           <a:p>
             <a:pPr algn="ctr"/>
+            <a:endParaRPr/>
           </a:p>
         </p:txBody>
       </p:sp>
@@ -24457,6 +25800,7 @@
           <a:lstStyle/>
           <a:p>
             <a:pPr algn="ctr"/>
+            <a:endParaRPr/>
           </a:p>
         </p:txBody>
       </p:sp>
@@ -24490,7 +25834,7 @@
               </a:defRPr>
             </a:pPr>
             <a:r>
-              <a:t>LLM-FE 原论文：岛屿随机分组，搜索效率高但方向盲目 → 我们改为按风险维度划分 4 岛屿</a:t>
+              <a:t>LLM-FE 提供搜索效率（多岛屿并行），但搜索方向盲目</a:t>
             </a:r>
           </a:p>
         </p:txBody>
@@ -24535,6 +25879,7 @@
           <a:lstStyle/>
           <a:p>
             <a:pPr algn="ctr"/>
+            <a:endParaRPr/>
           </a:p>
         </p:txBody>
       </p:sp>
@@ -24568,7 +25913,7 @@
               </a:defRPr>
             </a:pPr>
             <a:r>
-              <a:t>MedFeat 提供 SHAP 引导，弱势维度天然对应到具体岛屿应该加强</a:t>
+              <a:t>MedFeat 提供搜索方向（SHAP 引导），但搜索效率低（单线迭代）</a:t>
             </a:r>
           </a:p>
         </p:txBody>
@@ -24613,6 +25958,7 @@
           <a:lstStyle/>
           <a:p>
             <a:pPr algn="ctr"/>
+            <a:endParaRPr/>
           </a:p>
         </p:txBody>
       </p:sp>
@@ -24646,7 +25992,7 @@
               </a:defRPr>
             </a:pPr>
             <a:r>
-              <a:t>8 种交易模式说明（浦发文档）让 LLM 理解数据生成逻辑，大幅降低猜测成本</a:t>
+              <a:t>两者结合 = 高效且有方向的搜索</a:t>
             </a:r>
           </a:p>
         </p:txBody>
@@ -24691,6 +26037,7 @@
           <a:lstStyle/>
           <a:p>
             <a:pPr algn="ctr"/>
+            <a:endParaRPr/>
           </a:p>
         </p:txBody>
       </p:sp>
@@ -24731,7 +26078,86 @@
       </p:sp>
       <p:sp>
         <p:nvSpPr>
-          <p:cNvPr id="43" name="TextBox 42"/>
+          <p:cNvPr id="43" name="Rectangle 42"/>
+          <p:cNvSpPr/>
+          <p:nvPr/>
+        </p:nvSpPr>
+        <p:spPr>
+          <a:xfrm>
+            <a:off x="457200" y="6419088"/>
+            <a:ext cx="73152" cy="228600"/>
+          </a:xfrm>
+          <a:prstGeom prst="rect">
+            <a:avLst/>
+          </a:prstGeom>
+          <a:solidFill>
+            <a:srgbClr val="9B59B6"/>
+          </a:solidFill>
+          <a:ln>
+            <a:noFill/>
+          </a:ln>
+        </p:spPr>
+        <p:style>
+          <a:lnRef idx="1">
+            <a:schemeClr val="accent1"/>
+          </a:lnRef>
+          <a:fillRef idx="3">
+            <a:schemeClr val="accent1"/>
+          </a:fillRef>
+          <a:effectRef idx="2">
+            <a:schemeClr val="accent1"/>
+          </a:effectRef>
+          <a:fontRef idx="minor">
+            <a:schemeClr val="lt1"/>
+          </a:fontRef>
+        </p:style>
+        <p:txBody>
+          <a:bodyPr rtlCol="0" anchor="ctr"/>
+          <a:lstStyle/>
+          <a:p>
+            <a:pPr algn="ctr"/>
+            <a:endParaRPr/>
+          </a:p>
+        </p:txBody>
+      </p:sp>
+      <p:sp>
+        <p:nvSpPr>
+          <p:cNvPr id="44" name="TextBox 43"/>
+          <p:cNvSpPr txBox="1"/>
+          <p:nvPr/>
+        </p:nvSpPr>
+        <p:spPr>
+          <a:xfrm>
+            <a:off x="731520" y="6400800"/>
+            <a:ext cx="10515600" cy="274320"/>
+          </a:xfrm>
+          <a:prstGeom prst="rect">
+            <a:avLst/>
+          </a:prstGeom>
+          <a:noFill/>
+        </p:spPr>
+        <p:txBody>
+          <a:bodyPr wrap="square">
+            <a:spAutoFit/>
+          </a:bodyPr>
+          <a:lstStyle/>
+          <a:p>
+            <a:pPr algn="l">
+              <a:defRPr sz="1300" b="0">
+                <a:solidFill>
+                  <a:srgbClr val="2C3E50"/>
+                </a:solidFill>
+              </a:defRPr>
+            </a:pPr>
+            <a:r>
+              <a:t>我们的领域知识是所有论文都没有的独特信号源</a:t>
+            </a:r>
+          </a:p>
+        </p:txBody>
+      </p:sp>
+      <p:sp>
+        <p:nvSpPr>
+          <p:cNvPr id="45" name="TextBox 44"/>
           <p:cNvSpPr txBox="1"/>
           <p:nvPr/>
         </p:nvSpPr>
@@ -25090,4 +26516,299 @@
   </a:objectDefaults>
   <a:extraClrSchemeLst/>
 </a:theme>
+</file>
+
+<file path=ppt/theme/theme2.xml><?xml version="1.0" encoding="utf-8"?>
+<a:theme xmlns:a="http://schemas.openxmlformats.org/drawingml/2006/main" name="Office 主题​​">
+  <a:themeElements>
+    <a:clrScheme name="Office">
+      <a:dk1>
+        <a:sysClr val="windowText" lastClr="000000"/>
+      </a:dk1>
+      <a:lt1>
+        <a:sysClr val="window" lastClr="FFFFFF"/>
+      </a:lt1>
+      <a:dk2>
+        <a:srgbClr val="44546A"/>
+      </a:dk2>
+      <a:lt2>
+        <a:srgbClr val="E7E6E6"/>
+      </a:lt2>
+      <a:accent1>
+        <a:srgbClr val="4472C4"/>
+      </a:accent1>
+      <a:accent2>
+        <a:srgbClr val="ED7D31"/>
+      </a:accent2>
+      <a:accent3>
+        <a:srgbClr val="A5A5A5"/>
+      </a:accent3>
+      <a:accent4>
+        <a:srgbClr val="FFC000"/>
+      </a:accent4>
+      <a:accent5>
+        <a:srgbClr val="5B9BD5"/>
+      </a:accent5>
+      <a:accent6>
+        <a:srgbClr val="70AD47"/>
+      </a:accent6>
+      <a:hlink>
+        <a:srgbClr val="0563C1"/>
+      </a:hlink>
+      <a:folHlink>
+        <a:srgbClr val="954F72"/>
+      </a:folHlink>
+    </a:clrScheme>
+    <a:fontScheme name="Office">
+      <a:majorFont>
+        <a:latin typeface="等线 Light" panose="020F0302020204030204"/>
+        <a:ea typeface=""/>
+        <a:cs typeface=""/>
+        <a:font script="Jpan" typeface="游ゴシック Light"/>
+        <a:font script="Hang" typeface="맑은 고딕"/>
+        <a:font script="Hans" typeface="等线 Light"/>
+        <a:font script="Hant" typeface="新細明體"/>
+        <a:font script="Arab" typeface="Times New Roman"/>
+        <a:font script="Hebr" typeface="Times New Roman"/>
+        <a:font script="Thai" typeface="Angsana New"/>
+        <a:font script="Ethi" typeface="Nyala"/>
+        <a:font script="Beng" typeface="Vrinda"/>
+        <a:font script="Gujr" typeface="Shruti"/>
+        <a:font script="Khmr" typeface="MoolBoran"/>
+        <a:font script="Knda" typeface="Tunga"/>
+        <a:font script="Guru" typeface="Raavi"/>
+        <a:font script="Cans" typeface="Euphemia"/>
+        <a:font script="Cher" typeface="Plantagenet Cherokee"/>
+        <a:font script="Yiii" typeface="Microsoft Yi Baiti"/>
+        <a:font script="Tibt" typeface="Microsoft Himalaya"/>
+        <a:font script="Thaa" typeface="MV Boli"/>
+        <a:font script="Deva" typeface="Mangal"/>
+        <a:font script="Telu" typeface="Gautami"/>
+        <a:font script="Taml" typeface="Latha"/>
+        <a:font script="Syrc" typeface="Estrangelo Edessa"/>
+        <a:font script="Orya" typeface="Kalinga"/>
+        <a:font script="Mlym" typeface="Kartika"/>
+        <a:font script="Laoo" typeface="DokChampa"/>
+        <a:font script="Sinh" typeface="Iskoola Pota"/>
+        <a:font script="Mong" typeface="Mongolian Baiti"/>
+        <a:font script="Viet" typeface="Times New Roman"/>
+        <a:font script="Uigh" typeface="Microsoft Uighur"/>
+        <a:font script="Geor" typeface="Sylfaen"/>
+        <a:font script="Armn" typeface="Arial"/>
+        <a:font script="Bugi" typeface="Leelawadee UI"/>
+        <a:font script="Bopo" typeface="Microsoft JhengHei"/>
+        <a:font script="Java" typeface="Javanese Text"/>
+        <a:font script="Lisu" typeface="Segoe UI"/>
+        <a:font script="Mymr" typeface="Myanmar Text"/>
+        <a:font script="Nkoo" typeface="Ebrima"/>
+        <a:font script="Olck" typeface="Nirmala UI"/>
+        <a:font script="Osma" typeface="Ebrima"/>
+        <a:font script="Phag" typeface="Phagspa"/>
+        <a:font script="Syrn" typeface="Estrangelo Edessa"/>
+        <a:font script="Syrj" typeface="Estrangelo Edessa"/>
+        <a:font script="Syre" typeface="Estrangelo Edessa"/>
+        <a:font script="Sora" typeface="Nirmala UI"/>
+        <a:font script="Tale" typeface="Microsoft Tai Le"/>
+        <a:font script="Talu" typeface="Microsoft New Tai Lue"/>
+        <a:font script="Tfng" typeface="Ebrima"/>
+      </a:majorFont>
+      <a:minorFont>
+        <a:latin typeface="等线" panose="020F0502020204030204"/>
+        <a:ea typeface=""/>
+        <a:cs typeface=""/>
+        <a:font script="Jpan" typeface="游ゴシック"/>
+        <a:font script="Hang" typeface="맑은 고딕"/>
+        <a:font script="Hans" typeface="等线"/>
+        <a:font script="Hant" typeface="新細明體"/>
+        <a:font script="Arab" typeface="Arial"/>
+        <a:font script="Hebr" typeface="Arial"/>
+        <a:font script="Thai" typeface="Cordia New"/>
+        <a:font script="Ethi" typeface="Nyala"/>
+        <a:font script="Beng" typeface="Vrinda"/>
+        <a:font script="Gujr" typeface="Shruti"/>
+        <a:font script="Khmr" typeface="DaunPenh"/>
+        <a:font script="Knda" typeface="Tunga"/>
+        <a:font script="Guru" typeface="Raavi"/>
+        <a:font script="Cans" typeface="Euphemia"/>
+        <a:font script="Cher" typeface="Plantagenet Cherokee"/>
+        <a:font script="Yiii" typeface="Microsoft Yi Baiti"/>
+        <a:font script="Tibt" typeface="Microsoft Himalaya"/>
+        <a:font script="Thaa" typeface="MV Boli"/>
+        <a:font script="Deva" typeface="Mangal"/>
+        <a:font script="Telu" typeface="Gautami"/>
+        <a:font script="Taml" typeface="Latha"/>
+        <a:font script="Syrc" typeface="Estrangelo Edessa"/>
+        <a:font script="Orya" typeface="Kalinga"/>
+        <a:font script="Mlym" typeface="Kartika"/>
+        <a:font script="Laoo" typeface="DokChampa"/>
+        <a:font script="Sinh" typeface="Iskoola Pota"/>
+        <a:font script="Mong" typeface="Mongolian Baiti"/>
+        <a:font script="Viet" typeface="Arial"/>
+        <a:font script="Uigh" typeface="Microsoft Uighur"/>
+        <a:font script="Geor" typeface="Sylfaen"/>
+        <a:font script="Armn" typeface="Arial"/>
+        <a:font script="Bugi" typeface="Leelawadee UI"/>
+        <a:font script="Bopo" typeface="Microsoft JhengHei"/>
+        <a:font script="Java" typeface="Javanese Text"/>
+        <a:font script="Lisu" typeface="Segoe UI"/>
+        <a:font script="Mymr" typeface="Myanmar Text"/>
+        <a:font script="Nkoo" typeface="Ebrima"/>
+        <a:font script="Olck" typeface="Nirmala UI"/>
+        <a:font script="Osma" typeface="Ebrima"/>
+        <a:font script="Phag" typeface="Phagspa"/>
+        <a:font script="Syrn" typeface="Estrangelo Edessa"/>
+        <a:font script="Syrj" typeface="Estrangelo Edessa"/>
+        <a:font script="Syre" typeface="Estrangelo Edessa"/>
+        <a:font script="Sora" typeface="Nirmala UI"/>
+        <a:font script="Tale" typeface="Microsoft Tai Le"/>
+        <a:font script="Talu" typeface="Microsoft New Tai Lue"/>
+        <a:font script="Tfng" typeface="Ebrima"/>
+      </a:minorFont>
+    </a:fontScheme>
+    <a:fmtScheme name="Office">
+      <a:fillStyleLst>
+        <a:solidFill>
+          <a:schemeClr val="phClr"/>
+        </a:solidFill>
+        <a:gradFill rotWithShape="1">
+          <a:gsLst>
+            <a:gs pos="0">
+              <a:schemeClr val="phClr">
+                <a:lumMod val="110000"/>
+                <a:satMod val="105000"/>
+                <a:tint val="67000"/>
+              </a:schemeClr>
+            </a:gs>
+            <a:gs pos="50000">
+              <a:schemeClr val="phClr">
+                <a:lumMod val="105000"/>
+                <a:satMod val="103000"/>
+                <a:tint val="73000"/>
+              </a:schemeClr>
+            </a:gs>
+            <a:gs pos="100000">
+              <a:schemeClr val="phClr">
+                <a:lumMod val="105000"/>
+                <a:satMod val="109000"/>
+                <a:tint val="81000"/>
+              </a:schemeClr>
+            </a:gs>
+          </a:gsLst>
+          <a:lin ang="5400000" scaled="0"/>
+        </a:gradFill>
+        <a:gradFill rotWithShape="1">
+          <a:gsLst>
+            <a:gs pos="0">
+              <a:schemeClr val="phClr">
+                <a:satMod val="103000"/>
+                <a:lumMod val="102000"/>
+                <a:tint val="94000"/>
+              </a:schemeClr>
+            </a:gs>
+            <a:gs pos="50000">
+              <a:schemeClr val="phClr">
+                <a:satMod val="110000"/>
+                <a:lumMod val="100000"/>
+                <a:shade val="100000"/>
+              </a:schemeClr>
+            </a:gs>
+            <a:gs pos="100000">
+              <a:schemeClr val="phClr">
+                <a:lumMod val="99000"/>
+                <a:satMod val="120000"/>
+                <a:shade val="78000"/>
+              </a:schemeClr>
+            </a:gs>
+          </a:gsLst>
+          <a:lin ang="5400000" scaled="0"/>
+        </a:gradFill>
+      </a:fillStyleLst>
+      <a:lnStyleLst>
+        <a:ln w="6350" cap="flat" cmpd="sng" algn="ctr">
+          <a:solidFill>
+            <a:schemeClr val="phClr"/>
+          </a:solidFill>
+          <a:prstDash val="solid"/>
+          <a:miter lim="800000"/>
+        </a:ln>
+        <a:ln w="12700" cap="flat" cmpd="sng" algn="ctr">
+          <a:solidFill>
+            <a:schemeClr val="phClr"/>
+          </a:solidFill>
+          <a:prstDash val="solid"/>
+          <a:miter lim="800000"/>
+        </a:ln>
+        <a:ln w="19050" cap="flat" cmpd="sng" algn="ctr">
+          <a:solidFill>
+            <a:schemeClr val="phClr"/>
+          </a:solidFill>
+          <a:prstDash val="solid"/>
+          <a:miter lim="800000"/>
+        </a:ln>
+      </a:lnStyleLst>
+      <a:effectStyleLst>
+        <a:effectStyle>
+          <a:effectLst/>
+        </a:effectStyle>
+        <a:effectStyle>
+          <a:effectLst/>
+        </a:effectStyle>
+        <a:effectStyle>
+          <a:effectLst>
+            <a:outerShdw blurRad="57150" dist="19050" dir="5400000" algn="ctr" rotWithShape="0">
+              <a:srgbClr val="000000">
+                <a:alpha val="63000"/>
+              </a:srgbClr>
+            </a:outerShdw>
+          </a:effectLst>
+        </a:effectStyle>
+      </a:effectStyleLst>
+      <a:bgFillStyleLst>
+        <a:solidFill>
+          <a:schemeClr val="phClr"/>
+        </a:solidFill>
+        <a:solidFill>
+          <a:schemeClr val="phClr">
+            <a:tint val="95000"/>
+            <a:satMod val="170000"/>
+          </a:schemeClr>
+        </a:solidFill>
+        <a:gradFill rotWithShape="1">
+          <a:gsLst>
+            <a:gs pos="0">
+              <a:schemeClr val="phClr">
+                <a:tint val="93000"/>
+                <a:satMod val="150000"/>
+                <a:shade val="98000"/>
+                <a:lumMod val="102000"/>
+              </a:schemeClr>
+            </a:gs>
+            <a:gs pos="50000">
+              <a:schemeClr val="phClr">
+                <a:tint val="98000"/>
+                <a:satMod val="130000"/>
+                <a:shade val="90000"/>
+                <a:lumMod val="103000"/>
+              </a:schemeClr>
+            </a:gs>
+            <a:gs pos="100000">
+              <a:schemeClr val="phClr">
+                <a:shade val="63000"/>
+                <a:satMod val="120000"/>
+              </a:schemeClr>
+            </a:gs>
+          </a:gsLst>
+          <a:lin ang="5400000" scaled="0"/>
+        </a:gradFill>
+      </a:bgFillStyleLst>
+    </a:fmtScheme>
+  </a:themeElements>
+  <a:objectDefaults/>
+  <a:extraClrSchemeLst/>
+  <a:extLst>
+    <a:ext uri="{05A4C25C-085E-4340-85A3-A5531E510DB2}">
+      <thm15:themeFamily xmlns:thm15="http://schemas.microsoft.com/office/thememl/2012/main" name="Office Theme" id="{62F939B6-93AF-4DB8-9C6B-D6C7DFDC589F}" vid="{4A3C46E8-61CC-4603-A589-7422A47A8E4A}"/>
+    </a:ext>
+  </a:extLst>
+</a:theme>
 </file>